--- a/plugins/slide-techvan/skills/slide-techvan/examples/catalog-techvan.pptx
+++ b/plugins/slide-techvan/skills/slide-techvan/examples/catalog-techvan.pptx
@@ -5016,7 +5016,7 @@
                 <a:ea typeface="游ゴシック"/>
                 <a:cs typeface="游ゴシック"/>
               </a:rPr>
-              <a:t>待ち時間が長い原因は、3つに分解できます</a:t>
+              <a:t>待ち時間を延ばす原因は、受付・切り分け・回答の3か所</a:t>
             </a:r>
           </a:p>
         </p:txBody>
@@ -6493,7 +6493,7 @@
                 <a:ea typeface="游ゴシック"/>
                 <a:cs typeface="游ゴシック"/>
               </a:rPr>
-              <a:t>対応が長引く理由は、仕組みの側にあります</a:t>
+              <a:t>対応が長引く理由は、仕組みの側にある</a:t>
             </a:r>
           </a:p>
         </p:txBody>
@@ -7459,7 +7459,7 @@
                 <a:ea typeface="游ゴシック"/>
                 <a:cs typeface="游ゴシック"/>
               </a:rPr>
-              <a:t>まず「効果が大きく、手間が小さい」施策から着手します</a:t>
+              <a:t>着手は「効果が大きく、手間が小さい」施策から</a:t>
             </a:r>
           </a:p>
         </p:txBody>
@@ -9550,34 +9550,7 @@
                 <a:ea typeface="游ゴシック"/>
                 <a:cs typeface="游ゴシック"/>
               </a:rPr>
-              <a:t>症状の一覧から入る</a:t>
-            </a:r>
-          </a:p>
-          <a:p>
-            <a:pPr algn="l" marL="201168" indent="-201168">
-              <a:lnSpc>
-                <a:spcPct val="108000"/>
-              </a:lnSpc>
-              <a:spcBef>
-                <a:spcPts val="600"/>
-              </a:spcBef>
-              <a:buClr>
-                <a:srgbClr val="194671"/>
-              </a:buClr>
-              <a:buSzPct val="100000"/>
-              <a:buFont typeface="Arial"/>
-              <a:buChar char="・"/>
-            </a:pPr>
-            <a:r>
-              <a:rPr sz="1400" b="0" lang="ja-JP" altLang="en-US">
-                <a:solidFill>
-                  <a:srgbClr val="44546A"/>
-                </a:solidFill>
-                <a:latin typeface="游ゴシック"/>
-                <a:ea typeface="游ゴシック"/>
-                <a:cs typeface="游ゴシック"/>
-              </a:rPr>
-              <a:t>確認方法を1つにそろえる</a:t>
+              <a:t>症状の一覧から1つの手順に入る</a:t>
             </a:r>
           </a:p>
           <a:p>
@@ -9742,7 +9715,7 @@
                 <a:ea typeface="游ゴシック"/>
                 <a:cs typeface="游ゴシック"/>
               </a:rPr>
-              <a:t>B案（段階導入）が、費用と効果のバランスで優れています</a:t>
+              <a:t>費用と効果のバランスは、B案（段階導入）が最良</a:t>
             </a:r>
           </a:p>
         </p:txBody>
@@ -11288,7 +11261,7 @@
                 <a:ea typeface="游ゴシック"/>
                 <a:cs typeface="游ゴシック"/>
               </a:rPr>
-              <a:t>4つのステップで、3か月かけて全社に広げます</a:t>
+              <a:t>4つのステップ、3か月で全社に展開</a:t>
             </a:r>
           </a:p>
         </p:txBody>
@@ -12658,7 +12631,7 @@
                 <a:ea typeface="游ゴシック"/>
                 <a:cs typeface="游ゴシック"/>
               </a:rPr>
-              <a:t>10月に準備を始め、12月の試行を経て2月に全社へ展開します</a:t>
+              <a:t>10月に準備、12月に試行、2月に全社へ展開</a:t>
             </a:r>
           </a:p>
         </p:txBody>
@@ -14688,7 +14661,7 @@
                 <a:ea typeface="游ゴシック"/>
                 <a:cs typeface="游ゴシック"/>
               </a:rPr>
-              <a:t>3チーム・9名の体制で進めます</a:t>
+              <a:t>3チーム・9名の体制</a:t>
             </a:r>
           </a:p>
         </p:txBody>
@@ -17519,7 +17492,7 @@
                 <a:ea typeface="游ゴシック"/>
                 <a:cs typeface="游ゴシック"/>
               </a:rPr>
-              <a:t>、年間の運用費は120万円です</a:t>
+              <a:t>、年間の運用費は120万円</a:t>
             </a:r>
           </a:p>
         </p:txBody>
@@ -18921,7 +18894,7 @@
                 <a:ea typeface="游ゴシック"/>
                 <a:cs typeface="游ゴシック"/>
               </a:rPr>
-              <a:t>主なリスクは3つ。いずれも事前の対策で抑えられます</a:t>
+              <a:t>主なリスクは2つ。どちらも事前の対策で抑えられる</a:t>
             </a:r>
           </a:p>
         </p:txBody>
@@ -19209,11 +19182,11 @@
         <p:spPr>
           <a:xfrm>
             <a:off x="502920" y="1645919"/>
-            <a:ext cx="11185855" cy="1097280"/>
+            <a:ext cx="11185855" cy="1188720"/>
           </a:xfrm>
           <a:prstGeom prst="roundRect">
             <a:avLst>
-              <a:gd name="adj" fmla="val 5000"/>
+              <a:gd name="adj" fmla="val 4615"/>
             </a:avLst>
           </a:prstGeom>
           <a:solidFill>
@@ -19262,7 +19235,7 @@
         </p:nvSpPr>
         <p:spPr>
           <a:xfrm>
-            <a:off x="758952" y="2025395"/>
+            <a:off x="758952" y="2071115"/>
             <a:ext cx="658368" cy="338328"/>
           </a:xfrm>
           <a:prstGeom prst="roundRect">
@@ -19327,7 +19300,7 @@
         <p:spPr>
           <a:xfrm>
             <a:off x="1728216" y="1700784"/>
-            <a:ext cx="3188805" cy="987552"/>
+            <a:ext cx="3188805" cy="1078992"/>
           </a:xfrm>
           <a:prstGeom prst="rect">
             <a:avLst/>
@@ -19368,7 +19341,7 @@
         </p:nvSpPr>
         <p:spPr>
           <a:xfrm>
-            <a:off x="5145621" y="2057400"/>
+            <a:off x="5145621" y="2103120"/>
             <a:ext cx="182880" cy="274320"/>
           </a:xfrm>
           <a:prstGeom prst="chevron">
@@ -19413,7 +19386,7 @@
         <p:spPr>
           <a:xfrm>
             <a:off x="5520525" y="1700784"/>
-            <a:ext cx="4065129" cy="987552"/>
+            <a:ext cx="4065129" cy="1078992"/>
           </a:xfrm>
           <a:prstGeom prst="rect">
             <a:avLst/>
@@ -19455,7 +19428,7 @@
         <p:spPr>
           <a:xfrm>
             <a:off x="9823399" y="1700784"/>
-            <a:ext cx="1554480" cy="987552"/>
+            <a:ext cx="1554480" cy="1078992"/>
           </a:xfrm>
           <a:prstGeom prst="rect">
             <a:avLst/>
@@ -19496,12 +19469,12 @@
         </p:nvSpPr>
         <p:spPr>
           <a:xfrm>
-            <a:off x="502920" y="2926079"/>
-            <a:ext cx="11185855" cy="1097280"/>
+            <a:off x="502920" y="3017520"/>
+            <a:ext cx="11185855" cy="1188720"/>
           </a:xfrm>
           <a:prstGeom prst="roundRect">
             <a:avLst>
-              <a:gd name="adj" fmla="val 5000"/>
+              <a:gd name="adj" fmla="val 4615"/>
             </a:avLst>
           </a:prstGeom>
           <a:solidFill>
@@ -19550,7 +19523,7 @@
         </p:nvSpPr>
         <p:spPr>
           <a:xfrm>
-            <a:off x="758952" y="3305556"/>
+            <a:off x="758952" y="3442715"/>
             <a:ext cx="658368" cy="338328"/>
           </a:xfrm>
           <a:prstGeom prst="roundRect">
@@ -19614,8 +19587,8 @@
         </p:nvSpPr>
         <p:spPr>
           <a:xfrm>
-            <a:off x="1728216" y="2980944"/>
-            <a:ext cx="3188805" cy="987552"/>
+            <a:off x="1728216" y="3072384"/>
+            <a:ext cx="3188805" cy="1078992"/>
           </a:xfrm>
           <a:prstGeom prst="rect">
             <a:avLst/>
@@ -19656,7 +19629,7 @@
         </p:nvSpPr>
         <p:spPr>
           <a:xfrm>
-            <a:off x="5145621" y="3337559"/>
+            <a:off x="5145621" y="3474720"/>
             <a:ext cx="182880" cy="274320"/>
           </a:xfrm>
           <a:prstGeom prst="chevron">
@@ -19700,8 +19673,8 @@
         </p:nvSpPr>
         <p:spPr>
           <a:xfrm>
-            <a:off x="5520525" y="2980944"/>
-            <a:ext cx="4065129" cy="987552"/>
+            <a:off x="5520525" y="3072384"/>
+            <a:ext cx="4065129" cy="1078992"/>
           </a:xfrm>
           <a:prstGeom prst="rect">
             <a:avLst/>
@@ -19742,8 +19715,8 @@
         </p:nvSpPr>
         <p:spPr>
           <a:xfrm>
-            <a:off x="9823399" y="2980944"/>
-            <a:ext cx="1554480" cy="987552"/>
+            <a:off x="9823399" y="3072384"/>
+            <a:ext cx="1554480" cy="1078992"/>
           </a:xfrm>
           <a:prstGeom prst="rect">
             <a:avLst/>
@@ -19772,294 +19745,6 @@
                 <a:cs typeface="游ゴシック"/>
               </a:rPr>
               <a:t>ヘルプデスク</a:t>
-            </a:r>
-          </a:p>
-        </p:txBody>
-      </p:sp>
-      <p:sp>
-        <p:nvSpPr>
-          <p:cNvPr id="21" name="Rounded Rectangle 20"/>
-          <p:cNvSpPr/>
-          <p:nvPr/>
-        </p:nvSpPr>
-        <p:spPr>
-          <a:xfrm>
-            <a:off x="502920" y="4206240"/>
-            <a:ext cx="11185855" cy="1097280"/>
-          </a:xfrm>
-          <a:prstGeom prst="roundRect">
-            <a:avLst>
-              <a:gd name="adj" fmla="val 5000"/>
-            </a:avLst>
-          </a:prstGeom>
-          <a:solidFill>
-            <a:srgbClr val="FFFFFF"/>
-          </a:solidFill>
-          <a:ln w="12700">
-            <a:solidFill>
-              <a:srgbClr val="D8E2EE"/>
-            </a:solidFill>
-          </a:ln>
-          <a:effectLst>
-            <a:outerShdw blurRad="76200" dist="25400" dir="5400000" algn="t" rotWithShape="0">
-              <a:srgbClr val="A9B8C9">
-                <a:alpha val="35000"/>
-              </a:srgbClr>
-            </a:outerShdw>
-          </a:effectLst>
-        </p:spPr>
-        <p:style>
-          <a:lnRef idx="1">
-            <a:schemeClr val="accent1"/>
-          </a:lnRef>
-          <a:fillRef idx="3">
-            <a:schemeClr val="accent1"/>
-          </a:fillRef>
-          <a:effectRef idx="2">
-            <a:schemeClr val="accent1"/>
-          </a:effectRef>
-          <a:fontRef idx="minor">
-            <a:schemeClr val="lt1"/>
-          </a:fontRef>
-        </p:style>
-        <p:txBody>
-          <a:bodyPr rtlCol="0" anchor="ctr" lIns="73152" rIns="73152" tIns="36576" bIns="36576"/>
-          <a:lstStyle/>
-          <a:p>
-            <a:pPr algn="ctr"/>
-          </a:p>
-        </p:txBody>
-      </p:sp>
-      <p:sp>
-        <p:nvSpPr>
-          <p:cNvPr id="22" name="Rounded Rectangle 21"/>
-          <p:cNvSpPr/>
-          <p:nvPr/>
-        </p:nvSpPr>
-        <p:spPr>
-          <a:xfrm>
-            <a:off x="758952" y="4585716"/>
-            <a:ext cx="658368" cy="338328"/>
-          </a:xfrm>
-          <a:prstGeom prst="roundRect">
-            <a:avLst>
-              <a:gd name="adj" fmla="val 50000"/>
-            </a:avLst>
-          </a:prstGeom>
-          <a:solidFill>
-            <a:srgbClr val="D8E2EE"/>
-          </a:solidFill>
-          <a:ln>
-            <a:noFill/>
-          </a:ln>
-          <a:effectLst/>
-        </p:spPr>
-        <p:style>
-          <a:lnRef idx="1">
-            <a:schemeClr val="accent1"/>
-          </a:lnRef>
-          <a:fillRef idx="3">
-            <a:schemeClr val="accent1"/>
-          </a:fillRef>
-          <a:effectRef idx="2">
-            <a:schemeClr val="accent1"/>
-          </a:effectRef>
-          <a:fontRef idx="minor">
-            <a:schemeClr val="lt1"/>
-          </a:fontRef>
-        </p:style>
-        <p:txBody>
-          <a:bodyPr rtlCol="0" anchor="ctr" lIns="27432" rIns="27432" tIns="27432" bIns="27432" wrap="square"/>
-          <a:lstStyle/>
-          <a:p>
-            <a:pPr algn="ctr">
-              <a:lnSpc>
-                <a:spcPct val="100000"/>
-              </a:lnSpc>
-              <a:spcBef>
-                <a:spcPts val="0"/>
-              </a:spcBef>
-            </a:pPr>
-            <a:r>
-              <a:rPr sz="1200" b="1" lang="ja-JP" altLang="en-US">
-                <a:solidFill>
-                  <a:srgbClr val="1F4E79"/>
-                </a:solidFill>
-                <a:latin typeface="游ゴシック"/>
-                <a:ea typeface="游ゴシック"/>
-                <a:cs typeface="游ゴシック"/>
-              </a:rPr>
-              <a:t>低</a:t>
-            </a:r>
-          </a:p>
-        </p:txBody>
-      </p:sp>
-      <p:sp>
-        <p:nvSpPr>
-          <p:cNvPr id="23" name="TextBox 22"/>
-          <p:cNvSpPr txBox="1"/>
-          <p:nvPr/>
-        </p:nvSpPr>
-        <p:spPr>
-          <a:xfrm>
-            <a:off x="1728216" y="4261103"/>
-            <a:ext cx="3188805" cy="987552"/>
-          </a:xfrm>
-          <a:prstGeom prst="rect">
-            <a:avLst/>
-          </a:prstGeom>
-          <a:noFill/>
-        </p:spPr>
-        <p:txBody>
-          <a:bodyPr wrap="square" lIns="0" rIns="0" tIns="0" bIns="0" anchor="ctr"/>
-          <a:lstStyle/>
-          <a:p>
-            <a:pPr algn="l">
-              <a:lnSpc>
-                <a:spcPct val="105000"/>
-              </a:lnSpc>
-              <a:spcBef>
-                <a:spcPts val="0"/>
-              </a:spcBef>
-            </a:pPr>
-            <a:r>
-              <a:rPr sz="1600" b="1" lang="ja-JP" altLang="en-US">
-                <a:solidFill>
-                  <a:srgbClr val="1F4E79"/>
-                </a:solidFill>
-                <a:latin typeface="游ゴシック"/>
-                <a:ea typeface="游ゴシック"/>
-                <a:cs typeface="游ゴシック"/>
-              </a:rPr>
-              <a:t>夜間の当番が集まらない</a:t>
-            </a:r>
-          </a:p>
-        </p:txBody>
-      </p:sp>
-      <p:sp>
-        <p:nvSpPr>
-          <p:cNvPr id="24" name="Chevron 23"/>
-          <p:cNvSpPr/>
-          <p:nvPr/>
-        </p:nvSpPr>
-        <p:spPr>
-          <a:xfrm>
-            <a:off x="5145621" y="4617720"/>
-            <a:ext cx="182880" cy="274320"/>
-          </a:xfrm>
-          <a:prstGeom prst="chevron">
-            <a:avLst/>
-          </a:prstGeom>
-          <a:solidFill>
-            <a:srgbClr val="8496AB"/>
-          </a:solidFill>
-          <a:ln>
-            <a:noFill/>
-          </a:ln>
-          <a:effectLst/>
-        </p:spPr>
-        <p:style>
-          <a:lnRef idx="1">
-            <a:schemeClr val="accent1"/>
-          </a:lnRef>
-          <a:fillRef idx="3">
-            <a:schemeClr val="accent1"/>
-          </a:fillRef>
-          <a:effectRef idx="2">
-            <a:schemeClr val="accent1"/>
-          </a:effectRef>
-          <a:fontRef idx="minor">
-            <a:schemeClr val="lt1"/>
-          </a:fontRef>
-        </p:style>
-        <p:txBody>
-          <a:bodyPr rtlCol="0" anchor="ctr" lIns="73152" rIns="73152" tIns="36576" bIns="36576"/>
-          <a:lstStyle/>
-          <a:p>
-            <a:pPr algn="ctr"/>
-          </a:p>
-        </p:txBody>
-      </p:sp>
-      <p:sp>
-        <p:nvSpPr>
-          <p:cNvPr id="25" name="TextBox 24"/>
-          <p:cNvSpPr txBox="1"/>
-          <p:nvPr/>
-        </p:nvSpPr>
-        <p:spPr>
-          <a:xfrm>
-            <a:off x="5520525" y="4261103"/>
-            <a:ext cx="4065129" cy="987552"/>
-          </a:xfrm>
-          <a:prstGeom prst="rect">
-            <a:avLst/>
-          </a:prstGeom>
-          <a:noFill/>
-        </p:spPr>
-        <p:txBody>
-          <a:bodyPr wrap="square" lIns="0" rIns="0" tIns="0" bIns="0" anchor="ctr"/>
-          <a:lstStyle/>
-          <a:p>
-            <a:pPr algn="l">
-              <a:lnSpc>
-                <a:spcPct val="105000"/>
-              </a:lnSpc>
-              <a:spcBef>
-                <a:spcPts val="0"/>
-              </a:spcBef>
-            </a:pPr>
-            <a:r>
-              <a:rPr sz="1400" b="0" lang="ja-JP" altLang="en-US">
-                <a:solidFill>
-                  <a:srgbClr val="44546A"/>
-                </a:solidFill>
-                <a:latin typeface="游ゴシック"/>
-                <a:ea typeface="游ゴシック"/>
-                <a:cs typeface="游ゴシック"/>
-              </a:rPr>
-              <a:t>交代制と手当で負担をならす</a:t>
-            </a:r>
-          </a:p>
-        </p:txBody>
-      </p:sp>
-      <p:sp>
-        <p:nvSpPr>
-          <p:cNvPr id="26" name="TextBox 25"/>
-          <p:cNvSpPr txBox="1"/>
-          <p:nvPr/>
-        </p:nvSpPr>
-        <p:spPr>
-          <a:xfrm>
-            <a:off x="9823399" y="4261103"/>
-            <a:ext cx="1554480" cy="987552"/>
-          </a:xfrm>
-          <a:prstGeom prst="rect">
-            <a:avLst/>
-          </a:prstGeom>
-          <a:noFill/>
-        </p:spPr>
-        <p:txBody>
-          <a:bodyPr wrap="square" lIns="0" rIns="0" tIns="0" bIns="0" anchor="ctr"/>
-          <a:lstStyle/>
-          <a:p>
-            <a:pPr algn="l">
-              <a:lnSpc>
-                <a:spcPct val="100000"/>
-              </a:lnSpc>
-              <a:spcBef>
-                <a:spcPts val="0"/>
-              </a:spcBef>
-            </a:pPr>
-            <a:r>
-              <a:rPr sz="1050" b="0" lang="ja-JP" altLang="en-US">
-                <a:solidFill>
-                  <a:srgbClr val="5F6F84"/>
-                </a:solidFill>
-                <a:latin typeface="游ゴシック"/>
-                <a:ea typeface="游ゴシック"/>
-                <a:cs typeface="游ゴシック"/>
-              </a:rPr>
-              <a:t>人事部</a:t>
             </a:r>
           </a:p>
         </p:txBody>
@@ -20252,7 +19937,7 @@
                 <a:ea typeface="游ゴシック"/>
                 <a:cs typeface="游ゴシック"/>
               </a:rPr>
-              <a:t>準備は5件中4件が順調。1件は人員の手当てが必要です</a:t>
+              <a:t>準備は5件中4件が順調、1件は人員の手当てが必要</a:t>
             </a:r>
           </a:p>
         </p:txBody>
@@ -22759,7 +22444,7 @@
                 <a:ea typeface="游ゴシック"/>
                 <a:cs typeface="游ゴシック"/>
               </a:rPr>
-              <a:t>11月の部会で、次の3点を決めてください</a:t>
+              <a:t>11月の部会で決めていただきたい3点</a:t>
             </a:r>
           </a:p>
         </p:txBody>
@@ -25671,7 +25356,7 @@
                 <a:ea typeface="游ゴシック"/>
                 <a:cs typeface="游ゴシック"/>
               </a:rPr>
-              <a:t>にします</a:t>
+              <a:t>に</a:t>
             </a:r>
           </a:p>
         </p:txBody>
@@ -26709,7 +26394,7 @@
         </p:nvSpPr>
         <p:spPr>
           <a:xfrm>
-            <a:off x="5424805" y="836081"/>
+            <a:off x="4840605" y="836081"/>
             <a:ext cx="765302" cy="72557"/>
           </a:xfrm>
           <a:prstGeom prst="roundRect">
@@ -26776,7 +26461,7 @@
                 <a:ea typeface="游ゴシック"/>
                 <a:cs typeface="游ゴシック"/>
               </a:rPr>
-              <a:t>件数は横ばいでも、夜間の待ち時間は</a:t>
+              <a:t>件数は横ばい、夜間の待ち時間は</a:t>
             </a:r>
             <a:r>
               <a:rPr sz="2300" b="1" lang="ja-JP" altLang="en-US">
@@ -26798,7 +26483,7 @@
                 <a:ea typeface="游ゴシック"/>
                 <a:cs typeface="游ゴシック"/>
               </a:rPr>
-              <a:t>に伸びています</a:t>
+              <a:t>に悪化</a:t>
             </a:r>
           </a:p>
         </p:txBody>
@@ -27696,17 +27381,6 @@
               </a:rPr>
               <a:t>1.5倍</a:t>
             </a:r>
-            <a:r>
-              <a:rPr sz="2300" b="1" lang="ja-JP" altLang="en-US">
-                <a:solidFill>
-                  <a:srgbClr val="1F4E79"/>
-                </a:solidFill>
-                <a:latin typeface="游ゴシック"/>
-                <a:ea typeface="游ゴシック"/>
-                <a:cs typeface="游ゴシック"/>
-              </a:rPr>
-              <a:t>に増えました</a:t>
-            </a:r>
           </a:p>
         </p:txBody>
       </p:sp>
@@ -27939,11 +27613,11 @@
         <p:spPr>
           <a:xfrm>
             <a:off x="8130844" y="1298448"/>
-            <a:ext cx="3557930" cy="4965192"/>
+            <a:ext cx="3557930" cy="3042422"/>
           </a:xfrm>
           <a:prstGeom prst="roundRect">
             <a:avLst>
-              <a:gd name="adj" fmla="val 1542"/>
+              <a:gd name="adj" fmla="val 1803"/>
             </a:avLst>
           </a:prstGeom>
           <a:solidFill>
@@ -28093,7 +27767,7 @@
         <p:spPr>
           <a:xfrm>
             <a:off x="8898940" y="2071497"/>
-            <a:ext cx="2570378" cy="282641"/>
+            <a:ext cx="1961949" cy="528706"/>
           </a:xfrm>
           <a:prstGeom prst="rect">
             <a:avLst/>
@@ -28121,7 +27795,7 @@
                 <a:ea typeface="游ゴシック"/>
                 <a:cs typeface="游ゴシック"/>
               </a:rPr>
-              <a:t>夜間は半年で1.5倍</a:t>
+              <a:t>夜間は半年で1.5倍、日中はほぼ横ばい</a:t>
             </a:r>
           </a:p>
         </p:txBody>
@@ -28134,7 +27808,7 @@
         </p:nvCxnSpPr>
         <p:spPr>
           <a:xfrm>
-            <a:off x="8350300" y="2947545"/>
+            <a:off x="8350300" y="3020827"/>
             <a:ext cx="3119019" cy="0"/>
           </a:xfrm>
           <a:prstGeom prst="line">
@@ -28169,7 +27843,7 @@
         </p:nvSpPr>
         <p:spPr>
           <a:xfrm>
-            <a:off x="8350300" y="3331464"/>
+            <a:off x="8350300" y="3478027"/>
             <a:ext cx="420624" cy="420624"/>
           </a:xfrm>
           <a:prstGeom prst="ellipse">
@@ -28233,8 +27907,8 @@
         </p:nvSpPr>
         <p:spPr>
           <a:xfrm>
-            <a:off x="8898940" y="3427857"/>
-            <a:ext cx="2570378" cy="282641"/>
+            <a:off x="8898940" y="3574420"/>
+            <a:ext cx="1961949" cy="528706"/>
           </a:xfrm>
           <a:prstGeom prst="rect">
             <a:avLst/>
@@ -28262,148 +27936,7 @@
                 <a:ea typeface="游ゴシック"/>
                 <a:cs typeface="游ゴシック"/>
               </a:rPr>
-              <a:t>日中はほぼ横ばい</a:t>
-            </a:r>
-          </a:p>
-        </p:txBody>
-      </p:sp>
-      <p:cxnSp>
-        <p:nvCxnSpPr>
-          <p:cNvPr id="16" name="Connector 15"/>
-          <p:cNvCxnSpPr/>
-          <p:nvPr/>
-        </p:nvCxnSpPr>
-        <p:spPr>
-          <a:xfrm>
-            <a:off x="8350300" y="4303905"/>
-            <a:ext cx="3119019" cy="0"/>
-          </a:xfrm>
-          <a:prstGeom prst="line">
-            <a:avLst/>
-          </a:prstGeom>
-          <a:ln w="9525">
-            <a:solidFill>
-              <a:srgbClr val="B9CDE2"/>
-            </a:solidFill>
-          </a:ln>
-        </p:spPr>
-        <p:style>
-          <a:lnRef idx="2">
-            <a:schemeClr val="accent1"/>
-          </a:lnRef>
-          <a:fillRef idx="0">
-            <a:schemeClr val="accent1"/>
-          </a:fillRef>
-          <a:effectRef idx="1">
-            <a:schemeClr val="accent1"/>
-          </a:effectRef>
-          <a:fontRef idx="minor">
-            <a:schemeClr val="tx1"/>
-          </a:fontRef>
-        </p:style>
-      </p:cxnSp>
-      <p:sp>
-        <p:nvSpPr>
-          <p:cNvPr id="17" name="Oval 16"/>
-          <p:cNvSpPr/>
-          <p:nvPr/>
-        </p:nvSpPr>
-        <p:spPr>
-          <a:xfrm>
-            <a:off x="8350300" y="4687824"/>
-            <a:ext cx="420624" cy="420624"/>
-          </a:xfrm>
-          <a:prstGeom prst="ellipse">
-            <a:avLst/>
-          </a:prstGeom>
-          <a:solidFill>
-            <a:srgbClr val="EFF4FA"/>
-          </a:solidFill>
-          <a:ln w="9525">
-            <a:solidFill>
-              <a:srgbClr val="B9CDE2"/>
-            </a:solidFill>
-          </a:ln>
-          <a:effectLst/>
-        </p:spPr>
-        <p:style>
-          <a:lnRef idx="1">
-            <a:schemeClr val="accent1"/>
-          </a:lnRef>
-          <a:fillRef idx="3">
-            <a:schemeClr val="accent1"/>
-          </a:fillRef>
-          <a:effectRef idx="2">
-            <a:schemeClr val="accent1"/>
-          </a:effectRef>
-          <a:fontRef idx="minor">
-            <a:schemeClr val="lt1"/>
-          </a:fontRef>
-        </p:style>
-        <p:txBody>
-          <a:bodyPr rtlCol="0" anchor="ctr" lIns="0" rIns="0" tIns="0" bIns="0" wrap="square"/>
-          <a:lstStyle/>
-          <a:p>
-            <a:pPr algn="ctr">
-              <a:lnSpc>
-                <a:spcPct val="100000"/>
-              </a:lnSpc>
-              <a:spcBef>
-                <a:spcPts val="0"/>
-              </a:spcBef>
-            </a:pPr>
-            <a:r>
-              <a:rPr sz="1400" b="1" lang="ja-JP" altLang="en-US">
-                <a:solidFill>
-                  <a:srgbClr val="1F4E79"/>
-                </a:solidFill>
-                <a:latin typeface="Arial"/>
-                <a:ea typeface="游ゴシック"/>
-                <a:cs typeface="Arial"/>
-              </a:rPr>
-              <a:t>3</a:t>
-            </a:r>
-          </a:p>
-        </p:txBody>
-      </p:sp>
-      <p:sp>
-        <p:nvSpPr>
-          <p:cNvPr id="18" name="TextBox 17"/>
-          <p:cNvSpPr txBox="1"/>
-          <p:nvPr/>
-        </p:nvSpPr>
-        <p:spPr>
-          <a:xfrm>
-            <a:off x="8898940" y="4784217"/>
-            <a:ext cx="1788160" cy="528706"/>
-          </a:xfrm>
-          <a:prstGeom prst="rect">
-            <a:avLst/>
-          </a:prstGeom>
-          <a:noFill/>
-        </p:spPr>
-        <p:txBody>
-          <a:bodyPr wrap="square" lIns="0" rIns="0" tIns="0" bIns="0" anchor="t"/>
-          <a:lstStyle/>
-          <a:p>
-            <a:pPr algn="l">
-              <a:lnSpc>
-                <a:spcPct val="108000"/>
-              </a:lnSpc>
-              <a:spcBef>
-                <a:spcPts val="0"/>
-              </a:spcBef>
-            </a:pPr>
-            <a:r>
-              <a:rPr sz="1300" b="0" lang="ja-JP" altLang="en-US">
-                <a:solidFill>
-                  <a:srgbClr val="44546A"/>
-                </a:solidFill>
-                <a:latin typeface="游ゴシック"/>
-                <a:ea typeface="游ゴシック"/>
-                <a:cs typeface="游ゴシック"/>
-              </a:rPr>
-              <a:t>夜間の増加分は主にアカウント関連</a:t>
+              <a:t>夜間の増加分の多くはアカウント関連</a:t>
             </a:r>
           </a:p>
         </p:txBody>
@@ -28455,7 +27988,7 @@
                 <a:ea typeface="游ゴシック"/>
                 <a:cs typeface="游ゴシック"/>
               </a:rPr>
-              <a:t>問い合わせの内訳：アカウント関連が最多</a:t>
+              <a:t>最も多いのはアカウント関連、全体の約3割</a:t>
             </a:r>
           </a:p>
         </p:txBody>
@@ -30166,7 +29699,7 @@
                 <a:ea typeface="游ゴシック"/>
                 <a:cs typeface="游ゴシック"/>
               </a:rPr>
-              <a:t>夜間の待ち時間が長いのは、人手と手順の両方に原因があります</a:t>
+              <a:t>夜間の待ち時間が長い原因は、人手と手順の両方</a:t>
             </a:r>
           </a:p>
         </p:txBody>
@@ -30338,7 +29871,7 @@
                 <a:ea typeface="游ゴシック"/>
                 <a:cs typeface="游ゴシック"/>
               </a:rPr>
-              <a:t>人手を増やすだけでなく、手順と情報をそろえることが必要です。</a:t>
+              <a:t>人手の追加と、手順・情報の整理を同時に進める必要があります。</a:t>
             </a:r>
           </a:p>
         </p:txBody>
@@ -30508,7 +30041,7 @@
                 <a:ea typeface="游ゴシック"/>
                 <a:cs typeface="游ゴシック"/>
               </a:rPr>
-              <a:t>18〜21時の受付は日中の3割ですが、担当者は日中の1割です。</a:t>
+              <a:t>18〜21時の受付は日中の3割、担当者は日中の1割。</a:t>
             </a:r>
           </a:p>
         </p:txBody>
@@ -30649,7 +30182,7 @@
                 <a:ea typeface="游ゴシック"/>
                 <a:cs typeface="游ゴシック"/>
               </a:rPr>
-              <a:t>手順書が製品ごとに分かれている</a:t>
+              <a:t>手順書が製品ごとに分かれ、夜間向けの情報も無い</a:t>
             </a:r>
           </a:p>
         </p:txBody>
@@ -30691,190 +30224,7 @@
                 <a:ea typeface="游ゴシック"/>
                 <a:cs typeface="游ゴシック"/>
               </a:rPr>
-              <a:t>似た症状でも参照先が異なり、切り分けに平均42分 かかっています。</a:t>
-            </a:r>
-          </a:p>
-        </p:txBody>
-      </p:sp>
-      <p:cxnSp>
-        <p:nvCxnSpPr>
-          <p:cNvPr id="13" name="Connector 12"/>
-          <p:cNvCxnSpPr/>
-          <p:nvPr/>
-        </p:nvCxnSpPr>
-        <p:spPr>
-          <a:xfrm>
-            <a:off x="502920" y="3505123"/>
-            <a:ext cx="11185855" cy="0"/>
-          </a:xfrm>
-          <a:prstGeom prst="line">
-            <a:avLst/>
-          </a:prstGeom>
-          <a:ln w="9525">
-            <a:solidFill>
-              <a:srgbClr val="B9CDE2"/>
-            </a:solidFill>
-          </a:ln>
-        </p:spPr>
-        <p:style>
-          <a:lnRef idx="2">
-            <a:schemeClr val="accent1"/>
-          </a:lnRef>
-          <a:fillRef idx="0">
-            <a:schemeClr val="accent1"/>
-          </a:fillRef>
-          <a:effectRef idx="1">
-            <a:schemeClr val="accent1"/>
-          </a:effectRef>
-          <a:fontRef idx="minor">
-            <a:schemeClr val="tx1"/>
-          </a:fontRef>
-        </p:style>
-      </p:cxnSp>
-      <p:sp>
-        <p:nvSpPr>
-          <p:cNvPr id="14" name="Oval 13"/>
-          <p:cNvSpPr/>
-          <p:nvPr/>
-        </p:nvSpPr>
-        <p:spPr>
-          <a:xfrm>
-            <a:off x="502920" y="3770299"/>
-            <a:ext cx="420624" cy="420624"/>
-          </a:xfrm>
-          <a:prstGeom prst="ellipse">
-            <a:avLst/>
-          </a:prstGeom>
-          <a:solidFill>
-            <a:srgbClr val="EFF4FA"/>
-          </a:solidFill>
-          <a:ln w="9525">
-            <a:solidFill>
-              <a:srgbClr val="B9CDE2"/>
-            </a:solidFill>
-          </a:ln>
-          <a:effectLst/>
-        </p:spPr>
-        <p:style>
-          <a:lnRef idx="1">
-            <a:schemeClr val="accent1"/>
-          </a:lnRef>
-          <a:fillRef idx="3">
-            <a:schemeClr val="accent1"/>
-          </a:fillRef>
-          <a:effectRef idx="2">
-            <a:schemeClr val="accent1"/>
-          </a:effectRef>
-          <a:fontRef idx="minor">
-            <a:schemeClr val="lt1"/>
-          </a:fontRef>
-        </p:style>
-        <p:txBody>
-          <a:bodyPr rtlCol="0" anchor="ctr" lIns="0" rIns="0" tIns="0" bIns="0" wrap="square"/>
-          <a:lstStyle/>
-          <a:p>
-            <a:pPr algn="ctr">
-              <a:lnSpc>
-                <a:spcPct val="100000"/>
-              </a:lnSpc>
-              <a:spcBef>
-                <a:spcPts val="0"/>
-              </a:spcBef>
-            </a:pPr>
-            <a:r>
-              <a:rPr sz="1400" b="1" lang="ja-JP" altLang="en-US">
-                <a:solidFill>
-                  <a:srgbClr val="1F4E79"/>
-                </a:solidFill>
-                <a:latin typeface="Arial"/>
-                <a:ea typeface="游ゴシック"/>
-                <a:cs typeface="Arial"/>
-              </a:rPr>
-              <a:t>3</a:t>
-            </a:r>
-          </a:p>
-        </p:txBody>
-      </p:sp>
-      <p:sp>
-        <p:nvSpPr>
-          <p:cNvPr id="15" name="TextBox 14"/>
-          <p:cNvSpPr txBox="1"/>
-          <p:nvPr/>
-        </p:nvSpPr>
-        <p:spPr>
-          <a:xfrm>
-            <a:off x="1152144" y="3788587"/>
-            <a:ext cx="10536631" cy="384048"/>
-          </a:xfrm>
-          <a:prstGeom prst="rect">
-            <a:avLst/>
-          </a:prstGeom>
-          <a:noFill/>
-        </p:spPr>
-        <p:txBody>
-          <a:bodyPr wrap="square" lIns="0" rIns="0" tIns="0" bIns="0" anchor="ctr"/>
-          <a:lstStyle/>
-          <a:p>
-            <a:pPr algn="l">
-              <a:lnSpc>
-                <a:spcPct val="100000"/>
-              </a:lnSpc>
-              <a:spcBef>
-                <a:spcPts val="0"/>
-              </a:spcBef>
-            </a:pPr>
-            <a:r>
-              <a:rPr sz="1600" b="1" lang="ja-JP" altLang="en-US">
-                <a:solidFill>
-                  <a:srgbClr val="1F4E79"/>
-                </a:solidFill>
-                <a:latin typeface="游ゴシック"/>
-                <a:ea typeface="游ゴシック"/>
-                <a:cs typeface="游ゴシック"/>
-              </a:rPr>
-              <a:t>よくある質問が夜間の内容に合っていない</a:t>
-            </a:r>
-          </a:p>
-        </p:txBody>
-      </p:sp>
-      <p:sp>
-        <p:nvSpPr>
-          <p:cNvPr id="16" name="TextBox 15"/>
-          <p:cNvSpPr txBox="1"/>
-          <p:nvPr/>
-        </p:nvSpPr>
-        <p:spPr>
-          <a:xfrm>
-            <a:off x="1152144" y="4172635"/>
-            <a:ext cx="10536631" cy="678141"/>
-          </a:xfrm>
-          <a:prstGeom prst="rect">
-            <a:avLst/>
-          </a:prstGeom>
-          <a:noFill/>
-        </p:spPr>
-        <p:txBody>
-          <a:bodyPr wrap="square" lIns="0" rIns="0" tIns="0" bIns="0" anchor="t"/>
-          <a:lstStyle/>
-          <a:p>
-            <a:pPr algn="l">
-              <a:lnSpc>
-                <a:spcPct val="105000"/>
-              </a:lnSpc>
-              <a:spcBef>
-                <a:spcPts val="0"/>
-              </a:spcBef>
-            </a:pPr>
-            <a:r>
-              <a:rPr sz="1300" b="0" lang="ja-JP" altLang="en-US">
-                <a:solidFill>
-                  <a:srgbClr val="44546A"/>
-                </a:solidFill>
-                <a:latin typeface="游ゴシック"/>
-                <a:ea typeface="游ゴシック"/>
-                <a:cs typeface="游ゴシック"/>
-              </a:rPr>
-              <a:t>夜間に多いアカウント関連の質問が、まだ公開されていません。</a:t>
+              <a:t>切り分けに平均42分。夜間に多いアカウント関連の質問も、まだ公開されていません。</a:t>
             </a:r>
           </a:p>
         </p:txBody>

--- a/plugins/slide-techvan/skills/slide-techvan/examples/catalog-techvan.pptx
+++ b/plugins/slide-techvan/skills/slide-techvan/examples/catalog-techvan.pptx
@@ -6612,7 +6612,7 @@
         </p:nvSpPr>
         <p:spPr>
           <a:xfrm>
-            <a:off x="502920" y="1298448"/>
+            <a:off x="502920" y="1835017"/>
             <a:ext cx="5464911" cy="1818010"/>
           </a:xfrm>
           <a:prstGeom prst="roundRect">
@@ -6666,7 +6666,7 @@
         </p:nvSpPr>
         <p:spPr>
           <a:xfrm>
-            <a:off x="722376" y="1481328"/>
+            <a:off x="722376" y="2017897"/>
             <a:ext cx="420624" cy="420624"/>
           </a:xfrm>
           <a:prstGeom prst="ellipse">
@@ -6730,7 +6730,7 @@
         </p:nvSpPr>
         <p:spPr>
           <a:xfrm>
-            <a:off x="1271016" y="1481328"/>
+            <a:off x="1271016" y="2017897"/>
             <a:ext cx="4532223" cy="420624"/>
           </a:xfrm>
           <a:prstGeom prst="rect">
@@ -6772,7 +6772,7 @@
         </p:nvSpPr>
         <p:spPr>
           <a:xfrm>
-            <a:off x="722376" y="2066543"/>
+            <a:off x="722376" y="2603113"/>
             <a:ext cx="5025999" cy="885322"/>
           </a:xfrm>
           <a:prstGeom prst="rect">
@@ -6814,7 +6814,7 @@
         </p:nvSpPr>
         <p:spPr>
           <a:xfrm>
-            <a:off x="6223863" y="1298448"/>
+            <a:off x="6223863" y="1835017"/>
             <a:ext cx="5464911" cy="1818010"/>
           </a:xfrm>
           <a:prstGeom prst="roundRect">
@@ -6868,7 +6868,7 @@
         </p:nvSpPr>
         <p:spPr>
           <a:xfrm>
-            <a:off x="6443319" y="1481328"/>
+            <a:off x="6443319" y="2017897"/>
             <a:ext cx="420624" cy="420624"/>
           </a:xfrm>
           <a:prstGeom prst="ellipse">
@@ -6932,7 +6932,7 @@
         </p:nvSpPr>
         <p:spPr>
           <a:xfrm>
-            <a:off x="6991959" y="1481328"/>
+            <a:off x="6991959" y="2017897"/>
             <a:ext cx="4532223" cy="420624"/>
           </a:xfrm>
           <a:prstGeom prst="rect">
@@ -6974,7 +6974,7 @@
         </p:nvSpPr>
         <p:spPr>
           <a:xfrm>
-            <a:off x="6443319" y="2066543"/>
+            <a:off x="6443319" y="2603113"/>
             <a:ext cx="5025999" cy="885322"/>
           </a:xfrm>
           <a:prstGeom prst="rect">
@@ -7016,7 +7016,7 @@
         </p:nvSpPr>
         <p:spPr>
           <a:xfrm>
-            <a:off x="502920" y="3372490"/>
+            <a:off x="502920" y="3909060"/>
             <a:ext cx="5464911" cy="1818010"/>
           </a:xfrm>
           <a:prstGeom prst="roundRect">
@@ -7070,7 +7070,7 @@
         </p:nvSpPr>
         <p:spPr>
           <a:xfrm>
-            <a:off x="722376" y="3555370"/>
+            <a:off x="722376" y="4091940"/>
             <a:ext cx="420624" cy="420624"/>
           </a:xfrm>
           <a:prstGeom prst="ellipse">
@@ -7134,7 +7134,7 @@
         </p:nvSpPr>
         <p:spPr>
           <a:xfrm>
-            <a:off x="1271016" y="3555370"/>
+            <a:off x="1271016" y="4091940"/>
             <a:ext cx="4532223" cy="420624"/>
           </a:xfrm>
           <a:prstGeom prst="rect">
@@ -7176,7 +7176,7 @@
         </p:nvSpPr>
         <p:spPr>
           <a:xfrm>
-            <a:off x="722376" y="4140586"/>
+            <a:off x="722376" y="4677156"/>
             <a:ext cx="5025999" cy="885322"/>
           </a:xfrm>
           <a:prstGeom prst="rect">
@@ -7218,7 +7218,7 @@
         </p:nvSpPr>
         <p:spPr>
           <a:xfrm>
-            <a:off x="6223863" y="3372490"/>
+            <a:off x="6223863" y="3909060"/>
             <a:ext cx="5464911" cy="1818010"/>
           </a:xfrm>
           <a:prstGeom prst="roundRect">
@@ -7272,7 +7272,7 @@
         </p:nvSpPr>
         <p:spPr>
           <a:xfrm>
-            <a:off x="6443319" y="3555370"/>
+            <a:off x="6443319" y="4091940"/>
             <a:ext cx="420624" cy="420624"/>
           </a:xfrm>
           <a:prstGeom prst="ellipse">
@@ -7336,7 +7336,7 @@
         </p:nvSpPr>
         <p:spPr>
           <a:xfrm>
-            <a:off x="6991959" y="3555370"/>
+            <a:off x="6991959" y="4091940"/>
             <a:ext cx="4532223" cy="420624"/>
           </a:xfrm>
           <a:prstGeom prst="rect">
@@ -7378,7 +7378,7 @@
         </p:nvSpPr>
         <p:spPr>
           <a:xfrm>
-            <a:off x="6443319" y="4140586"/>
+            <a:off x="6443319" y="4677156"/>
             <a:ext cx="5025999" cy="885322"/>
           </a:xfrm>
           <a:prstGeom prst="rect">

--- a/plugins/slide-techvan/skills/slide-techvan/examples/catalog-techvan.pptx
+++ b/plugins/slide-techvan/skills/slide-techvan/examples/catalog-techvan.pptx
@@ -268,7 +268,7 @@
               <a:lstStyle/>
               <a:p>
                 <a:pPr>
-                  <a:defRPr sz="1200" b="1">
+                  <a:defRPr sz="1400" b="1">
                     <a:solidFill>
                       <a:srgbClr val="1F4E79"/>
                     </a:solidFill>
@@ -368,7 +368,7 @@
           <a:lstStyle/>
           <a:p>
             <a:pPr>
-              <a:defRPr sz="1200">
+              <a:defRPr sz="1400">
                 <a:solidFill>
                   <a:srgbClr val="44546A"/>
                 </a:solidFill>
@@ -416,7 +416,7 @@
           <a:lstStyle/>
           <a:p>
             <a:pPr>
-              <a:defRPr sz="1050">
+              <a:defRPr sz="1400">
                 <a:solidFill>
                   <a:srgbClr val="5F6F84"/>
                 </a:solidFill>
@@ -439,7 +439,7 @@
         <a:lstStyle/>
         <a:p>
           <a:pPr>
-            <a:defRPr sz="1200">
+            <a:defRPr sz="1400">
               <a:solidFill>
                 <a:srgbClr val="44546A"/>
               </a:solidFill>
@@ -457,7 +457,7 @@
     <a:lstStyle/>
     <a:p>
       <a:pPr>
-        <a:defRPr sz="1200">
+        <a:defRPr sz="1400">
           <a:solidFill>
             <a:srgbClr val="44546A"/>
           </a:solidFill>
@@ -4958,7 +4958,7 @@
             <a:r>
               <a:rPr sz="1300" b="0" spc="200" lang="ja-JP" altLang="en-US">
                 <a:solidFill>
-                  <a:srgbClr val="8496AB"/>
+                  <a:srgbClr val="5F6F84"/>
                 </a:solidFill>
                 <a:latin typeface="Arial"/>
                 <a:ea typeface="游ゴシック"/>
@@ -5114,7 +5114,7 @@
               </a:spcBef>
             </a:pPr>
             <a:r>
-              <a:rPr sz="1050" b="1" spc="300" lang="ja-JP" altLang="en-US">
+              <a:rPr sz="1200" b="1" spc="300" lang="ja-JP" altLang="en-US">
                 <a:solidFill>
                   <a:srgbClr val="194671"/>
                 </a:solidFill>
@@ -5135,8 +5135,8 @@
         </p:nvSpPr>
         <p:spPr>
           <a:xfrm>
-            <a:off x="3739147" y="1645920"/>
-            <a:ext cx="2194560" cy="822960"/>
+            <a:off x="3794760" y="1645920"/>
+            <a:ext cx="2328778" cy="822960"/>
           </a:xfrm>
           <a:prstGeom prst="roundRect">
             <a:avLst>
@@ -5189,8 +5189,8 @@
         </p:nvSpPr>
         <p:spPr>
           <a:xfrm>
-            <a:off x="3903739" y="1645920"/>
-            <a:ext cx="1865376" cy="822960"/>
+            <a:off x="3959352" y="1645920"/>
+            <a:ext cx="1999594" cy="822960"/>
           </a:xfrm>
           <a:prstGeom prst="rect">
             <a:avLst/>
@@ -5210,7 +5210,7 @@
               </a:spcBef>
             </a:pPr>
             <a:r>
-              <a:rPr sz="1600" b="1" lang="ja-JP" altLang="en-US">
+              <a:rPr sz="2000" b="1" lang="ja-JP" altLang="en-US">
                 <a:solidFill>
                   <a:srgbClr val="1F4E79"/>
                 </a:solidFill>
@@ -5231,8 +5231,8 @@
         </p:nvSpPr>
         <p:spPr>
           <a:xfrm>
-            <a:off x="6573787" y="1298448"/>
-            <a:ext cx="5114987" cy="713232"/>
+            <a:off x="6763618" y="1298448"/>
+            <a:ext cx="4925156" cy="713232"/>
           </a:xfrm>
           <a:prstGeom prst="roundRect">
             <a:avLst>
@@ -5285,8 +5285,8 @@
         </p:nvSpPr>
         <p:spPr>
           <a:xfrm>
-            <a:off x="6720091" y="1298448"/>
-            <a:ext cx="4822379" cy="713232"/>
+            <a:off x="6909922" y="1298448"/>
+            <a:ext cx="4632548" cy="713232"/>
           </a:xfrm>
           <a:prstGeom prst="rect">
             <a:avLst/>
@@ -5306,7 +5306,7 @@
               </a:spcBef>
             </a:pPr>
             <a:r>
-              <a:rPr sz="1300" b="0" lang="ja-JP" altLang="en-US">
+              <a:rPr sz="1800" b="0" lang="ja-JP" altLang="en-US">
                 <a:solidFill>
                   <a:srgbClr val="44546A"/>
                 </a:solidFill>
@@ -5327,8 +5327,8 @@
         </p:nvSpPr>
         <p:spPr>
           <a:xfrm>
-            <a:off x="6573787" y="2103120"/>
-            <a:ext cx="5114987" cy="713232"/>
+            <a:off x="6763618" y="2103120"/>
+            <a:ext cx="4925156" cy="713232"/>
           </a:xfrm>
           <a:prstGeom prst="roundRect">
             <a:avLst>
@@ -5381,8 +5381,8 @@
         </p:nvSpPr>
         <p:spPr>
           <a:xfrm>
-            <a:off x="6720091" y="2103120"/>
-            <a:ext cx="4822379" cy="713232"/>
+            <a:off x="6909922" y="2103120"/>
+            <a:ext cx="4632548" cy="713232"/>
           </a:xfrm>
           <a:prstGeom prst="rect">
             <a:avLst/>
@@ -5402,7 +5402,7 @@
               </a:spcBef>
             </a:pPr>
             <a:r>
-              <a:rPr sz="1300" b="0" lang="ja-JP" altLang="en-US">
+              <a:rPr sz="1800" b="0" lang="ja-JP" altLang="en-US">
                 <a:solidFill>
                   <a:srgbClr val="44546A"/>
                 </a:solidFill>
@@ -5423,7 +5423,7 @@
         </p:nvCxnSpPr>
         <p:spPr>
           <a:xfrm>
-            <a:off x="5933707" y="2057400"/>
+            <a:off x="6123538" y="2057400"/>
             <a:ext cx="320040" cy="0"/>
           </a:xfrm>
           <a:prstGeom prst="line">
@@ -5458,7 +5458,7 @@
         </p:nvCxnSpPr>
         <p:spPr>
           <a:xfrm>
-            <a:off x="6253747" y="1655064"/>
+            <a:off x="6443578" y="1655064"/>
             <a:ext cx="0" cy="804672"/>
           </a:xfrm>
           <a:prstGeom prst="line">
@@ -5493,7 +5493,7 @@
         </p:nvCxnSpPr>
         <p:spPr>
           <a:xfrm>
-            <a:off x="6253747" y="1655064"/>
+            <a:off x="6443578" y="1655064"/>
             <a:ext cx="320040" cy="0"/>
           </a:xfrm>
           <a:prstGeom prst="line">
@@ -5528,7 +5528,7 @@
         </p:nvCxnSpPr>
         <p:spPr>
           <a:xfrm>
-            <a:off x="6253747" y="2459736"/>
+            <a:off x="6443578" y="2459736"/>
             <a:ext cx="320040" cy="0"/>
           </a:xfrm>
           <a:prstGeom prst="line">
@@ -5563,8 +5563,8 @@
         </p:nvSpPr>
         <p:spPr>
           <a:xfrm>
-            <a:off x="3739147" y="3383280"/>
-            <a:ext cx="2194560" cy="822960"/>
+            <a:off x="3794760" y="3383280"/>
+            <a:ext cx="2328778" cy="822960"/>
           </a:xfrm>
           <a:prstGeom prst="roundRect">
             <a:avLst>
@@ -5617,8 +5617,8 @@
         </p:nvSpPr>
         <p:spPr>
           <a:xfrm>
-            <a:off x="3903739" y="3383280"/>
-            <a:ext cx="1865376" cy="822960"/>
+            <a:off x="3959352" y="3383280"/>
+            <a:ext cx="1999594" cy="822960"/>
           </a:xfrm>
           <a:prstGeom prst="rect">
             <a:avLst/>
@@ -5638,7 +5638,7 @@
               </a:spcBef>
             </a:pPr>
             <a:r>
-              <a:rPr sz="1600" b="1" lang="ja-JP" altLang="en-US">
+              <a:rPr sz="2000" b="1" lang="ja-JP" altLang="en-US">
                 <a:solidFill>
                   <a:srgbClr val="FFFFFF"/>
                 </a:solidFill>
@@ -5659,8 +5659,8 @@
         </p:nvSpPr>
         <p:spPr>
           <a:xfrm>
-            <a:off x="6573787" y="3035808"/>
-            <a:ext cx="5114987" cy="713232"/>
+            <a:off x="6763618" y="3035808"/>
+            <a:ext cx="4925156" cy="713232"/>
           </a:xfrm>
           <a:prstGeom prst="roundRect">
             <a:avLst>
@@ -5713,8 +5713,8 @@
         </p:nvSpPr>
         <p:spPr>
           <a:xfrm>
-            <a:off x="6720091" y="3035808"/>
-            <a:ext cx="4822379" cy="713232"/>
+            <a:off x="6909922" y="3035808"/>
+            <a:ext cx="4632548" cy="713232"/>
           </a:xfrm>
           <a:prstGeom prst="rect">
             <a:avLst/>
@@ -5734,7 +5734,7 @@
               </a:spcBef>
             </a:pPr>
             <a:r>
-              <a:rPr sz="1300" b="0" lang="ja-JP" altLang="en-US">
+              <a:rPr sz="1800" b="0" lang="ja-JP" altLang="en-US">
                 <a:solidFill>
                   <a:srgbClr val="44546A"/>
                 </a:solidFill>
@@ -5755,8 +5755,8 @@
         </p:nvSpPr>
         <p:spPr>
           <a:xfrm>
-            <a:off x="6573787" y="3840480"/>
-            <a:ext cx="5114987" cy="713232"/>
+            <a:off x="6763618" y="3840480"/>
+            <a:ext cx="4925156" cy="713232"/>
           </a:xfrm>
           <a:prstGeom prst="roundRect">
             <a:avLst>
@@ -5809,8 +5809,8 @@
         </p:nvSpPr>
         <p:spPr>
           <a:xfrm>
-            <a:off x="6720091" y="3840480"/>
-            <a:ext cx="4822379" cy="713232"/>
+            <a:off x="6909922" y="3840480"/>
+            <a:ext cx="4632548" cy="713232"/>
           </a:xfrm>
           <a:prstGeom prst="rect">
             <a:avLst/>
@@ -5830,7 +5830,7 @@
               </a:spcBef>
             </a:pPr>
             <a:r>
-              <a:rPr sz="1300" b="0" lang="ja-JP" altLang="en-US">
+              <a:rPr sz="1800" b="0" lang="ja-JP" altLang="en-US">
                 <a:solidFill>
                   <a:srgbClr val="44546A"/>
                 </a:solidFill>
@@ -5851,7 +5851,7 @@
         </p:nvCxnSpPr>
         <p:spPr>
           <a:xfrm>
-            <a:off x="5933707" y="3794760"/>
+            <a:off x="6123538" y="3794760"/>
             <a:ext cx="320040" cy="0"/>
           </a:xfrm>
           <a:prstGeom prst="line">
@@ -5886,7 +5886,7 @@
         </p:nvCxnSpPr>
         <p:spPr>
           <a:xfrm>
-            <a:off x="6253747" y="3392424"/>
+            <a:off x="6443578" y="3392424"/>
             <a:ext cx="0" cy="804672"/>
           </a:xfrm>
           <a:prstGeom prst="line">
@@ -5921,7 +5921,7 @@
         </p:nvCxnSpPr>
         <p:spPr>
           <a:xfrm>
-            <a:off x="6253747" y="3392424"/>
+            <a:off x="6443578" y="3392424"/>
             <a:ext cx="320040" cy="0"/>
           </a:xfrm>
           <a:prstGeom prst="line">
@@ -5956,7 +5956,7 @@
         </p:nvCxnSpPr>
         <p:spPr>
           <a:xfrm>
-            <a:off x="6253747" y="4197096"/>
+            <a:off x="6443578" y="4197096"/>
             <a:ext cx="320040" cy="0"/>
           </a:xfrm>
           <a:prstGeom prst="line">
@@ -5991,8 +5991,8 @@
         </p:nvSpPr>
         <p:spPr>
           <a:xfrm>
-            <a:off x="3739147" y="4773168"/>
-            <a:ext cx="2194560" cy="822960"/>
+            <a:off x="3794760" y="4773168"/>
+            <a:ext cx="2328778" cy="822960"/>
           </a:xfrm>
           <a:prstGeom prst="roundRect">
             <a:avLst>
@@ -6045,8 +6045,8 @@
         </p:nvSpPr>
         <p:spPr>
           <a:xfrm>
-            <a:off x="3903739" y="4773168"/>
-            <a:ext cx="1865376" cy="822960"/>
+            <a:off x="3959352" y="4773168"/>
+            <a:ext cx="1999594" cy="822960"/>
           </a:xfrm>
           <a:prstGeom prst="rect">
             <a:avLst/>
@@ -6066,7 +6066,7 @@
               </a:spcBef>
             </a:pPr>
             <a:r>
-              <a:rPr sz="1600" b="1" lang="ja-JP" altLang="en-US">
+              <a:rPr sz="2000" b="1" lang="ja-JP" altLang="en-US">
                 <a:solidFill>
                   <a:srgbClr val="1F4E79"/>
                 </a:solidFill>
@@ -6087,8 +6087,8 @@
         </p:nvSpPr>
         <p:spPr>
           <a:xfrm>
-            <a:off x="6573787" y="4828032"/>
-            <a:ext cx="5114987" cy="713232"/>
+            <a:off x="6763618" y="4828032"/>
+            <a:ext cx="4925156" cy="713232"/>
           </a:xfrm>
           <a:prstGeom prst="roundRect">
             <a:avLst>
@@ -6141,8 +6141,8 @@
         </p:nvSpPr>
         <p:spPr>
           <a:xfrm>
-            <a:off x="6720091" y="4828032"/>
-            <a:ext cx="4822379" cy="713232"/>
+            <a:off x="6909922" y="4828032"/>
+            <a:ext cx="4632548" cy="713232"/>
           </a:xfrm>
           <a:prstGeom prst="rect">
             <a:avLst/>
@@ -6162,7 +6162,7 @@
               </a:spcBef>
             </a:pPr>
             <a:r>
-              <a:rPr sz="1300" b="0" lang="ja-JP" altLang="en-US">
+              <a:rPr sz="1800" b="0" lang="ja-JP" altLang="en-US">
                 <a:solidFill>
                   <a:srgbClr val="44546A"/>
                 </a:solidFill>
@@ -6183,7 +6183,7 @@
         </p:nvCxnSpPr>
         <p:spPr>
           <a:xfrm>
-            <a:off x="5933707" y="5184648"/>
+            <a:off x="6123538" y="5184648"/>
             <a:ext cx="640080" cy="0"/>
           </a:xfrm>
           <a:prstGeom prst="line">
@@ -6218,12 +6218,12 @@
         </p:nvSpPr>
         <p:spPr>
           <a:xfrm>
-            <a:off x="502920" y="3291840"/>
-            <a:ext cx="2596147" cy="1005840"/>
+            <a:off x="502920" y="3215640"/>
+            <a:ext cx="2651760" cy="1158240"/>
           </a:xfrm>
           <a:prstGeom prst="roundRect">
             <a:avLst>
-              <a:gd name="adj" fmla="val 5454"/>
+              <a:gd name="adj" fmla="val 4736"/>
             </a:avLst>
           </a:prstGeom>
           <a:solidFill>
@@ -6272,8 +6272,8 @@
         </p:nvSpPr>
         <p:spPr>
           <a:xfrm>
-            <a:off x="685800" y="3291840"/>
-            <a:ext cx="2230387" cy="1005840"/>
+            <a:off x="1026694" y="3215640"/>
+            <a:ext cx="1604210" cy="1158240"/>
           </a:xfrm>
           <a:prstGeom prst="rect">
             <a:avLst/>
@@ -6293,7 +6293,7 @@
               </a:spcBef>
             </a:pPr>
             <a:r>
-              <a:rPr sz="1600" b="1" lang="ja-JP" altLang="en-US">
+              <a:rPr sz="2000" b="1" lang="ja-JP" altLang="en-US">
                 <a:solidFill>
                   <a:srgbClr val="FFFFFF"/>
                 </a:solidFill>
@@ -6314,7 +6314,7 @@
         </p:nvCxnSpPr>
         <p:spPr>
           <a:xfrm>
-            <a:off x="3419107" y="2057400"/>
+            <a:off x="3474720" y="2057400"/>
             <a:ext cx="0" cy="3127248"/>
           </a:xfrm>
           <a:prstGeom prst="line">
@@ -6349,7 +6349,7 @@
         </p:nvCxnSpPr>
         <p:spPr>
           <a:xfrm>
-            <a:off x="3419107" y="2057400"/>
+            <a:off x="3474720" y="2057400"/>
             <a:ext cx="320040" cy="0"/>
           </a:xfrm>
           <a:prstGeom prst="line">
@@ -6384,7 +6384,7 @@
         </p:nvCxnSpPr>
         <p:spPr>
           <a:xfrm>
-            <a:off x="3419107" y="5184648"/>
+            <a:off x="3474720" y="5184648"/>
             <a:ext cx="320040" cy="0"/>
           </a:xfrm>
           <a:prstGeom prst="line">
@@ -6419,7 +6419,7 @@
         </p:nvCxnSpPr>
         <p:spPr>
           <a:xfrm>
-            <a:off x="3099067" y="3794760"/>
+            <a:off x="3154680" y="3794760"/>
             <a:ext cx="640080" cy="0"/>
           </a:xfrm>
           <a:prstGeom prst="line">
@@ -6591,7 +6591,7 @@
               </a:spcBef>
             </a:pPr>
             <a:r>
-              <a:rPr sz="1050" b="1" spc="300" lang="ja-JP" altLang="en-US">
+              <a:rPr sz="1200" b="1" spc="300" lang="ja-JP" altLang="en-US">
                 <a:solidFill>
                   <a:srgbClr val="194671"/>
                 </a:solidFill>
@@ -6612,12 +6612,12 @@
         </p:nvSpPr>
         <p:spPr>
           <a:xfrm>
-            <a:off x="502920" y="1835017"/>
-            <a:ext cx="5464911" cy="1818010"/>
+            <a:off x="502920" y="1645737"/>
+            <a:ext cx="5464911" cy="2007290"/>
           </a:xfrm>
           <a:prstGeom prst="roundRect">
             <a:avLst>
-              <a:gd name="adj" fmla="val 3017"/>
+              <a:gd name="adj" fmla="val 2733"/>
             </a:avLst>
           </a:prstGeom>
           <a:solidFill>
@@ -6666,7 +6666,7 @@
         </p:nvSpPr>
         <p:spPr>
           <a:xfrm>
-            <a:off x="722376" y="2017897"/>
+            <a:off x="722376" y="1828617"/>
             <a:ext cx="420624" cy="420624"/>
           </a:xfrm>
           <a:prstGeom prst="ellipse">
@@ -6730,7 +6730,7 @@
         </p:nvSpPr>
         <p:spPr>
           <a:xfrm>
-            <a:off x="1271016" y="2017897"/>
+            <a:off x="1271016" y="1828617"/>
             <a:ext cx="4532223" cy="420624"/>
           </a:xfrm>
           <a:prstGeom prst="rect">
@@ -6751,7 +6751,7 @@
               </a:spcBef>
             </a:pPr>
             <a:r>
-              <a:rPr sz="1400" b="1" lang="ja-JP" altLang="en-US">
+              <a:rPr sz="2000" b="1" lang="ja-JP" altLang="en-US">
                 <a:solidFill>
                   <a:srgbClr val="1F4E79"/>
                 </a:solidFill>
@@ -6772,8 +6772,8 @@
         </p:nvSpPr>
         <p:spPr>
           <a:xfrm>
-            <a:off x="722376" y="2603113"/>
-            <a:ext cx="5025999" cy="885322"/>
+            <a:off x="722376" y="2413833"/>
+            <a:ext cx="5025999" cy="1074602"/>
           </a:xfrm>
           <a:prstGeom prst="rect">
             <a:avLst/>
@@ -6793,7 +6793,7 @@
               </a:spcBef>
             </a:pPr>
             <a:r>
-              <a:rPr sz="1300" b="0" lang="ja-JP" altLang="en-US">
+              <a:rPr sz="1800" b="0" lang="ja-JP" altLang="en-US">
                 <a:solidFill>
                   <a:srgbClr val="44546A"/>
                 </a:solidFill>
@@ -6814,12 +6814,12 @@
         </p:nvSpPr>
         <p:spPr>
           <a:xfrm>
-            <a:off x="6223863" y="1835017"/>
-            <a:ext cx="5464911" cy="1818010"/>
+            <a:off x="6223863" y="1645737"/>
+            <a:ext cx="5464911" cy="2007290"/>
           </a:xfrm>
           <a:prstGeom prst="roundRect">
             <a:avLst>
-              <a:gd name="adj" fmla="val 3017"/>
+              <a:gd name="adj" fmla="val 2733"/>
             </a:avLst>
           </a:prstGeom>
           <a:solidFill>
@@ -6868,7 +6868,7 @@
         </p:nvSpPr>
         <p:spPr>
           <a:xfrm>
-            <a:off x="6443319" y="2017897"/>
+            <a:off x="6443319" y="1828617"/>
             <a:ext cx="420624" cy="420624"/>
           </a:xfrm>
           <a:prstGeom prst="ellipse">
@@ -6932,7 +6932,7 @@
         </p:nvSpPr>
         <p:spPr>
           <a:xfrm>
-            <a:off x="6991959" y="2017897"/>
+            <a:off x="6991959" y="1828617"/>
             <a:ext cx="4532223" cy="420624"/>
           </a:xfrm>
           <a:prstGeom prst="rect">
@@ -6953,7 +6953,7 @@
               </a:spcBef>
             </a:pPr>
             <a:r>
-              <a:rPr sz="1400" b="1" lang="ja-JP" altLang="en-US">
+              <a:rPr sz="2000" b="1" lang="ja-JP" altLang="en-US">
                 <a:solidFill>
                   <a:srgbClr val="1F4E79"/>
                 </a:solidFill>
@@ -6974,8 +6974,8 @@
         </p:nvSpPr>
         <p:spPr>
           <a:xfrm>
-            <a:off x="6443319" y="2603113"/>
-            <a:ext cx="5025999" cy="885322"/>
+            <a:off x="6443319" y="2413833"/>
+            <a:ext cx="5025999" cy="1074602"/>
           </a:xfrm>
           <a:prstGeom prst="rect">
             <a:avLst/>
@@ -6995,7 +6995,7 @@
               </a:spcBef>
             </a:pPr>
             <a:r>
-              <a:rPr sz="1300" b="0" lang="ja-JP" altLang="en-US">
+              <a:rPr sz="1800" b="0" lang="ja-JP" altLang="en-US">
                 <a:solidFill>
                   <a:srgbClr val="44546A"/>
                 </a:solidFill>
@@ -7017,11 +7017,11 @@
         <p:spPr>
           <a:xfrm>
             <a:off x="502920" y="3909060"/>
-            <a:ext cx="5464911" cy="1818010"/>
+            <a:ext cx="5464911" cy="2007290"/>
           </a:xfrm>
           <a:prstGeom prst="roundRect">
             <a:avLst>
-              <a:gd name="adj" fmla="val 3017"/>
+              <a:gd name="adj" fmla="val 2733"/>
             </a:avLst>
           </a:prstGeom>
           <a:solidFill>
@@ -7155,7 +7155,7 @@
               </a:spcBef>
             </a:pPr>
             <a:r>
-              <a:rPr sz="1400" b="1" lang="ja-JP" altLang="en-US">
+              <a:rPr sz="2000" b="1" lang="ja-JP" altLang="en-US">
                 <a:solidFill>
                   <a:srgbClr val="1F4E79"/>
                 </a:solidFill>
@@ -7177,7 +7177,7 @@
         <p:spPr>
           <a:xfrm>
             <a:off x="722376" y="4677156"/>
-            <a:ext cx="5025999" cy="885322"/>
+            <a:ext cx="5025999" cy="1074602"/>
           </a:xfrm>
           <a:prstGeom prst="rect">
             <a:avLst/>
@@ -7197,7 +7197,7 @@
               </a:spcBef>
             </a:pPr>
             <a:r>
-              <a:rPr sz="1300" b="0" lang="ja-JP" altLang="en-US">
+              <a:rPr sz="1800" b="0" lang="ja-JP" altLang="en-US">
                 <a:solidFill>
                   <a:srgbClr val="44546A"/>
                 </a:solidFill>
@@ -7219,11 +7219,11 @@
         <p:spPr>
           <a:xfrm>
             <a:off x="6223863" y="3909060"/>
-            <a:ext cx="5464911" cy="1818010"/>
+            <a:ext cx="5464911" cy="2007290"/>
           </a:xfrm>
           <a:prstGeom prst="roundRect">
             <a:avLst>
-              <a:gd name="adj" fmla="val 3017"/>
+              <a:gd name="adj" fmla="val 2733"/>
             </a:avLst>
           </a:prstGeom>
           <a:solidFill>
@@ -7357,7 +7357,7 @@
               </a:spcBef>
             </a:pPr>
             <a:r>
-              <a:rPr sz="1400" b="1" lang="ja-JP" altLang="en-US">
+              <a:rPr sz="2000" b="1" lang="ja-JP" altLang="en-US">
                 <a:solidFill>
                   <a:srgbClr val="1F4E79"/>
                 </a:solidFill>
@@ -7379,7 +7379,7 @@
         <p:spPr>
           <a:xfrm>
             <a:off x="6443319" y="4677156"/>
-            <a:ext cx="5025999" cy="885322"/>
+            <a:ext cx="5025999" cy="1074602"/>
           </a:xfrm>
           <a:prstGeom prst="rect">
             <a:avLst/>
@@ -7399,7 +7399,7 @@
               </a:spcBef>
             </a:pPr>
             <a:r>
-              <a:rPr sz="1300" b="0" lang="ja-JP" altLang="en-US">
+              <a:rPr sz="1800" b="0" lang="ja-JP" altLang="en-US">
                 <a:solidFill>
                   <a:srgbClr val="44546A"/>
                 </a:solidFill>
@@ -7557,7 +7557,7 @@
               </a:spcBef>
             </a:pPr>
             <a:r>
-              <a:rPr sz="1050" b="1" spc="300" lang="ja-JP" altLang="en-US">
+              <a:rPr sz="1200" b="1" spc="300" lang="ja-JP" altLang="en-US">
                 <a:solidFill>
                   <a:srgbClr val="194671"/>
                 </a:solidFill>
@@ -7724,7 +7724,7 @@
               </a:spcBef>
             </a:pPr>
             <a:r>
-              <a:rPr sz="1300" b="1" lang="ja-JP" altLang="en-US">
+              <a:rPr sz="1800" b="1" lang="ja-JP" altLang="en-US">
                 <a:solidFill>
                   <a:srgbClr val="FFFFFF"/>
                 </a:solidFill>
@@ -7745,7 +7745,7 @@
               </a:spcBef>
             </a:pPr>
             <a:r>
-              <a:rPr sz="1300" b="1" lang="ja-JP" altLang="en-US">
+              <a:rPr sz="1800" b="1" lang="ja-JP" altLang="en-US">
                 <a:solidFill>
                   <a:srgbClr val="FFFFFF"/>
                 </a:solidFill>
@@ -7787,7 +7787,7 @@
               </a:spcBef>
             </a:pPr>
             <a:r>
-              <a:rPr sz="1050" b="1" lang="ja-JP" altLang="en-US">
+              <a:rPr sz="1200" b="1" lang="ja-JP" altLang="en-US">
                 <a:solidFill>
                   <a:srgbClr val="5F6F84"/>
                 </a:solidFill>
@@ -7829,7 +7829,7 @@
               </a:spcBef>
             </a:pPr>
             <a:r>
-              <a:rPr sz="1050" b="1" lang="ja-JP" altLang="en-US">
+              <a:rPr sz="1200" b="1" lang="ja-JP" altLang="en-US">
                 <a:solidFill>
                   <a:srgbClr val="5F6F84"/>
                 </a:solidFill>
@@ -7850,8 +7850,8 @@
         </p:nvSpPr>
         <p:spPr>
           <a:xfrm>
-            <a:off x="6050127" y="5738241"/>
-            <a:ext cx="1005840" cy="355854"/>
+            <a:off x="6050127" y="5694426"/>
+            <a:ext cx="1005840" cy="443484"/>
           </a:xfrm>
           <a:prstGeom prst="roundRect">
             <a:avLst>
@@ -7893,7 +7893,7 @@
               </a:spcBef>
             </a:pPr>
             <a:r>
-              <a:rPr sz="1300" b="1" lang="ja-JP" altLang="en-US">
+              <a:rPr sz="1800" b="1" lang="ja-JP" altLang="en-US">
                 <a:solidFill>
                   <a:srgbClr val="FFFFFF"/>
                 </a:solidFill>
@@ -7935,7 +7935,7 @@
               </a:spcBef>
             </a:pPr>
             <a:r>
-              <a:rPr sz="1050" b="1" lang="ja-JP" altLang="en-US">
+              <a:rPr sz="1200" b="1" lang="ja-JP" altLang="en-US">
                 <a:solidFill>
                   <a:srgbClr val="5F6F84"/>
                 </a:solidFill>
@@ -7977,7 +7977,7 @@
               </a:spcBef>
             </a:pPr>
             <a:r>
-              <a:rPr sz="1050" b="1" lang="ja-JP" altLang="en-US">
+              <a:rPr sz="1200" b="1" lang="ja-JP" altLang="en-US">
                 <a:solidFill>
                   <a:srgbClr val="5F6F84"/>
                 </a:solidFill>
@@ -8053,7 +8053,7 @@
         <p:spPr>
           <a:xfrm>
             <a:off x="1636776" y="1481328"/>
-            <a:ext cx="1071880" cy="355854"/>
+            <a:ext cx="1325880" cy="443484"/>
           </a:xfrm>
           <a:prstGeom prst="roundRect">
             <a:avLst>
@@ -8095,7 +8095,7 @@
               </a:spcBef>
             </a:pPr>
             <a:r>
-              <a:rPr sz="1300" b="1" lang="ja-JP" altLang="en-US">
+              <a:rPr sz="1800" b="1" lang="ja-JP" altLang="en-US">
                 <a:solidFill>
                   <a:srgbClr val="FFFFFF"/>
                 </a:solidFill>
@@ -8116,8 +8116,8 @@
         </p:nvSpPr>
         <p:spPr>
           <a:xfrm>
-            <a:off x="1636776" y="1946909"/>
-            <a:ext cx="4568799" cy="1285494"/>
+            <a:off x="1636776" y="2034539"/>
+            <a:ext cx="4568799" cy="1197864"/>
           </a:xfrm>
           <a:prstGeom prst="rect">
             <a:avLst/>
@@ -8143,7 +8143,7 @@
               <a:buChar char="・"/>
             </a:pPr>
             <a:r>
-              <a:rPr sz="1300" b="0" lang="ja-JP" altLang="en-US">
+              <a:rPr sz="1800" b="0" lang="ja-JP" altLang="en-US">
                 <a:solidFill>
                   <a:srgbClr val="44546A"/>
                 </a:solidFill>
@@ -8170,7 +8170,7 @@
               <a:buChar char="・"/>
             </a:pPr>
             <a:r>
-              <a:rPr sz="1300" b="0" lang="ja-JP" altLang="en-US">
+              <a:rPr sz="1800" b="0" lang="ja-JP" altLang="en-US">
                 <a:solidFill>
                   <a:srgbClr val="44546A"/>
                 </a:solidFill>
@@ -8246,7 +8246,7 @@
         <p:spPr>
           <a:xfrm>
             <a:off x="6900519" y="1481328"/>
-            <a:ext cx="1402080" cy="355854"/>
+            <a:ext cx="1783080" cy="443484"/>
           </a:xfrm>
           <a:prstGeom prst="roundRect">
             <a:avLst>
@@ -8290,7 +8290,7 @@
               </a:spcBef>
             </a:pPr>
             <a:r>
-              <a:rPr sz="1300" b="1" lang="ja-JP" altLang="en-US">
+              <a:rPr sz="1800" b="1" lang="ja-JP" altLang="en-US">
                 <a:solidFill>
                   <a:srgbClr val="1F4E79"/>
                 </a:solidFill>
@@ -8311,8 +8311,8 @@
         </p:nvSpPr>
         <p:spPr>
           <a:xfrm>
-            <a:off x="6900519" y="1946909"/>
-            <a:ext cx="4568799" cy="1285494"/>
+            <a:off x="6900519" y="2034539"/>
+            <a:ext cx="4568799" cy="1197864"/>
           </a:xfrm>
           <a:prstGeom prst="rect">
             <a:avLst/>
@@ -8338,7 +8338,7 @@
               <a:buChar char="・"/>
             </a:pPr>
             <a:r>
-              <a:rPr sz="1300" b="0" lang="ja-JP" altLang="en-US">
+              <a:rPr sz="1800" b="0" lang="ja-JP" altLang="en-US">
                 <a:solidFill>
                   <a:srgbClr val="44546A"/>
                 </a:solidFill>
@@ -8365,7 +8365,7 @@
               <a:buChar char="・"/>
             </a:pPr>
             <a:r>
-              <a:rPr sz="1300" b="0" lang="ja-JP" altLang="en-US">
+              <a:rPr sz="1800" b="0" lang="ja-JP" altLang="en-US">
                 <a:solidFill>
                   <a:srgbClr val="44546A"/>
                 </a:solidFill>
@@ -8441,7 +8441,7 @@
         <p:spPr>
           <a:xfrm>
             <a:off x="1636776" y="3781044"/>
-            <a:ext cx="1402080" cy="355854"/>
+            <a:ext cx="1783080" cy="443484"/>
           </a:xfrm>
           <a:prstGeom prst="roundRect">
             <a:avLst>
@@ -8485,7 +8485,7 @@
               </a:spcBef>
             </a:pPr>
             <a:r>
-              <a:rPr sz="1300" b="1" lang="ja-JP" altLang="en-US">
+              <a:rPr sz="1800" b="1" lang="ja-JP" altLang="en-US">
                 <a:solidFill>
                   <a:srgbClr val="1F4E79"/>
                 </a:solidFill>
@@ -8506,8 +8506,8 @@
         </p:nvSpPr>
         <p:spPr>
           <a:xfrm>
-            <a:off x="1636776" y="4246625"/>
-            <a:ext cx="4568799" cy="1285494"/>
+            <a:off x="1636776" y="4334256"/>
+            <a:ext cx="4568799" cy="1197863"/>
           </a:xfrm>
           <a:prstGeom prst="rect">
             <a:avLst/>
@@ -8533,7 +8533,7 @@
               <a:buChar char="・"/>
             </a:pPr>
             <a:r>
-              <a:rPr sz="1300" b="0" lang="ja-JP" altLang="en-US">
+              <a:rPr sz="1800" b="0" lang="ja-JP" altLang="en-US">
                 <a:solidFill>
                   <a:srgbClr val="44546A"/>
                 </a:solidFill>
@@ -8609,7 +8609,7 @@
         <p:spPr>
           <a:xfrm>
             <a:off x="6900519" y="3781044"/>
-            <a:ext cx="1567180" cy="355854"/>
+            <a:ext cx="2011680" cy="443484"/>
           </a:xfrm>
           <a:prstGeom prst="roundRect">
             <a:avLst>
@@ -8653,7 +8653,7 @@
               </a:spcBef>
             </a:pPr>
             <a:r>
-              <a:rPr sz="1300" b="1" lang="ja-JP" altLang="en-US">
+              <a:rPr sz="1800" b="1" lang="ja-JP" altLang="en-US">
                 <a:solidFill>
                   <a:srgbClr val="1F4E79"/>
                 </a:solidFill>
@@ -8674,8 +8674,8 @@
         </p:nvSpPr>
         <p:spPr>
           <a:xfrm>
-            <a:off x="6900519" y="4246625"/>
-            <a:ext cx="4568799" cy="1285494"/>
+            <a:off x="6900519" y="4334256"/>
+            <a:ext cx="4568799" cy="1197863"/>
           </a:xfrm>
           <a:prstGeom prst="rect">
             <a:avLst/>
@@ -8701,7 +8701,7 @@
               <a:buChar char="・"/>
             </a:pPr>
             <a:r>
-              <a:rPr sz="1300" b="0" lang="ja-JP" altLang="en-US">
+              <a:rPr sz="1800" b="0" lang="ja-JP" altLang="en-US">
                 <a:solidFill>
                   <a:srgbClr val="44546A"/>
                 </a:solidFill>
@@ -8844,7 +8844,7 @@
             <a:r>
               <a:rPr sz="1300" b="0" spc="200" lang="ja-JP" altLang="en-US">
                 <a:solidFill>
-                  <a:srgbClr val="8496AB"/>
+                  <a:srgbClr val="5F6F84"/>
                 </a:solidFill>
                 <a:latin typeface="Arial"/>
                 <a:ea typeface="游ゴシック"/>
@@ -9000,7 +9000,7 @@
               </a:spcBef>
             </a:pPr>
             <a:r>
-              <a:rPr sz="1050" b="1" spc="300" lang="ja-JP" altLang="en-US">
+              <a:rPr sz="1200" b="1" spc="300" lang="ja-JP" altLang="en-US">
                 <a:solidFill>
                   <a:srgbClr val="194671"/>
                 </a:solidFill>
@@ -9022,11 +9022,11 @@
         <p:spPr>
           <a:xfrm>
             <a:off x="502920" y="1298448"/>
-            <a:ext cx="4998567" cy="2699979"/>
+            <a:ext cx="4998567" cy="3145840"/>
           </a:xfrm>
           <a:prstGeom prst="roundRect">
             <a:avLst>
-              <a:gd name="adj" fmla="val 2032"/>
+              <a:gd name="adj" fmla="val 1744"/>
             </a:avLst>
           </a:prstGeom>
           <a:solidFill>
@@ -9076,7 +9076,7 @@
         <p:spPr>
           <a:xfrm>
             <a:off x="777240" y="1572768"/>
-            <a:ext cx="1005840" cy="338328"/>
+            <a:ext cx="1005840" cy="373380"/>
           </a:xfrm>
           <a:prstGeom prst="roundRect">
             <a:avLst>
@@ -9120,7 +9120,7 @@
               </a:spcBef>
             </a:pPr>
             <a:r>
-              <a:rPr sz="1200" b="1" lang="ja-JP" altLang="en-US">
+              <a:rPr sz="1400" b="1" lang="ja-JP" altLang="en-US">
                 <a:solidFill>
                   <a:srgbClr val="1F4E79"/>
                 </a:solidFill>
@@ -9141,8 +9141,8 @@
         </p:nvSpPr>
         <p:spPr>
           <a:xfrm>
-            <a:off x="777240" y="2039112"/>
-            <a:ext cx="4449927" cy="335280"/>
+            <a:off x="777240" y="2074164"/>
+            <a:ext cx="4449927" cy="405384"/>
           </a:xfrm>
           <a:prstGeom prst="rect">
             <a:avLst/>
@@ -9162,7 +9162,7 @@
               </a:spcBef>
             </a:pPr>
             <a:r>
-              <a:rPr sz="1600" b="1" lang="ja-JP" altLang="en-US">
+              <a:rPr sz="2000" b="1" lang="ja-JP" altLang="en-US">
                 <a:solidFill>
                   <a:srgbClr val="1F4E79"/>
                 </a:solidFill>
@@ -9183,7 +9183,7 @@
         </p:nvCxnSpPr>
         <p:spPr>
           <a:xfrm>
-            <a:off x="777240" y="2484120"/>
+            <a:off x="777240" y="2589276"/>
             <a:ext cx="4449927" cy="0"/>
           </a:xfrm>
           <a:prstGeom prst="line">
@@ -9218,8 +9218,8 @@
         </p:nvSpPr>
         <p:spPr>
           <a:xfrm>
-            <a:off x="777240" y="2593848"/>
-            <a:ext cx="4449927" cy="1166835"/>
+            <a:off x="777240" y="2699004"/>
+            <a:ext cx="4449927" cy="1507540"/>
           </a:xfrm>
           <a:prstGeom prst="rect">
             <a:avLst/>
@@ -9245,7 +9245,7 @@
               <a:buChar char="・"/>
             </a:pPr>
             <a:r>
-              <a:rPr sz="1400" b="0" lang="ja-JP" altLang="en-US">
+              <a:rPr sz="2000" b="0" lang="ja-JP" altLang="en-US">
                 <a:solidFill>
                   <a:srgbClr val="44546A"/>
                 </a:solidFill>
@@ -9272,7 +9272,7 @@
               <a:buChar char="・"/>
             </a:pPr>
             <a:r>
-              <a:rPr sz="1400" b="0" lang="ja-JP" altLang="en-US">
+              <a:rPr sz="2000" b="0" lang="ja-JP" altLang="en-US">
                 <a:solidFill>
                   <a:srgbClr val="44546A"/>
                 </a:solidFill>
@@ -9299,7 +9299,7 @@
               <a:buChar char="・"/>
             </a:pPr>
             <a:r>
-              <a:rPr sz="1400" b="0" lang="ja-JP" altLang="en-US">
+              <a:rPr sz="2000" b="0" lang="ja-JP" altLang="en-US">
                 <a:solidFill>
                   <a:srgbClr val="44546A"/>
                 </a:solidFill>
@@ -9321,11 +9321,11 @@
         <p:spPr>
           <a:xfrm>
             <a:off x="6690207" y="1298448"/>
-            <a:ext cx="4998567" cy="2699979"/>
+            <a:ext cx="4998567" cy="3145840"/>
           </a:xfrm>
           <a:prstGeom prst="roundRect">
             <a:avLst>
-              <a:gd name="adj" fmla="val 2032"/>
+              <a:gd name="adj" fmla="val 1744"/>
             </a:avLst>
           </a:prstGeom>
           <a:solidFill>
@@ -9375,7 +9375,7 @@
         <p:spPr>
           <a:xfrm>
             <a:off x="6964527" y="1572768"/>
-            <a:ext cx="1005840" cy="338328"/>
+            <a:ext cx="1005840" cy="373380"/>
           </a:xfrm>
           <a:prstGeom prst="roundRect">
             <a:avLst>
@@ -9417,7 +9417,7 @@
               </a:spcBef>
             </a:pPr>
             <a:r>
-              <a:rPr sz="1200" b="1" lang="ja-JP" altLang="en-US">
+              <a:rPr sz="1400" b="1" lang="ja-JP" altLang="en-US">
                 <a:solidFill>
                   <a:srgbClr val="FFFFFF"/>
                 </a:solidFill>
@@ -9438,8 +9438,8 @@
         </p:nvSpPr>
         <p:spPr>
           <a:xfrm>
-            <a:off x="6964527" y="2039112"/>
-            <a:ext cx="4449927" cy="335280"/>
+            <a:off x="6964527" y="2074164"/>
+            <a:ext cx="4449927" cy="405384"/>
           </a:xfrm>
           <a:prstGeom prst="rect">
             <a:avLst/>
@@ -9459,7 +9459,7 @@
               </a:spcBef>
             </a:pPr>
             <a:r>
-              <a:rPr sz="1600" b="1" lang="ja-JP" altLang="en-US">
+              <a:rPr sz="2000" b="1" lang="ja-JP" altLang="en-US">
                 <a:solidFill>
                   <a:srgbClr val="1F4E79"/>
                 </a:solidFill>
@@ -9480,7 +9480,7 @@
         </p:nvCxnSpPr>
         <p:spPr>
           <a:xfrm>
-            <a:off x="6964527" y="2484120"/>
+            <a:off x="6964527" y="2589276"/>
             <a:ext cx="4449928" cy="0"/>
           </a:xfrm>
           <a:prstGeom prst="line">
@@ -9515,8 +9515,8 @@
         </p:nvSpPr>
         <p:spPr>
           <a:xfrm>
-            <a:off x="6964527" y="2593848"/>
-            <a:ext cx="4449927" cy="1166835"/>
+            <a:off x="6964527" y="2699004"/>
+            <a:ext cx="4449927" cy="1507540"/>
           </a:xfrm>
           <a:prstGeom prst="rect">
             <a:avLst/>
@@ -9542,7 +9542,7 @@
               <a:buChar char="・"/>
             </a:pPr>
             <a:r>
-              <a:rPr sz="1400" b="0" lang="ja-JP" altLang="en-US">
+              <a:rPr sz="2000" b="0" lang="ja-JP" altLang="en-US">
                 <a:solidFill>
                   <a:srgbClr val="44546A"/>
                 </a:solidFill>
@@ -9569,7 +9569,7 @@
               <a:buChar char="・"/>
             </a:pPr>
             <a:r>
-              <a:rPr sz="1400" b="0" lang="ja-JP" altLang="en-US">
+              <a:rPr sz="2000" b="0" lang="ja-JP" altLang="en-US">
                 <a:solidFill>
                   <a:srgbClr val="44546A"/>
                 </a:solidFill>
@@ -9590,7 +9590,7 @@
         </p:nvSpPr>
         <p:spPr>
           <a:xfrm>
-            <a:off x="5858103" y="2054077"/>
+            <a:off x="5858103" y="2277008"/>
             <a:ext cx="475488" cy="786384"/>
           </a:xfrm>
           <a:prstGeom prst="chevron">
@@ -9634,7 +9634,7 @@
         </p:nvSpPr>
         <p:spPr>
           <a:xfrm>
-            <a:off x="5556351" y="2913613"/>
+            <a:off x="5556351" y="3136544"/>
             <a:ext cx="1078992" cy="548640"/>
           </a:xfrm>
           <a:prstGeom prst="rect">
@@ -9655,7 +9655,7 @@
               </a:spcBef>
             </a:pPr>
             <a:r>
-              <a:rPr sz="1200" b="1" lang="ja-JP" altLang="en-US">
+              <a:rPr sz="1400" b="1" lang="ja-JP" altLang="en-US">
                 <a:solidFill>
                   <a:srgbClr val="194671"/>
                 </a:solidFill>
@@ -9813,7 +9813,7 @@
               </a:spcBef>
             </a:pPr>
             <a:r>
-              <a:rPr sz="1050" b="1" spc="300" lang="ja-JP" altLang="en-US">
+              <a:rPr sz="1200" b="1" spc="300" lang="ja-JP" altLang="en-US">
                 <a:solidFill>
                   <a:srgbClr val="194671"/>
                 </a:solidFill>
@@ -9834,12 +9834,12 @@
         </p:nvSpPr>
         <p:spPr>
           <a:xfrm>
-            <a:off x="5310530" y="1440179"/>
-            <a:ext cx="3198266" cy="4823459"/>
+            <a:off x="5456157" y="1457706"/>
+            <a:ext cx="3125453" cy="4805933"/>
           </a:xfrm>
           <a:prstGeom prst="roundRect">
             <a:avLst>
-              <a:gd name="adj" fmla="val 1715"/>
+              <a:gd name="adj" fmla="val 1755"/>
             </a:avLst>
           </a:prstGeom>
           <a:solidFill>
@@ -9886,12 +9886,12 @@
         </p:nvSpPr>
         <p:spPr>
           <a:xfrm>
-            <a:off x="2130552" y="1627631"/>
-            <a:ext cx="3015386" cy="801624"/>
+            <a:off x="2348992" y="1662684"/>
+            <a:ext cx="2942573" cy="906780"/>
           </a:xfrm>
           <a:prstGeom prst="roundRect">
             <a:avLst>
-              <a:gd name="adj" fmla="val 6844"/>
+              <a:gd name="adj" fmla="val 6050"/>
             </a:avLst>
           </a:prstGeom>
           <a:solidFill>
@@ -9940,8 +9940,8 @@
         </p:nvSpPr>
         <p:spPr>
           <a:xfrm>
-            <a:off x="2267712" y="1755648"/>
-            <a:ext cx="2741066" cy="280416"/>
+            <a:off x="2486152" y="1790700"/>
+            <a:ext cx="2668253" cy="350520"/>
           </a:xfrm>
           <a:prstGeom prst="rect">
             <a:avLst/>
@@ -9961,7 +9961,7 @@
               </a:spcBef>
             </a:pPr>
             <a:r>
-              <a:rPr sz="1600" b="1" lang="ja-JP" altLang="en-US">
+              <a:rPr sz="2000" b="1" lang="ja-JP" altLang="en-US">
                 <a:solidFill>
                   <a:srgbClr val="1F4E79"/>
                 </a:solidFill>
@@ -9982,8 +9982,8 @@
         </p:nvSpPr>
         <p:spPr>
           <a:xfrm>
-            <a:off x="2267712" y="2090928"/>
-            <a:ext cx="2741066" cy="228599"/>
+            <a:off x="2486152" y="2196084"/>
+            <a:ext cx="2668253" cy="263652"/>
           </a:xfrm>
           <a:prstGeom prst="rect">
             <a:avLst/>
@@ -10003,7 +10003,7 @@
               </a:spcBef>
             </a:pPr>
             <a:r>
-              <a:rPr sz="1200" b="0" lang="ja-JP" altLang="en-US">
+              <a:rPr sz="1400" b="0" lang="ja-JP" altLang="en-US">
                 <a:solidFill>
                   <a:srgbClr val="5F6F84"/>
                 </a:solidFill>
@@ -10024,12 +10024,12 @@
         </p:nvSpPr>
         <p:spPr>
           <a:xfrm>
-            <a:off x="5401970" y="1627631"/>
-            <a:ext cx="3015386" cy="801624"/>
+            <a:off x="5547597" y="1662684"/>
+            <a:ext cx="2942573" cy="906780"/>
           </a:xfrm>
           <a:prstGeom prst="roundRect">
             <a:avLst>
-              <a:gd name="adj" fmla="val 6844"/>
+              <a:gd name="adj" fmla="val 6050"/>
             </a:avLst>
           </a:prstGeom>
           <a:solidFill>
@@ -10078,8 +10078,8 @@
         </p:nvSpPr>
         <p:spPr>
           <a:xfrm>
-            <a:off x="5539130" y="1755648"/>
-            <a:ext cx="2741066" cy="280416"/>
+            <a:off x="5684757" y="1790700"/>
+            <a:ext cx="2668253" cy="350520"/>
           </a:xfrm>
           <a:prstGeom prst="rect">
             <a:avLst/>
@@ -10099,7 +10099,7 @@
               </a:spcBef>
             </a:pPr>
             <a:r>
-              <a:rPr sz="1600" b="1" lang="ja-JP" altLang="en-US">
+              <a:rPr sz="2000" b="1" lang="ja-JP" altLang="en-US">
                 <a:solidFill>
                   <a:srgbClr val="FFFFFF"/>
                 </a:solidFill>
@@ -10120,8 +10120,8 @@
         </p:nvSpPr>
         <p:spPr>
           <a:xfrm>
-            <a:off x="5539130" y="2090928"/>
-            <a:ext cx="2741066" cy="228599"/>
+            <a:off x="5684757" y="2196084"/>
+            <a:ext cx="2668253" cy="263652"/>
           </a:xfrm>
           <a:prstGeom prst="rect">
             <a:avLst/>
@@ -10141,7 +10141,7 @@
               </a:spcBef>
             </a:pPr>
             <a:r>
-              <a:rPr sz="1200" b="0" lang="ja-JP" altLang="en-US">
+              <a:rPr sz="1400" b="0" lang="ja-JP" altLang="en-US">
                 <a:solidFill>
                   <a:srgbClr val="FFFFFF"/>
                 </a:solidFill>
@@ -10162,12 +10162,12 @@
         </p:nvSpPr>
         <p:spPr>
           <a:xfrm>
-            <a:off x="8673388" y="1627631"/>
-            <a:ext cx="3015386" cy="801624"/>
+            <a:off x="8746202" y="1662684"/>
+            <a:ext cx="2942573" cy="906780"/>
           </a:xfrm>
           <a:prstGeom prst="roundRect">
             <a:avLst>
-              <a:gd name="adj" fmla="val 6844"/>
+              <a:gd name="adj" fmla="val 6050"/>
             </a:avLst>
           </a:prstGeom>
           <a:solidFill>
@@ -10216,8 +10216,8 @@
         </p:nvSpPr>
         <p:spPr>
           <a:xfrm>
-            <a:off x="8810548" y="1755648"/>
-            <a:ext cx="2741066" cy="280416"/>
+            <a:off x="8883362" y="1790700"/>
+            <a:ext cx="2668253" cy="350520"/>
           </a:xfrm>
           <a:prstGeom prst="rect">
             <a:avLst/>
@@ -10237,7 +10237,7 @@
               </a:spcBef>
             </a:pPr>
             <a:r>
-              <a:rPr sz="1600" b="1" lang="ja-JP" altLang="en-US">
+              <a:rPr sz="2000" b="1" lang="ja-JP" altLang="en-US">
                 <a:solidFill>
                   <a:srgbClr val="1F4E79"/>
                 </a:solidFill>
@@ -10258,8 +10258,8 @@
         </p:nvSpPr>
         <p:spPr>
           <a:xfrm>
-            <a:off x="8810548" y="2090928"/>
-            <a:ext cx="2741066" cy="228599"/>
+            <a:off x="8883362" y="2196084"/>
+            <a:ext cx="2668253" cy="263652"/>
           </a:xfrm>
           <a:prstGeom prst="rect">
             <a:avLst/>
@@ -10279,7 +10279,7 @@
               </a:spcBef>
             </a:pPr>
             <a:r>
-              <a:rPr sz="1200" b="0" lang="ja-JP" altLang="en-US">
+              <a:rPr sz="1400" b="0" lang="ja-JP" altLang="en-US">
                 <a:solidFill>
                   <a:srgbClr val="5F6F84"/>
                 </a:solidFill>
@@ -10300,8 +10300,8 @@
         </p:nvSpPr>
         <p:spPr>
           <a:xfrm>
-            <a:off x="548640" y="2520695"/>
-            <a:ext cx="1280160" cy="888872"/>
+            <a:off x="548640" y="2660904"/>
+            <a:ext cx="1498600" cy="849439"/>
           </a:xfrm>
           <a:prstGeom prst="rect">
             <a:avLst/>
@@ -10321,7 +10321,7 @@
               </a:spcBef>
             </a:pPr>
             <a:r>
-              <a:rPr sz="1400" b="1" lang="ja-JP" altLang="en-US">
+              <a:rPr sz="2000" b="1" lang="ja-JP" altLang="en-US">
                 <a:solidFill>
                   <a:srgbClr val="1F4E79"/>
                 </a:solidFill>
@@ -10342,7 +10342,7 @@
         </p:nvCxnSpPr>
         <p:spPr>
           <a:xfrm>
-            <a:off x="502920" y="3409568"/>
+            <a:off x="502920" y="3510343"/>
             <a:ext cx="11185855" cy="0"/>
           </a:xfrm>
           <a:prstGeom prst="line">
@@ -10377,8 +10377,8 @@
         </p:nvSpPr>
         <p:spPr>
           <a:xfrm>
-            <a:off x="2130552" y="2520695"/>
-            <a:ext cx="3015386" cy="888872"/>
+            <a:off x="2348992" y="2660904"/>
+            <a:ext cx="2942573" cy="849439"/>
           </a:xfrm>
           <a:prstGeom prst="rect">
             <a:avLst/>
@@ -10419,8 +10419,8 @@
         </p:nvSpPr>
         <p:spPr>
           <a:xfrm>
-            <a:off x="5401970" y="2520695"/>
-            <a:ext cx="3015386" cy="888872"/>
+            <a:off x="5547597" y="2660904"/>
+            <a:ext cx="2942573" cy="849439"/>
           </a:xfrm>
           <a:prstGeom prst="rect">
             <a:avLst/>
@@ -10461,8 +10461,8 @@
         </p:nvSpPr>
         <p:spPr>
           <a:xfrm>
-            <a:off x="8673388" y="2520695"/>
-            <a:ext cx="3015386" cy="888872"/>
+            <a:off x="8746202" y="2660904"/>
+            <a:ext cx="2942573" cy="849439"/>
           </a:xfrm>
           <a:prstGeom prst="rect">
             <a:avLst/>
@@ -10503,8 +10503,8 @@
         </p:nvSpPr>
         <p:spPr>
           <a:xfrm>
-            <a:off x="548640" y="3409568"/>
-            <a:ext cx="1280160" cy="888872"/>
+            <a:off x="548640" y="3510343"/>
+            <a:ext cx="1498600" cy="849439"/>
           </a:xfrm>
           <a:prstGeom prst="rect">
             <a:avLst/>
@@ -10524,7 +10524,7 @@
               </a:spcBef>
             </a:pPr>
             <a:r>
-              <a:rPr sz="1400" b="1" lang="ja-JP" altLang="en-US">
+              <a:rPr sz="2000" b="1" lang="ja-JP" altLang="en-US">
                 <a:solidFill>
                   <a:srgbClr val="1F4E79"/>
                 </a:solidFill>
@@ -10545,7 +10545,7 @@
         </p:nvCxnSpPr>
         <p:spPr>
           <a:xfrm>
-            <a:off x="502920" y="4298441"/>
+            <a:off x="502920" y="4359783"/>
             <a:ext cx="11185855" cy="0"/>
           </a:xfrm>
           <a:prstGeom prst="line">
@@ -10580,8 +10580,8 @@
         </p:nvSpPr>
         <p:spPr>
           <a:xfrm>
-            <a:off x="2130552" y="3409568"/>
-            <a:ext cx="3015386" cy="888872"/>
+            <a:off x="2348992" y="3510343"/>
+            <a:ext cx="2942573" cy="849439"/>
           </a:xfrm>
           <a:prstGeom prst="rect">
             <a:avLst/>
@@ -10622,8 +10622,8 @@
         </p:nvSpPr>
         <p:spPr>
           <a:xfrm>
-            <a:off x="5401970" y="3409568"/>
-            <a:ext cx="3015386" cy="888872"/>
+            <a:off x="5547597" y="3510343"/>
+            <a:ext cx="2942573" cy="849439"/>
           </a:xfrm>
           <a:prstGeom prst="rect">
             <a:avLst/>
@@ -10664,8 +10664,8 @@
         </p:nvSpPr>
         <p:spPr>
           <a:xfrm>
-            <a:off x="8673388" y="3409568"/>
-            <a:ext cx="3015386" cy="888872"/>
+            <a:off x="8746202" y="3510343"/>
+            <a:ext cx="2942573" cy="849439"/>
           </a:xfrm>
           <a:prstGeom prst="rect">
             <a:avLst/>
@@ -10706,8 +10706,8 @@
         </p:nvSpPr>
         <p:spPr>
           <a:xfrm>
-            <a:off x="548640" y="4298441"/>
-            <a:ext cx="1280160" cy="888872"/>
+            <a:off x="548640" y="4359783"/>
+            <a:ext cx="1498600" cy="849439"/>
           </a:xfrm>
           <a:prstGeom prst="rect">
             <a:avLst/>
@@ -10727,7 +10727,7 @@
               </a:spcBef>
             </a:pPr>
             <a:r>
-              <a:rPr sz="1400" b="1" lang="ja-JP" altLang="en-US">
+              <a:rPr sz="2000" b="1" lang="ja-JP" altLang="en-US">
                 <a:solidFill>
                   <a:srgbClr val="1F4E79"/>
                 </a:solidFill>
@@ -10748,7 +10748,7 @@
         </p:nvCxnSpPr>
         <p:spPr>
           <a:xfrm>
-            <a:off x="502920" y="5187314"/>
+            <a:off x="502920" y="5209222"/>
             <a:ext cx="11185855" cy="0"/>
           </a:xfrm>
           <a:prstGeom prst="line">
@@ -10783,8 +10783,8 @@
         </p:nvSpPr>
         <p:spPr>
           <a:xfrm>
-            <a:off x="2130552" y="4298441"/>
-            <a:ext cx="3015386" cy="888872"/>
+            <a:off x="2348992" y="4359783"/>
+            <a:ext cx="2942573" cy="849439"/>
           </a:xfrm>
           <a:prstGeom prst="rect">
             <a:avLst/>
@@ -10825,8 +10825,8 @@
         </p:nvSpPr>
         <p:spPr>
           <a:xfrm>
-            <a:off x="5401970" y="4298441"/>
-            <a:ext cx="3015386" cy="888872"/>
+            <a:off x="5547597" y="4359783"/>
+            <a:ext cx="2942573" cy="849439"/>
           </a:xfrm>
           <a:prstGeom prst="rect">
             <a:avLst/>
@@ -10867,8 +10867,8 @@
         </p:nvSpPr>
         <p:spPr>
           <a:xfrm>
-            <a:off x="8673388" y="4298441"/>
-            <a:ext cx="3015386" cy="888872"/>
+            <a:off x="8746202" y="4359783"/>
+            <a:ext cx="2942573" cy="849439"/>
           </a:xfrm>
           <a:prstGeom prst="rect">
             <a:avLst/>
@@ -10909,8 +10909,8 @@
         </p:nvSpPr>
         <p:spPr>
           <a:xfrm>
-            <a:off x="548640" y="5187314"/>
-            <a:ext cx="1280160" cy="888872"/>
+            <a:off x="548640" y="5209222"/>
+            <a:ext cx="1498600" cy="849439"/>
           </a:xfrm>
           <a:prstGeom prst="rect">
             <a:avLst/>
@@ -10930,7 +10930,7 @@
               </a:spcBef>
             </a:pPr>
             <a:r>
-              <a:rPr sz="1400" b="1" lang="ja-JP" altLang="en-US">
+              <a:rPr sz="2000" b="1" lang="ja-JP" altLang="en-US">
                 <a:solidFill>
                   <a:srgbClr val="1F4E79"/>
                 </a:solidFill>
@@ -10951,7 +10951,7 @@
         </p:nvCxnSpPr>
         <p:spPr>
           <a:xfrm>
-            <a:off x="502920" y="6076187"/>
+            <a:off x="502920" y="6058661"/>
             <a:ext cx="11185855" cy="0"/>
           </a:xfrm>
           <a:prstGeom prst="line">
@@ -10986,8 +10986,8 @@
         </p:nvSpPr>
         <p:spPr>
           <a:xfrm>
-            <a:off x="2130552" y="5187314"/>
-            <a:ext cx="3015386" cy="888872"/>
+            <a:off x="2348992" y="5209222"/>
+            <a:ext cx="2942573" cy="849439"/>
           </a:xfrm>
           <a:prstGeom prst="rect">
             <a:avLst/>
@@ -11028,8 +11028,8 @@
         </p:nvSpPr>
         <p:spPr>
           <a:xfrm>
-            <a:off x="5401970" y="5187314"/>
-            <a:ext cx="3015386" cy="888872"/>
+            <a:off x="5547597" y="5209222"/>
+            <a:ext cx="2942573" cy="849439"/>
           </a:xfrm>
           <a:prstGeom prst="rect">
             <a:avLst/>
@@ -11070,8 +11070,8 @@
         </p:nvSpPr>
         <p:spPr>
           <a:xfrm>
-            <a:off x="8673388" y="5187314"/>
-            <a:ext cx="3015386" cy="888872"/>
+            <a:off x="8746202" y="5209222"/>
+            <a:ext cx="2942573" cy="849439"/>
           </a:xfrm>
           <a:prstGeom prst="rect">
             <a:avLst/>
@@ -11112,12 +11112,12 @@
         </p:nvSpPr>
         <p:spPr>
           <a:xfrm>
-            <a:off x="5310530" y="1440179"/>
-            <a:ext cx="3198266" cy="4823459"/>
+            <a:off x="5456157" y="1457706"/>
+            <a:ext cx="3125453" cy="4805933"/>
           </a:xfrm>
           <a:prstGeom prst="roundRect">
             <a:avLst>
-              <a:gd name="adj" fmla="val 1715"/>
+              <a:gd name="adj" fmla="val 1755"/>
             </a:avLst>
           </a:prstGeom>
           <a:noFill/>
@@ -11158,8 +11158,8 @@
         </p:nvSpPr>
         <p:spPr>
           <a:xfrm>
-            <a:off x="6361023" y="1298447"/>
-            <a:ext cx="1097280" cy="283464"/>
+            <a:off x="6457543" y="1298448"/>
+            <a:ext cx="1122680" cy="318516"/>
           </a:xfrm>
           <a:prstGeom prst="roundRect">
             <a:avLst>
@@ -11201,7 +11201,7 @@
               </a:spcBef>
             </a:pPr>
             <a:r>
-              <a:rPr sz="1200" b="1" lang="ja-JP" altLang="en-US">
+              <a:rPr sz="1400" b="1" lang="ja-JP" altLang="en-US">
                 <a:solidFill>
                   <a:srgbClr val="FFFFFF"/>
                 </a:solidFill>
@@ -11359,7 +11359,7 @@
               </a:spcBef>
             </a:pPr>
             <a:r>
-              <a:rPr sz="1050" b="1" spc="300" lang="ja-JP" altLang="en-US">
+              <a:rPr sz="1200" b="1" spc="300" lang="ja-JP" altLang="en-US">
                 <a:solidFill>
                   <a:srgbClr val="194671"/>
                 </a:solidFill>
@@ -11447,7 +11447,7 @@
               </a:spcBef>
             </a:pPr>
             <a:r>
-              <a:rPr sz="1300" b="1" lang="ja-JP" altLang="en-US">
+              <a:rPr sz="1800" b="1" lang="ja-JP" altLang="en-US">
                 <a:solidFill>
                   <a:srgbClr val="FFFFFF"/>
                 </a:solidFill>
@@ -11535,7 +11535,7 @@
               </a:spcBef>
             </a:pPr>
             <a:r>
-              <a:rPr sz="1300" b="1" lang="ja-JP" altLang="en-US">
+              <a:rPr sz="1800" b="1" lang="ja-JP" altLang="en-US">
                 <a:solidFill>
                   <a:srgbClr val="FFFFFF"/>
                 </a:solidFill>
@@ -11623,7 +11623,7 @@
               </a:spcBef>
             </a:pPr>
             <a:r>
-              <a:rPr sz="1300" b="1" lang="ja-JP" altLang="en-US">
+              <a:rPr sz="1800" b="1" lang="ja-JP" altLang="en-US">
                 <a:solidFill>
                   <a:srgbClr val="FFFFFF"/>
                 </a:solidFill>
@@ -11711,7 +11711,7 @@
               </a:spcBef>
             </a:pPr>
             <a:r>
-              <a:rPr sz="1300" b="1" lang="ja-JP" altLang="en-US">
+              <a:rPr sz="1800" b="1" lang="ja-JP" altLang="en-US">
                 <a:solidFill>
                   <a:srgbClr val="FFFFFF"/>
                 </a:solidFill>
@@ -11733,11 +11733,11 @@
         <p:spPr>
           <a:xfrm>
             <a:off x="502920" y="1993392"/>
-            <a:ext cx="2604439" cy="1814962"/>
+            <a:ext cx="2604439" cy="2415052"/>
           </a:xfrm>
           <a:prstGeom prst="roundRect">
             <a:avLst>
-              <a:gd name="adj" fmla="val 3022"/>
+              <a:gd name="adj" fmla="val 2271"/>
             </a:avLst>
           </a:prstGeom>
           <a:solidFill>
@@ -11807,7 +11807,7 @@
               </a:spcBef>
             </a:pPr>
             <a:r>
-              <a:rPr sz="1050" b="1" spc="100" lang="ja-JP" altLang="en-US">
+              <a:rPr sz="1200" b="1" spc="100" lang="ja-JP" altLang="en-US">
                 <a:solidFill>
                   <a:srgbClr val="194671"/>
                 </a:solidFill>
@@ -11829,7 +11829,7 @@
         <p:spPr>
           <a:xfrm>
             <a:off x="685800" y="2432304"/>
-            <a:ext cx="2238679" cy="316991"/>
+            <a:ext cx="2238679" cy="387095"/>
           </a:xfrm>
           <a:prstGeom prst="rect">
             <a:avLst/>
@@ -11849,7 +11849,7 @@
               </a:spcBef>
             </a:pPr>
             <a:r>
-              <a:rPr sz="1600" b="1" lang="ja-JP" altLang="en-US">
+              <a:rPr sz="2000" b="1" lang="ja-JP" altLang="en-US">
                 <a:solidFill>
                   <a:srgbClr val="1F4E79"/>
                 </a:solidFill>
@@ -11870,7 +11870,7 @@
         </p:nvCxnSpPr>
         <p:spPr>
           <a:xfrm>
-            <a:off x="685800" y="2840736"/>
+            <a:off x="685800" y="2910840"/>
             <a:ext cx="2238679" cy="0"/>
           </a:xfrm>
           <a:prstGeom prst="line">
@@ -11905,8 +11905,8 @@
         </p:nvSpPr>
         <p:spPr>
           <a:xfrm>
-            <a:off x="685800" y="2950464"/>
-            <a:ext cx="2238679" cy="546994"/>
+            <a:off x="685800" y="3020568"/>
+            <a:ext cx="2238679" cy="1076980"/>
           </a:xfrm>
           <a:prstGeom prst="rect">
             <a:avLst/>
@@ -11926,7 +11926,7 @@
               </a:spcBef>
             </a:pPr>
             <a:r>
-              <a:rPr sz="1300" b="0" lang="ja-JP" altLang="en-US">
+              <a:rPr sz="1800" b="0" lang="ja-JP" altLang="en-US">
                 <a:solidFill>
                   <a:srgbClr val="44546A"/>
                 </a:solidFill>
@@ -11948,11 +11948,11 @@
         <p:spPr>
           <a:xfrm>
             <a:off x="3363391" y="1993392"/>
-            <a:ext cx="2604439" cy="1814962"/>
+            <a:ext cx="2604439" cy="2415052"/>
           </a:xfrm>
           <a:prstGeom prst="roundRect">
             <a:avLst>
-              <a:gd name="adj" fmla="val 3022"/>
+              <a:gd name="adj" fmla="val 2271"/>
             </a:avLst>
           </a:prstGeom>
           <a:solidFill>
@@ -12022,7 +12022,7 @@
               </a:spcBef>
             </a:pPr>
             <a:r>
-              <a:rPr sz="1050" b="1" spc="100" lang="ja-JP" altLang="en-US">
+              <a:rPr sz="1200" b="1" spc="100" lang="ja-JP" altLang="en-US">
                 <a:solidFill>
                   <a:srgbClr val="194671"/>
                 </a:solidFill>
@@ -12044,7 +12044,7 @@
         <p:spPr>
           <a:xfrm>
             <a:off x="3546271" y="2432304"/>
-            <a:ext cx="2238679" cy="316991"/>
+            <a:ext cx="2238679" cy="387095"/>
           </a:xfrm>
           <a:prstGeom prst="rect">
             <a:avLst/>
@@ -12064,7 +12064,7 @@
               </a:spcBef>
             </a:pPr>
             <a:r>
-              <a:rPr sz="1600" b="1" lang="ja-JP" altLang="en-US">
+              <a:rPr sz="2000" b="1" lang="ja-JP" altLang="en-US">
                 <a:solidFill>
                   <a:srgbClr val="1F4E79"/>
                 </a:solidFill>
@@ -12085,7 +12085,7 @@
         </p:nvCxnSpPr>
         <p:spPr>
           <a:xfrm>
-            <a:off x="3546271" y="2840736"/>
+            <a:off x="3546271" y="2910840"/>
             <a:ext cx="2238680" cy="0"/>
           </a:xfrm>
           <a:prstGeom prst="line">
@@ -12120,8 +12120,8 @@
         </p:nvSpPr>
         <p:spPr>
           <a:xfrm>
-            <a:off x="3546271" y="2950464"/>
-            <a:ext cx="2238679" cy="546994"/>
+            <a:off x="3546271" y="3020568"/>
+            <a:ext cx="2238679" cy="1076980"/>
           </a:xfrm>
           <a:prstGeom prst="rect">
             <a:avLst/>
@@ -12141,7 +12141,7 @@
               </a:spcBef>
             </a:pPr>
             <a:r>
-              <a:rPr sz="1300" b="0" lang="ja-JP" altLang="en-US">
+              <a:rPr sz="1800" b="0" lang="ja-JP" altLang="en-US">
                 <a:solidFill>
                   <a:srgbClr val="44546A"/>
                 </a:solidFill>
@@ -12163,11 +12163,11 @@
         <p:spPr>
           <a:xfrm>
             <a:off x="6223863" y="1993392"/>
-            <a:ext cx="2604439" cy="1814962"/>
+            <a:ext cx="2604439" cy="2415052"/>
           </a:xfrm>
           <a:prstGeom prst="roundRect">
             <a:avLst>
-              <a:gd name="adj" fmla="val 3022"/>
+              <a:gd name="adj" fmla="val 2271"/>
             </a:avLst>
           </a:prstGeom>
           <a:solidFill>
@@ -12237,7 +12237,7 @@
               </a:spcBef>
             </a:pPr>
             <a:r>
-              <a:rPr sz="1050" b="1" spc="100" lang="ja-JP" altLang="en-US">
+              <a:rPr sz="1200" b="1" spc="100" lang="ja-JP" altLang="en-US">
                 <a:solidFill>
                   <a:srgbClr val="194671"/>
                 </a:solidFill>
@@ -12259,7 +12259,7 @@
         <p:spPr>
           <a:xfrm>
             <a:off x="6406743" y="2432304"/>
-            <a:ext cx="2238679" cy="316991"/>
+            <a:ext cx="2238679" cy="387095"/>
           </a:xfrm>
           <a:prstGeom prst="rect">
             <a:avLst/>
@@ -12279,7 +12279,7 @@
               </a:spcBef>
             </a:pPr>
             <a:r>
-              <a:rPr sz="1600" b="1" lang="ja-JP" altLang="en-US">
+              <a:rPr sz="2000" b="1" lang="ja-JP" altLang="en-US">
                 <a:solidFill>
                   <a:srgbClr val="1F4E79"/>
                 </a:solidFill>
@@ -12300,7 +12300,7 @@
         </p:nvCxnSpPr>
         <p:spPr>
           <a:xfrm>
-            <a:off x="6406743" y="2840736"/>
+            <a:off x="6406743" y="2910840"/>
             <a:ext cx="2238680" cy="0"/>
           </a:xfrm>
           <a:prstGeom prst="line">
@@ -12335,8 +12335,8 @@
         </p:nvSpPr>
         <p:spPr>
           <a:xfrm>
-            <a:off x="6406743" y="2950464"/>
-            <a:ext cx="2238679" cy="546994"/>
+            <a:off x="6406743" y="3020568"/>
+            <a:ext cx="2238679" cy="736274"/>
           </a:xfrm>
           <a:prstGeom prst="rect">
             <a:avLst/>
@@ -12356,7 +12356,7 @@
               </a:spcBef>
             </a:pPr>
             <a:r>
-              <a:rPr sz="1300" b="0" lang="ja-JP" altLang="en-US">
+              <a:rPr sz="1800" b="0" lang="ja-JP" altLang="en-US">
                 <a:solidFill>
                   <a:srgbClr val="44546A"/>
                 </a:solidFill>
@@ -12378,11 +12378,11 @@
         <p:spPr>
           <a:xfrm>
             <a:off x="9084335" y="1993392"/>
-            <a:ext cx="2604439" cy="1814962"/>
+            <a:ext cx="2604439" cy="2415052"/>
           </a:xfrm>
           <a:prstGeom prst="roundRect">
             <a:avLst>
-              <a:gd name="adj" fmla="val 3022"/>
+              <a:gd name="adj" fmla="val 2271"/>
             </a:avLst>
           </a:prstGeom>
           <a:solidFill>
@@ -12452,7 +12452,7 @@
               </a:spcBef>
             </a:pPr>
             <a:r>
-              <a:rPr sz="1050" b="1" spc="100" lang="ja-JP" altLang="en-US">
+              <a:rPr sz="1200" b="1" spc="100" lang="ja-JP" altLang="en-US">
                 <a:solidFill>
                   <a:srgbClr val="194671"/>
                 </a:solidFill>
@@ -12474,7 +12474,7 @@
         <p:spPr>
           <a:xfrm>
             <a:off x="9267215" y="2432304"/>
-            <a:ext cx="2238679" cy="316991"/>
+            <a:ext cx="2238679" cy="387095"/>
           </a:xfrm>
           <a:prstGeom prst="rect">
             <a:avLst/>
@@ -12494,7 +12494,7 @@
               </a:spcBef>
             </a:pPr>
             <a:r>
-              <a:rPr sz="1600" b="1" lang="ja-JP" altLang="en-US">
+              <a:rPr sz="2000" b="1" lang="ja-JP" altLang="en-US">
                 <a:solidFill>
                   <a:srgbClr val="1F4E79"/>
                 </a:solidFill>
@@ -12515,7 +12515,7 @@
         </p:nvCxnSpPr>
         <p:spPr>
           <a:xfrm>
-            <a:off x="9267215" y="2840736"/>
+            <a:off x="9267215" y="2910840"/>
             <a:ext cx="2238680" cy="0"/>
           </a:xfrm>
           <a:prstGeom prst="line">
@@ -12550,8 +12550,8 @@
         </p:nvSpPr>
         <p:spPr>
           <a:xfrm>
-            <a:off x="9267215" y="2950464"/>
-            <a:ext cx="2238679" cy="546994"/>
+            <a:off x="9267215" y="3020568"/>
+            <a:ext cx="2238679" cy="736274"/>
           </a:xfrm>
           <a:prstGeom prst="rect">
             <a:avLst/>
@@ -12571,7 +12571,7 @@
               </a:spcBef>
             </a:pPr>
             <a:r>
-              <a:rPr sz="1300" b="0" lang="ja-JP" altLang="en-US">
+              <a:rPr sz="1800" b="0" lang="ja-JP" altLang="en-US">
                 <a:solidFill>
                   <a:srgbClr val="44546A"/>
                 </a:solidFill>
@@ -12729,7 +12729,7 @@
               </a:spcBef>
             </a:pPr>
             <a:r>
-              <a:rPr sz="1050" b="1" spc="300" lang="ja-JP" altLang="en-US">
+              <a:rPr sz="1200" b="1" spc="300" lang="ja-JP" altLang="en-US">
                 <a:solidFill>
                   <a:srgbClr val="194671"/>
                 </a:solidFill>
@@ -12751,7 +12751,7 @@
         <p:spPr>
           <a:xfrm>
             <a:off x="502920" y="1298448"/>
-            <a:ext cx="11185855" cy="347472"/>
+            <a:ext cx="11185855" cy="373380"/>
           </a:xfrm>
           <a:prstGeom prst="rect">
             <a:avLst/>
@@ -12795,7 +12795,7 @@
         <p:spPr>
           <a:xfrm>
             <a:off x="630936" y="1298448"/>
-            <a:ext cx="1755648" cy="347472"/>
+            <a:ext cx="1755648" cy="373380"/>
           </a:xfrm>
           <a:prstGeom prst="rect">
             <a:avLst/>
@@ -12815,7 +12815,7 @@
               </a:spcBef>
             </a:pPr>
             <a:r>
-              <a:rPr sz="1200" b="1" lang="ja-JP" altLang="en-US">
+              <a:rPr sz="1400" b="1" lang="ja-JP" altLang="en-US">
                 <a:solidFill>
                   <a:srgbClr val="FFFFFF"/>
                 </a:solidFill>
@@ -12837,7 +12837,7 @@
         <p:spPr>
           <a:xfrm>
             <a:off x="2551176" y="1298448"/>
-            <a:ext cx="1304544" cy="347472"/>
+            <a:ext cx="1482344" cy="373380"/>
           </a:xfrm>
           <a:prstGeom prst="rect">
             <a:avLst/>
@@ -12857,7 +12857,7 @@
               </a:spcBef>
             </a:pPr>
             <a:r>
-              <a:rPr sz="1200" b="1" lang="ja-JP" altLang="en-US">
+              <a:rPr sz="1400" b="1" lang="ja-JP" altLang="en-US">
                 <a:solidFill>
                   <a:srgbClr val="FFFFFF"/>
                 </a:solidFill>
@@ -12878,8 +12878,8 @@
         </p:nvSpPr>
         <p:spPr>
           <a:xfrm>
-            <a:off x="3919728" y="1298448"/>
-            <a:ext cx="1504431" cy="347472"/>
+            <a:off x="4097528" y="1298448"/>
+            <a:ext cx="1468871" cy="373380"/>
           </a:xfrm>
           <a:prstGeom prst="rect">
             <a:avLst/>
@@ -12899,7 +12899,7 @@
               </a:spcBef>
             </a:pPr>
             <a:r>
-              <a:rPr sz="1200" b="1" lang="ja-JP" altLang="en-US">
+              <a:rPr sz="1400" b="1" lang="ja-JP" altLang="en-US">
                 <a:solidFill>
                   <a:srgbClr val="FFFFFF"/>
                 </a:solidFill>
@@ -12920,8 +12920,8 @@
         </p:nvSpPr>
         <p:spPr>
           <a:xfrm>
-            <a:off x="5479023" y="1298448"/>
-            <a:ext cx="1504431" cy="347472"/>
+            <a:off x="5621263" y="1298448"/>
+            <a:ext cx="1468871" cy="373380"/>
           </a:xfrm>
           <a:prstGeom prst="rect">
             <a:avLst/>
@@ -12941,7 +12941,7 @@
               </a:spcBef>
             </a:pPr>
             <a:r>
-              <a:rPr sz="1200" b="1" lang="ja-JP" altLang="en-US">
+              <a:rPr sz="1400" b="1" lang="ja-JP" altLang="en-US">
                 <a:solidFill>
                   <a:srgbClr val="FFFFFF"/>
                 </a:solidFill>
@@ -12962,8 +12962,8 @@
         </p:nvSpPr>
         <p:spPr>
           <a:xfrm>
-            <a:off x="7038319" y="1298448"/>
-            <a:ext cx="1504431" cy="347472"/>
+            <a:off x="7144999" y="1298448"/>
+            <a:ext cx="1468871" cy="373380"/>
           </a:xfrm>
           <a:prstGeom prst="rect">
             <a:avLst/>
@@ -12983,7 +12983,7 @@
               </a:spcBef>
             </a:pPr>
             <a:r>
-              <a:rPr sz="1200" b="1" lang="ja-JP" altLang="en-US">
+              <a:rPr sz="1400" b="1" lang="ja-JP" altLang="en-US">
                 <a:solidFill>
                   <a:srgbClr val="FFFFFF"/>
                 </a:solidFill>
@@ -13004,8 +13004,8 @@
         </p:nvSpPr>
         <p:spPr>
           <a:xfrm>
-            <a:off x="8597615" y="1298448"/>
-            <a:ext cx="1504431" cy="347472"/>
+            <a:off x="8668735" y="1298448"/>
+            <a:ext cx="1468871" cy="373380"/>
           </a:xfrm>
           <a:prstGeom prst="rect">
             <a:avLst/>
@@ -13025,7 +13025,7 @@
               </a:spcBef>
             </a:pPr>
             <a:r>
-              <a:rPr sz="1200" b="1" lang="ja-JP" altLang="en-US">
+              <a:rPr sz="1400" b="1" lang="ja-JP" altLang="en-US">
                 <a:solidFill>
                   <a:srgbClr val="FFFFFF"/>
                 </a:solidFill>
@@ -13046,8 +13046,8 @@
         </p:nvSpPr>
         <p:spPr>
           <a:xfrm>
-            <a:off x="10156911" y="1298448"/>
-            <a:ext cx="1504431" cy="347472"/>
+            <a:off x="10192471" y="1298448"/>
+            <a:ext cx="1468871" cy="373380"/>
           </a:xfrm>
           <a:prstGeom prst="rect">
             <a:avLst/>
@@ -13067,7 +13067,7 @@
               </a:spcBef>
             </a:pPr>
             <a:r>
-              <a:rPr sz="1200" b="1" lang="ja-JP" altLang="en-US">
+              <a:rPr sz="1400" b="1" lang="ja-JP" altLang="en-US">
                 <a:solidFill>
                   <a:srgbClr val="FFFFFF"/>
                 </a:solidFill>
@@ -13088,7 +13088,7 @@
         </p:nvSpPr>
         <p:spPr>
           <a:xfrm>
-            <a:off x="502920" y="1645919"/>
+            <a:off x="502920" y="1671827"/>
             <a:ext cx="11185855" cy="676656"/>
           </a:xfrm>
           <a:prstGeom prst="rect">
@@ -13132,7 +13132,7 @@
         </p:nvSpPr>
         <p:spPr>
           <a:xfrm>
-            <a:off x="502920" y="2322576"/>
+            <a:off x="502920" y="2348484"/>
             <a:ext cx="11185855" cy="676656"/>
           </a:xfrm>
           <a:prstGeom prst="rect">
@@ -13176,7 +13176,7 @@
         </p:nvSpPr>
         <p:spPr>
           <a:xfrm>
-            <a:off x="502920" y="2999232"/>
+            <a:off x="502920" y="3025140"/>
             <a:ext cx="11185855" cy="676656"/>
           </a:xfrm>
           <a:prstGeom prst="rect">
@@ -13220,7 +13220,7 @@
         </p:nvSpPr>
         <p:spPr>
           <a:xfrm>
-            <a:off x="502920" y="3675887"/>
+            <a:off x="502920" y="3701795"/>
             <a:ext cx="11185855" cy="676656"/>
           </a:xfrm>
           <a:prstGeom prst="rect">
@@ -13264,7 +13264,7 @@
         </p:nvSpPr>
         <p:spPr>
           <a:xfrm>
-            <a:off x="502920" y="4352544"/>
+            <a:off x="502920" y="4378452"/>
             <a:ext cx="11185855" cy="676656"/>
           </a:xfrm>
           <a:prstGeom prst="rect">
@@ -13308,7 +13308,7 @@
         </p:nvSpPr>
         <p:spPr>
           <a:xfrm>
-            <a:off x="502920" y="5029200"/>
+            <a:off x="502920" y="5055108"/>
             <a:ext cx="11185855" cy="676656"/>
           </a:xfrm>
           <a:prstGeom prst="rect">
@@ -13352,7 +13352,7 @@
         </p:nvCxnSpPr>
         <p:spPr>
           <a:xfrm>
-            <a:off x="502920" y="2322576"/>
+            <a:off x="502920" y="2348484"/>
             <a:ext cx="11185855" cy="0"/>
           </a:xfrm>
           <a:prstGeom prst="line">
@@ -13387,7 +13387,7 @@
         </p:nvCxnSpPr>
         <p:spPr>
           <a:xfrm>
-            <a:off x="502920" y="2999232"/>
+            <a:off x="502920" y="3025140"/>
             <a:ext cx="11185855" cy="0"/>
           </a:xfrm>
           <a:prstGeom prst="line">
@@ -13422,7 +13422,7 @@
         </p:nvCxnSpPr>
         <p:spPr>
           <a:xfrm>
-            <a:off x="502920" y="3675887"/>
+            <a:off x="502920" y="3701795"/>
             <a:ext cx="11185855" cy="0"/>
           </a:xfrm>
           <a:prstGeom prst="line">
@@ -13457,7 +13457,7 @@
         </p:nvCxnSpPr>
         <p:spPr>
           <a:xfrm>
-            <a:off x="502920" y="4352544"/>
+            <a:off x="502920" y="4378452"/>
             <a:ext cx="11185855" cy="0"/>
           </a:xfrm>
           <a:prstGeom prst="line">
@@ -13492,7 +13492,7 @@
         </p:nvCxnSpPr>
         <p:spPr>
           <a:xfrm>
-            <a:off x="502920" y="5029200"/>
+            <a:off x="502920" y="5055108"/>
             <a:ext cx="11185855" cy="0"/>
           </a:xfrm>
           <a:prstGeom prst="line">
@@ -13527,7 +13527,7 @@
         </p:nvCxnSpPr>
         <p:spPr>
           <a:xfrm>
-            <a:off x="502920" y="5705855"/>
+            <a:off x="502920" y="5731763"/>
             <a:ext cx="11185855" cy="0"/>
           </a:xfrm>
           <a:prstGeom prst="line">
@@ -13562,7 +13562,7 @@
         </p:nvCxnSpPr>
         <p:spPr>
           <a:xfrm>
-            <a:off x="5451591" y="1645919"/>
+            <a:off x="5593831" y="1671827"/>
             <a:ext cx="0" cy="4059936"/>
           </a:xfrm>
           <a:prstGeom prst="line">
@@ -13597,7 +13597,7 @@
         </p:nvCxnSpPr>
         <p:spPr>
           <a:xfrm>
-            <a:off x="7010887" y="1645919"/>
+            <a:off x="7117567" y="1671827"/>
             <a:ext cx="0" cy="4059936"/>
           </a:xfrm>
           <a:prstGeom prst="line">
@@ -13632,7 +13632,7 @@
         </p:nvCxnSpPr>
         <p:spPr>
           <a:xfrm>
-            <a:off x="8570183" y="1645919"/>
+            <a:off x="8641303" y="1671827"/>
             <a:ext cx="0" cy="4059936"/>
           </a:xfrm>
           <a:prstGeom prst="line">
@@ -13667,7 +13667,7 @@
         </p:nvCxnSpPr>
         <p:spPr>
           <a:xfrm>
-            <a:off x="10129479" y="1645919"/>
+            <a:off x="10165039" y="1671827"/>
             <a:ext cx="0" cy="4059936"/>
           </a:xfrm>
           <a:prstGeom prst="line">
@@ -13702,7 +13702,7 @@
         </p:nvCxnSpPr>
         <p:spPr>
           <a:xfrm>
-            <a:off x="2514600" y="1645919"/>
+            <a:off x="2514600" y="1671827"/>
             <a:ext cx="0" cy="4059936"/>
           </a:xfrm>
           <a:prstGeom prst="line">
@@ -13737,7 +13737,7 @@
         </p:nvCxnSpPr>
         <p:spPr>
           <a:xfrm>
-            <a:off x="3892296" y="1645919"/>
+            <a:off x="4070096" y="1671827"/>
             <a:ext cx="0" cy="4059936"/>
           </a:xfrm>
           <a:prstGeom prst="line">
@@ -13772,7 +13772,7 @@
         </p:nvCxnSpPr>
         <p:spPr>
           <a:xfrm>
-            <a:off x="502920" y="1645919"/>
+            <a:off x="502920" y="1671827"/>
             <a:ext cx="0" cy="4059936"/>
           </a:xfrm>
           <a:prstGeom prst="line">
@@ -13807,7 +13807,7 @@
         </p:nvCxnSpPr>
         <p:spPr>
           <a:xfrm>
-            <a:off x="11688775" y="1645919"/>
+            <a:off x="11688775" y="1671827"/>
             <a:ext cx="0" cy="4059936"/>
           </a:xfrm>
           <a:prstGeom prst="line">
@@ -13842,7 +13842,7 @@
         </p:nvSpPr>
         <p:spPr>
           <a:xfrm>
-            <a:off x="630936" y="1645919"/>
+            <a:off x="630936" y="1671827"/>
             <a:ext cx="1755648" cy="676656"/>
           </a:xfrm>
           <a:prstGeom prst="rect">
@@ -13863,7 +13863,7 @@
               </a:spcBef>
             </a:pPr>
             <a:r>
-              <a:rPr sz="1200" b="1" lang="ja-JP" altLang="en-US">
+              <a:rPr sz="1400" b="1" lang="ja-JP" altLang="en-US">
                 <a:solidFill>
                   <a:srgbClr val="1F4E79"/>
                 </a:solidFill>
@@ -13884,8 +13884,8 @@
         </p:nvSpPr>
         <p:spPr>
           <a:xfrm>
-            <a:off x="2569464" y="1645919"/>
-            <a:ext cx="1267968" cy="676656"/>
+            <a:off x="2569464" y="1671827"/>
+            <a:ext cx="1445768" cy="676656"/>
           </a:xfrm>
           <a:prstGeom prst="rect">
             <a:avLst/>
@@ -13905,7 +13905,7 @@
               </a:spcBef>
             </a:pPr>
             <a:r>
-              <a:rPr sz="1200" b="0" lang="ja-JP" altLang="en-US">
+              <a:rPr sz="1400" b="0" lang="ja-JP" altLang="en-US">
                 <a:solidFill>
                   <a:srgbClr val="44546A"/>
                 </a:solidFill>
@@ -13926,8 +13926,8 @@
         </p:nvSpPr>
         <p:spPr>
           <a:xfrm>
-            <a:off x="3965448" y="1837943"/>
-            <a:ext cx="1412991" cy="292608"/>
+            <a:off x="4143248" y="1863851"/>
+            <a:ext cx="1377431" cy="292608"/>
           </a:xfrm>
           <a:prstGeom prst="roundRect">
             <a:avLst>
@@ -13972,7 +13972,7 @@
         </p:nvSpPr>
         <p:spPr>
           <a:xfrm>
-            <a:off x="630936" y="2322576"/>
+            <a:off x="630936" y="2348484"/>
             <a:ext cx="1755648" cy="676656"/>
           </a:xfrm>
           <a:prstGeom prst="rect">
@@ -13993,7 +13993,7 @@
               </a:spcBef>
             </a:pPr>
             <a:r>
-              <a:rPr sz="1200" b="1" lang="ja-JP" altLang="en-US">
+              <a:rPr sz="1400" b="1" lang="ja-JP" altLang="en-US">
                 <a:solidFill>
                   <a:srgbClr val="1F4E79"/>
                 </a:solidFill>
@@ -14014,8 +14014,8 @@
         </p:nvSpPr>
         <p:spPr>
           <a:xfrm>
-            <a:off x="2569464" y="2322576"/>
-            <a:ext cx="1267968" cy="676656"/>
+            <a:off x="2569464" y="2348484"/>
+            <a:ext cx="1445768" cy="676656"/>
           </a:xfrm>
           <a:prstGeom prst="rect">
             <a:avLst/>
@@ -14035,7 +14035,7 @@
               </a:spcBef>
             </a:pPr>
             <a:r>
-              <a:rPr sz="1200" b="0" lang="ja-JP" altLang="en-US">
+              <a:rPr sz="1400" b="0" lang="ja-JP" altLang="en-US">
                 <a:solidFill>
                   <a:srgbClr val="44546A"/>
                 </a:solidFill>
@@ -14056,8 +14056,8 @@
         </p:nvSpPr>
         <p:spPr>
           <a:xfrm>
-            <a:off x="3965448" y="2514600"/>
-            <a:ext cx="2972287" cy="292608"/>
+            <a:off x="4143248" y="2540508"/>
+            <a:ext cx="2901167" cy="292608"/>
           </a:xfrm>
           <a:prstGeom prst="roundRect">
             <a:avLst>
@@ -14102,7 +14102,7 @@
         </p:nvSpPr>
         <p:spPr>
           <a:xfrm>
-            <a:off x="630936" y="2999232"/>
+            <a:off x="630936" y="3025140"/>
             <a:ext cx="1755648" cy="676656"/>
           </a:xfrm>
           <a:prstGeom prst="rect">
@@ -14123,7 +14123,7 @@
               </a:spcBef>
             </a:pPr>
             <a:r>
-              <a:rPr sz="1200" b="1" lang="ja-JP" altLang="en-US">
+              <a:rPr sz="1400" b="1" lang="ja-JP" altLang="en-US">
                 <a:solidFill>
                   <a:srgbClr val="1F4E79"/>
                 </a:solidFill>
@@ -14144,8 +14144,8 @@
         </p:nvSpPr>
         <p:spPr>
           <a:xfrm>
-            <a:off x="2569464" y="2999232"/>
-            <a:ext cx="1267968" cy="676656"/>
+            <a:off x="2569464" y="3025140"/>
+            <a:ext cx="1445768" cy="676656"/>
           </a:xfrm>
           <a:prstGeom prst="rect">
             <a:avLst/>
@@ -14165,7 +14165,7 @@
               </a:spcBef>
             </a:pPr>
             <a:r>
-              <a:rPr sz="1200" b="0" lang="ja-JP" altLang="en-US">
+              <a:rPr sz="1400" b="0" lang="ja-JP" altLang="en-US">
                 <a:solidFill>
                   <a:srgbClr val="44546A"/>
                 </a:solidFill>
@@ -14186,8 +14186,8 @@
         </p:nvSpPr>
         <p:spPr>
           <a:xfrm>
-            <a:off x="5524743" y="3191256"/>
-            <a:ext cx="2972287" cy="292608"/>
+            <a:off x="5666983" y="3217164"/>
+            <a:ext cx="2901167" cy="292608"/>
           </a:xfrm>
           <a:prstGeom prst="roundRect">
             <a:avLst>
@@ -14232,7 +14232,7 @@
         </p:nvSpPr>
         <p:spPr>
           <a:xfrm>
-            <a:off x="630936" y="3675887"/>
+            <a:off x="630936" y="3701795"/>
             <a:ext cx="1755648" cy="676656"/>
           </a:xfrm>
           <a:prstGeom prst="rect">
@@ -14253,7 +14253,7 @@
               </a:spcBef>
             </a:pPr>
             <a:r>
-              <a:rPr sz="1200" b="1" lang="ja-JP" altLang="en-US">
+              <a:rPr sz="1400" b="1" lang="ja-JP" altLang="en-US">
                 <a:solidFill>
                   <a:srgbClr val="1F4E79"/>
                 </a:solidFill>
@@ -14274,8 +14274,8 @@
         </p:nvSpPr>
         <p:spPr>
           <a:xfrm>
-            <a:off x="2569464" y="3675887"/>
-            <a:ext cx="1267968" cy="676656"/>
+            <a:off x="2569464" y="3701795"/>
+            <a:ext cx="1445768" cy="676656"/>
           </a:xfrm>
           <a:prstGeom prst="rect">
             <a:avLst/>
@@ -14295,7 +14295,7 @@
               </a:spcBef>
             </a:pPr>
             <a:r>
-              <a:rPr sz="1200" b="0" lang="ja-JP" altLang="en-US">
+              <a:rPr sz="1400" b="0" lang="ja-JP" altLang="en-US">
                 <a:solidFill>
                   <a:srgbClr val="44546A"/>
                 </a:solidFill>
@@ -14316,8 +14316,8 @@
         </p:nvSpPr>
         <p:spPr>
           <a:xfrm>
-            <a:off x="5524743" y="3867911"/>
-            <a:ext cx="1412991" cy="292608"/>
+            <a:off x="5666983" y="3893819"/>
+            <a:ext cx="1377431" cy="292608"/>
           </a:xfrm>
           <a:prstGeom prst="roundRect">
             <a:avLst>
@@ -14362,7 +14362,7 @@
         </p:nvSpPr>
         <p:spPr>
           <a:xfrm>
-            <a:off x="630936" y="4352544"/>
+            <a:off x="630936" y="4378452"/>
             <a:ext cx="1755648" cy="676656"/>
           </a:xfrm>
           <a:prstGeom prst="rect">
@@ -14383,7 +14383,7 @@
               </a:spcBef>
             </a:pPr>
             <a:r>
-              <a:rPr sz="1200" b="1" lang="ja-JP" altLang="en-US">
+              <a:rPr sz="1400" b="1" lang="ja-JP" altLang="en-US">
                 <a:solidFill>
                   <a:srgbClr val="1F4E79"/>
                 </a:solidFill>
@@ -14404,8 +14404,8 @@
         </p:nvSpPr>
         <p:spPr>
           <a:xfrm>
-            <a:off x="2569464" y="4352544"/>
-            <a:ext cx="1267968" cy="676656"/>
+            <a:off x="2569464" y="4378452"/>
+            <a:ext cx="1445768" cy="676656"/>
           </a:xfrm>
           <a:prstGeom prst="rect">
             <a:avLst/>
@@ -14425,7 +14425,7 @@
               </a:spcBef>
             </a:pPr>
             <a:r>
-              <a:rPr sz="1200" b="0" lang="ja-JP" altLang="en-US">
+              <a:rPr sz="1400" b="0" lang="ja-JP" altLang="en-US">
                 <a:solidFill>
                   <a:srgbClr val="44546A"/>
                 </a:solidFill>
@@ -14446,8 +14446,8 @@
         </p:nvSpPr>
         <p:spPr>
           <a:xfrm>
-            <a:off x="7084039" y="4544568"/>
-            <a:ext cx="2972287" cy="292608"/>
+            <a:off x="7190719" y="4570476"/>
+            <a:ext cx="2901167" cy="292608"/>
           </a:xfrm>
           <a:prstGeom prst="roundRect">
             <a:avLst>
@@ -14492,7 +14492,7 @@
         </p:nvSpPr>
         <p:spPr>
           <a:xfrm>
-            <a:off x="630936" y="5029200"/>
+            <a:off x="630936" y="5055108"/>
             <a:ext cx="1755648" cy="676656"/>
           </a:xfrm>
           <a:prstGeom prst="rect">
@@ -14513,7 +14513,7 @@
               </a:spcBef>
             </a:pPr>
             <a:r>
-              <a:rPr sz="1200" b="1" lang="ja-JP" altLang="en-US">
+              <a:rPr sz="1400" b="1" lang="ja-JP" altLang="en-US">
                 <a:solidFill>
                   <a:srgbClr val="1F4E79"/>
                 </a:solidFill>
@@ -14534,8 +14534,8 @@
         </p:nvSpPr>
         <p:spPr>
           <a:xfrm>
-            <a:off x="2569464" y="5029200"/>
-            <a:ext cx="1267968" cy="676656"/>
+            <a:off x="2569464" y="5055108"/>
+            <a:ext cx="1445768" cy="676656"/>
           </a:xfrm>
           <a:prstGeom prst="rect">
             <a:avLst/>
@@ -14555,7 +14555,7 @@
               </a:spcBef>
             </a:pPr>
             <a:r>
-              <a:rPr sz="1200" b="0" lang="ja-JP" altLang="en-US">
+              <a:rPr sz="1400" b="0" lang="ja-JP" altLang="en-US">
                 <a:solidFill>
                   <a:srgbClr val="44546A"/>
                 </a:solidFill>
@@ -14576,7 +14576,7 @@
         </p:nvSpPr>
         <p:spPr>
           <a:xfrm>
-            <a:off x="10735391" y="5193792"/>
+            <a:off x="10753171" y="5219700"/>
             <a:ext cx="347472" cy="347472"/>
           </a:xfrm>
           <a:prstGeom prst="diamond">
@@ -14759,7 +14759,7 @@
               </a:spcBef>
             </a:pPr>
             <a:r>
-              <a:rPr sz="1050" b="1" spc="300" lang="ja-JP" altLang="en-US">
+              <a:rPr sz="1200" b="1" spc="300" lang="ja-JP" altLang="en-US">
                 <a:solidFill>
                   <a:srgbClr val="194671"/>
                 </a:solidFill>
@@ -14781,11 +14781,11 @@
         <p:spPr>
           <a:xfrm>
             <a:off x="4194252" y="1298448"/>
-            <a:ext cx="3803190" cy="914400"/>
+            <a:ext cx="3803190" cy="981455"/>
           </a:xfrm>
           <a:prstGeom prst="roundRect">
             <a:avLst>
-              <a:gd name="adj" fmla="val 6000"/>
+              <a:gd name="adj" fmla="val 5590"/>
             </a:avLst>
           </a:prstGeom>
           <a:solidFill>
@@ -14834,7 +14834,7 @@
         </p:nvSpPr>
         <p:spPr>
           <a:xfrm>
-            <a:off x="4450284" y="1499616"/>
+            <a:off x="4450284" y="1533143"/>
             <a:ext cx="512064" cy="512064"/>
           </a:xfrm>
           <a:prstGeom prst="ellipse">
@@ -14878,7 +14878,7 @@
         </p:nvSpPr>
         <p:spPr>
           <a:xfrm>
-            <a:off x="4527093" y="1566184"/>
+            <a:off x="4527093" y="1599712"/>
             <a:ext cx="358444" cy="358444"/>
           </a:xfrm>
           <a:custGeom>
@@ -14970,8 +14970,8 @@
         </p:nvSpPr>
         <p:spPr>
           <a:xfrm>
-            <a:off x="5145228" y="1431988"/>
-            <a:ext cx="2632758" cy="257175"/>
+            <a:off x="5145228" y="1417319"/>
+            <a:ext cx="2632758" cy="283464"/>
           </a:xfrm>
           <a:prstGeom prst="rect">
             <a:avLst/>
@@ -14991,7 +14991,7 @@
               </a:spcBef>
             </a:pPr>
             <a:r>
-              <a:rPr sz="1050" b="1" lang="ja-JP" altLang="en-US">
+              <a:rPr sz="1200" b="1" lang="ja-JP" altLang="en-US">
                 <a:solidFill>
                   <a:srgbClr val="FFFFFF"/>
                 </a:solidFill>
@@ -15012,8 +15012,8 @@
         </p:nvSpPr>
         <p:spPr>
           <a:xfrm>
-            <a:off x="5145228" y="1689163"/>
-            <a:ext cx="2632758" cy="390144"/>
+            <a:off x="5145228" y="1700784"/>
+            <a:ext cx="2632758" cy="460247"/>
           </a:xfrm>
           <a:prstGeom prst="rect">
             <a:avLst/>
@@ -15033,7 +15033,7 @@
               </a:spcBef>
             </a:pPr>
             <a:r>
-              <a:rPr sz="1600" b="1" lang="ja-JP" altLang="en-US">
+              <a:rPr sz="2000" b="1" lang="ja-JP" altLang="en-US">
                 <a:solidFill>
                   <a:srgbClr val="FFFFFF"/>
                 </a:solidFill>
@@ -15054,7 +15054,7 @@
         </p:nvCxnSpPr>
         <p:spPr>
           <a:xfrm>
-            <a:off x="6095847" y="2212848"/>
+            <a:off x="6095847" y="2279904"/>
             <a:ext cx="0" cy="283464"/>
           </a:xfrm>
           <a:prstGeom prst="line">
@@ -15089,7 +15089,7 @@
         </p:nvCxnSpPr>
         <p:spPr>
           <a:xfrm>
-            <a:off x="2281885" y="2496312"/>
+            <a:off x="2281885" y="2563368"/>
             <a:ext cx="7627925" cy="0"/>
           </a:xfrm>
           <a:prstGeom prst="line">
@@ -15124,7 +15124,7 @@
         </p:nvCxnSpPr>
         <p:spPr>
           <a:xfrm>
-            <a:off x="2281885" y="2496312"/>
+            <a:off x="2281885" y="2563368"/>
             <a:ext cx="0" cy="283464"/>
           </a:xfrm>
           <a:prstGeom prst="line">
@@ -15159,7 +15159,7 @@
         </p:nvCxnSpPr>
         <p:spPr>
           <a:xfrm>
-            <a:off x="6095847" y="2496312"/>
+            <a:off x="6095847" y="2563368"/>
             <a:ext cx="0" cy="283464"/>
           </a:xfrm>
           <a:prstGeom prst="line">
@@ -15194,7 +15194,7 @@
         </p:nvCxnSpPr>
         <p:spPr>
           <a:xfrm>
-            <a:off x="9909810" y="2496312"/>
+            <a:off x="9909810" y="2563368"/>
             <a:ext cx="0" cy="283464"/>
           </a:xfrm>
           <a:prstGeom prst="line">
@@ -15229,12 +15229,12 @@
         </p:nvSpPr>
         <p:spPr>
           <a:xfrm>
-            <a:off x="502920" y="2779776"/>
-            <a:ext cx="3557930" cy="2141181"/>
+            <a:off x="502920" y="2846832"/>
+            <a:ext cx="3557930" cy="2272817"/>
           </a:xfrm>
           <a:prstGeom prst="roundRect">
             <a:avLst>
-              <a:gd name="adj" fmla="val 2562"/>
+              <a:gd name="adj" fmla="val 2413"/>
             </a:avLst>
           </a:prstGeom>
           <a:solidFill>
@@ -15283,7 +15283,7 @@
         </p:nvSpPr>
         <p:spPr>
           <a:xfrm>
-            <a:off x="502920" y="2779776"/>
+            <a:off x="502920" y="2846832"/>
             <a:ext cx="3557930" cy="402336"/>
           </a:xfrm>
           <a:prstGeom prst="round2SameRect">
@@ -15348,7 +15348,7 @@
         </p:nvSpPr>
         <p:spPr>
           <a:xfrm>
-            <a:off x="2053285" y="3364992"/>
+            <a:off x="2053285" y="3432048"/>
             <a:ext cx="457200" cy="457200"/>
           </a:xfrm>
           <a:prstGeom prst="ellipse">
@@ -15392,7 +15392,7 @@
         </p:nvSpPr>
         <p:spPr>
           <a:xfrm>
-            <a:off x="2121865" y="3424428"/>
+            <a:off x="2121865" y="3491484"/>
             <a:ext cx="320040" cy="320040"/>
           </a:xfrm>
           <a:custGeom>
@@ -15484,8 +15484,8 @@
         </p:nvSpPr>
         <p:spPr>
           <a:xfrm>
-            <a:off x="685800" y="3913632"/>
-            <a:ext cx="3192170" cy="310896"/>
+            <a:off x="685800" y="3980688"/>
+            <a:ext cx="3192170" cy="350520"/>
           </a:xfrm>
           <a:prstGeom prst="rect">
             <a:avLst/>
@@ -15505,7 +15505,7 @@
               </a:spcBef>
             </a:pPr>
             <a:r>
-              <a:rPr sz="1600" b="1" lang="ja-JP" altLang="en-US">
+              <a:rPr sz="2000" b="1" lang="ja-JP" altLang="en-US">
                 <a:solidFill>
                   <a:srgbClr val="1F4E79"/>
                 </a:solidFill>
@@ -15526,7 +15526,7 @@
         </p:nvCxnSpPr>
         <p:spPr>
           <a:xfrm>
-            <a:off x="1570299" y="4315968"/>
+            <a:off x="1570299" y="4422647"/>
             <a:ext cx="1423172" cy="0"/>
           </a:xfrm>
           <a:prstGeom prst="line">
@@ -15561,8 +15561,8 @@
         </p:nvSpPr>
         <p:spPr>
           <a:xfrm>
-            <a:off x="685800" y="4407407"/>
-            <a:ext cx="3192170" cy="403821"/>
+            <a:off x="685800" y="4514087"/>
+            <a:ext cx="3192170" cy="495833"/>
           </a:xfrm>
           <a:prstGeom prst="rect">
             <a:avLst/>
@@ -15582,7 +15582,7 @@
               </a:spcBef>
             </a:pPr>
             <a:r>
-              <a:rPr sz="1300" b="0" lang="ja-JP" altLang="en-US">
+              <a:rPr sz="1800" b="0" lang="ja-JP" altLang="en-US">
                 <a:solidFill>
                   <a:srgbClr val="44546A"/>
                 </a:solidFill>
@@ -15603,12 +15603,12 @@
         </p:nvSpPr>
         <p:spPr>
           <a:xfrm>
-            <a:off x="4316882" y="2779776"/>
-            <a:ext cx="3557930" cy="2141181"/>
+            <a:off x="4316882" y="2846832"/>
+            <a:ext cx="3557930" cy="2272817"/>
           </a:xfrm>
           <a:prstGeom prst="roundRect">
             <a:avLst>
-              <a:gd name="adj" fmla="val 2562"/>
+              <a:gd name="adj" fmla="val 2413"/>
             </a:avLst>
           </a:prstGeom>
           <a:solidFill>
@@ -15657,7 +15657,7 @@
         </p:nvSpPr>
         <p:spPr>
           <a:xfrm>
-            <a:off x="4316882" y="2779776"/>
+            <a:off x="4316882" y="2846832"/>
             <a:ext cx="3557930" cy="402336"/>
           </a:xfrm>
           <a:prstGeom prst="round2SameRect">
@@ -15722,7 +15722,7 @@
         </p:nvSpPr>
         <p:spPr>
           <a:xfrm>
-            <a:off x="5867247" y="3364992"/>
+            <a:off x="5867247" y="3432048"/>
             <a:ext cx="457200" cy="457200"/>
           </a:xfrm>
           <a:prstGeom prst="ellipse">
@@ -15766,7 +15766,7 @@
         </p:nvSpPr>
         <p:spPr>
           <a:xfrm>
-            <a:off x="5935827" y="3424428"/>
+            <a:off x="5935827" y="3491484"/>
             <a:ext cx="320040" cy="320040"/>
           </a:xfrm>
           <a:custGeom>
@@ -15858,8 +15858,8 @@
         </p:nvSpPr>
         <p:spPr>
           <a:xfrm>
-            <a:off x="4499762" y="3913632"/>
-            <a:ext cx="3192170" cy="310896"/>
+            <a:off x="4499762" y="3980688"/>
+            <a:ext cx="3192170" cy="350520"/>
           </a:xfrm>
           <a:prstGeom prst="rect">
             <a:avLst/>
@@ -15879,7 +15879,7 @@
               </a:spcBef>
             </a:pPr>
             <a:r>
-              <a:rPr sz="1600" b="1" lang="ja-JP" altLang="en-US">
+              <a:rPr sz="2000" b="1" lang="ja-JP" altLang="en-US">
                 <a:solidFill>
                   <a:srgbClr val="1F4E79"/>
                 </a:solidFill>
@@ -15900,7 +15900,7 @@
         </p:nvCxnSpPr>
         <p:spPr>
           <a:xfrm>
-            <a:off x="5384261" y="4315968"/>
+            <a:off x="5384261" y="4422647"/>
             <a:ext cx="1423172" cy="0"/>
           </a:xfrm>
           <a:prstGeom prst="line">
@@ -15935,8 +15935,8 @@
         </p:nvSpPr>
         <p:spPr>
           <a:xfrm>
-            <a:off x="4499762" y="4407407"/>
-            <a:ext cx="3192170" cy="403821"/>
+            <a:off x="4499762" y="4514087"/>
+            <a:ext cx="3192170" cy="495833"/>
           </a:xfrm>
           <a:prstGeom prst="rect">
             <a:avLst/>
@@ -15956,7 +15956,7 @@
               </a:spcBef>
             </a:pPr>
             <a:r>
-              <a:rPr sz="1300" b="0" lang="ja-JP" altLang="en-US">
+              <a:rPr sz="1800" b="0" lang="ja-JP" altLang="en-US">
                 <a:solidFill>
                   <a:srgbClr val="44546A"/>
                 </a:solidFill>
@@ -15977,12 +15977,12 @@
         </p:nvSpPr>
         <p:spPr>
           <a:xfrm>
-            <a:off x="8130844" y="2779776"/>
-            <a:ext cx="3557930" cy="2141181"/>
+            <a:off x="8130844" y="2846832"/>
+            <a:ext cx="3557930" cy="2272817"/>
           </a:xfrm>
           <a:prstGeom prst="roundRect">
             <a:avLst>
-              <a:gd name="adj" fmla="val 2562"/>
+              <a:gd name="adj" fmla="val 2413"/>
             </a:avLst>
           </a:prstGeom>
           <a:solidFill>
@@ -16031,7 +16031,7 @@
         </p:nvSpPr>
         <p:spPr>
           <a:xfrm>
-            <a:off x="8130844" y="2779776"/>
+            <a:off x="8130844" y="2846832"/>
             <a:ext cx="3557930" cy="402336"/>
           </a:xfrm>
           <a:prstGeom prst="round2SameRect">
@@ -16096,7 +16096,7 @@
         </p:nvSpPr>
         <p:spPr>
           <a:xfrm>
-            <a:off x="9681210" y="3364992"/>
+            <a:off x="9681210" y="3432048"/>
             <a:ext cx="457200" cy="457200"/>
           </a:xfrm>
           <a:prstGeom prst="ellipse">
@@ -16140,7 +16140,7 @@
         </p:nvSpPr>
         <p:spPr>
           <a:xfrm>
-            <a:off x="9749790" y="3424428"/>
+            <a:off x="9749790" y="3491484"/>
             <a:ext cx="320040" cy="320040"/>
           </a:xfrm>
           <a:custGeom>
@@ -16232,8 +16232,8 @@
         </p:nvSpPr>
         <p:spPr>
           <a:xfrm>
-            <a:off x="8313724" y="3913632"/>
-            <a:ext cx="3192170" cy="310896"/>
+            <a:off x="8313724" y="3980688"/>
+            <a:ext cx="3192170" cy="350520"/>
           </a:xfrm>
           <a:prstGeom prst="rect">
             <a:avLst/>
@@ -16253,7 +16253,7 @@
               </a:spcBef>
             </a:pPr>
             <a:r>
-              <a:rPr sz="1600" b="1" lang="ja-JP" altLang="en-US">
+              <a:rPr sz="2000" b="1" lang="ja-JP" altLang="en-US">
                 <a:solidFill>
                   <a:srgbClr val="1F4E79"/>
                 </a:solidFill>
@@ -16274,7 +16274,7 @@
         </p:nvCxnSpPr>
         <p:spPr>
           <a:xfrm>
-            <a:off x="9198223" y="4315968"/>
+            <a:off x="9198223" y="4422647"/>
             <a:ext cx="1423173" cy="0"/>
           </a:xfrm>
           <a:prstGeom prst="line">
@@ -16309,8 +16309,8 @@
         </p:nvSpPr>
         <p:spPr>
           <a:xfrm>
-            <a:off x="8313724" y="4407407"/>
-            <a:ext cx="3192170" cy="403821"/>
+            <a:off x="8313724" y="4514087"/>
+            <a:ext cx="3192170" cy="495833"/>
           </a:xfrm>
           <a:prstGeom prst="rect">
             <a:avLst/>
@@ -16330,7 +16330,7 @@
               </a:spcBef>
             </a:pPr>
             <a:r>
-              <a:rPr sz="1300" b="0" lang="ja-JP" altLang="en-US">
+              <a:rPr sz="1800" b="0" lang="ja-JP" altLang="en-US">
                 <a:solidFill>
                   <a:srgbClr val="44546A"/>
                 </a:solidFill>
@@ -16424,7 +16424,7 @@
               </a:spcBef>
             </a:pPr>
             <a:r>
-              <a:rPr sz="1050" b="1" spc="300" lang="ja-JP" altLang="en-US">
+              <a:rPr sz="1200" b="1" spc="300" lang="ja-JP" altLang="en-US">
                 <a:solidFill>
                   <a:srgbClr val="194671"/>
                 </a:solidFill>
@@ -16582,7 +16582,7 @@
               </a:spcBef>
             </a:pPr>
             <a:r>
-              <a:rPr sz="1600" b="1" lang="ja-JP" altLang="en-US">
+              <a:rPr sz="2000" b="1" lang="ja-JP" altLang="en-US">
                 <a:solidFill>
                   <a:srgbClr val="1F4E79"/>
                 </a:solidFill>
@@ -16659,7 +16659,7 @@
               </a:spcBef>
             </a:pPr>
             <a:r>
-              <a:rPr sz="1300" b="0" lang="ja-JP" altLang="en-US">
+              <a:rPr sz="1800" b="0" lang="ja-JP" altLang="en-US">
                 <a:solidFill>
                   <a:srgbClr val="44546A"/>
                 </a:solidFill>
@@ -16817,7 +16817,7 @@
               </a:spcBef>
             </a:pPr>
             <a:r>
-              <a:rPr sz="1600" b="1" lang="ja-JP" altLang="en-US">
+              <a:rPr sz="2000" b="1" lang="ja-JP" altLang="en-US">
                 <a:solidFill>
                   <a:srgbClr val="1F4E79"/>
                 </a:solidFill>
@@ -16894,7 +16894,7 @@
               </a:spcBef>
             </a:pPr>
             <a:r>
-              <a:rPr sz="1300" b="0" lang="ja-JP" altLang="en-US">
+              <a:rPr sz="1800" b="0" lang="ja-JP" altLang="en-US">
                 <a:solidFill>
                   <a:srgbClr val="44546A"/>
                 </a:solidFill>
@@ -17052,7 +17052,7 @@
               </a:spcBef>
             </a:pPr>
             <a:r>
-              <a:rPr sz="1600" b="1" lang="ja-JP" altLang="en-US">
+              <a:rPr sz="2000" b="1" lang="ja-JP" altLang="en-US">
                 <a:solidFill>
                   <a:srgbClr val="1F4E79"/>
                 </a:solidFill>
@@ -17129,7 +17129,7 @@
               </a:spcBef>
             </a:pPr>
             <a:r>
-              <a:rPr sz="1300" b="0" lang="ja-JP" altLang="en-US">
+              <a:rPr sz="1800" b="0" lang="ja-JP" altLang="en-US">
                 <a:solidFill>
                   <a:srgbClr val="44546A"/>
                 </a:solidFill>
@@ -17287,7 +17287,7 @@
               </a:spcBef>
             </a:pPr>
             <a:r>
-              <a:rPr sz="1600" b="1" lang="ja-JP" altLang="en-US">
+              <a:rPr sz="2000" b="1" lang="ja-JP" altLang="en-US">
                 <a:solidFill>
                   <a:srgbClr val="1F4E79"/>
                 </a:solidFill>
@@ -17364,7 +17364,7 @@
               </a:spcBef>
             </a:pPr>
             <a:r>
-              <a:rPr sz="1300" b="0" lang="ja-JP" altLang="en-US">
+              <a:rPr sz="1800" b="0" lang="ja-JP" altLang="en-US">
                 <a:solidFill>
                   <a:srgbClr val="44546A"/>
                 </a:solidFill>
@@ -17588,7 +17588,7 @@
               </a:spcBef>
             </a:pPr>
             <a:r>
-              <a:rPr sz="1050" b="1" spc="300" lang="ja-JP" altLang="en-US">
+              <a:rPr sz="1200" b="1" spc="300" lang="ja-JP" altLang="en-US">
                 <a:solidFill>
                   <a:srgbClr val="194671"/>
                 </a:solidFill>
@@ -17611,7 +17611,7 @@
         </p:nvGraphicFramePr>
         <p:xfrm>
           <a:off x="502920" y="1298448"/>
-          <a:ext cx="7371891" cy="3182112"/>
+          <a:ext cx="7371891" cy="3208020"/>
         </p:xfrm>
         <a:graphic>
           <a:graphicData uri="http://schemas.openxmlformats.org/drawingml/2006/table">
@@ -17624,7 +17624,7 @@
                 <a:gridCol w="3300847"/>
                 <a:gridCol w="1650423"/>
               </a:tblGrid>
-              <a:tr h="347472">
+              <a:tr h="373380">
                 <a:tc>
                   <a:txBody>
                     <a:bodyPr wrap="square"/>
@@ -17636,7 +17636,7 @@
                         </a:lnSpc>
                       </a:pPr>
                       <a:r>
-                        <a:rPr sz="1200" b="1" lang="ja-JP" altLang="en-US">
+                        <a:rPr sz="1400" b="1" lang="ja-JP" altLang="en-US">
                           <a:solidFill>
                             <a:srgbClr val="FFFFFF"/>
                           </a:solidFill>
@@ -17685,7 +17685,7 @@
                         </a:lnSpc>
                       </a:pPr>
                       <a:r>
-                        <a:rPr sz="1200" b="1" lang="ja-JP" altLang="en-US">
+                        <a:rPr sz="1400" b="1" lang="ja-JP" altLang="en-US">
                           <a:solidFill>
                             <a:srgbClr val="FFFFFF"/>
                           </a:solidFill>
@@ -17734,7 +17734,7 @@
                         </a:lnSpc>
                       </a:pPr>
                       <a:r>
-                        <a:rPr sz="1200" b="1" lang="ja-JP" altLang="en-US">
+                        <a:rPr sz="1400" b="1" lang="ja-JP" altLang="en-US">
                           <a:solidFill>
                             <a:srgbClr val="FFFFFF"/>
                           </a:solidFill>
@@ -17785,7 +17785,7 @@
                         </a:lnSpc>
                       </a:pPr>
                       <a:r>
-                        <a:rPr sz="1200" b="1" lang="ja-JP" altLang="en-US">
+                        <a:rPr sz="1400" b="1" lang="ja-JP" altLang="en-US">
                           <a:solidFill>
                             <a:srgbClr val="1F4E79"/>
                           </a:solidFill>
@@ -17834,7 +17834,7 @@
                         </a:lnSpc>
                       </a:pPr>
                       <a:r>
-                        <a:rPr sz="1200" b="0" lang="ja-JP" altLang="en-US">
+                        <a:rPr sz="1400" b="0" lang="ja-JP" altLang="en-US">
                           <a:solidFill>
                             <a:srgbClr val="44546A"/>
                           </a:solidFill>
@@ -17883,7 +17883,7 @@
                         </a:lnSpc>
                       </a:pPr>
                       <a:r>
-                        <a:rPr sz="1200" b="0" lang="ja-JP" altLang="en-US">
+                        <a:rPr sz="1400" b="0" lang="ja-JP" altLang="en-US">
                           <a:solidFill>
                             <a:srgbClr val="44546A"/>
                           </a:solidFill>
@@ -17934,7 +17934,7 @@
                         </a:lnSpc>
                       </a:pPr>
                       <a:r>
-                        <a:rPr sz="1200" b="1" lang="ja-JP" altLang="en-US">
+                        <a:rPr sz="1400" b="1" lang="ja-JP" altLang="en-US">
                           <a:solidFill>
                             <a:srgbClr val="1F4E79"/>
                           </a:solidFill>
@@ -17983,7 +17983,7 @@
                         </a:lnSpc>
                       </a:pPr>
                       <a:r>
-                        <a:rPr sz="1200" b="0" lang="ja-JP" altLang="en-US">
+                        <a:rPr sz="1400" b="0" lang="ja-JP" altLang="en-US">
                           <a:solidFill>
                             <a:srgbClr val="44546A"/>
                           </a:solidFill>
@@ -18032,7 +18032,7 @@
                         </a:lnSpc>
                       </a:pPr>
                       <a:r>
-                        <a:rPr sz="1200" b="0" lang="ja-JP" altLang="en-US">
+                        <a:rPr sz="1400" b="0" lang="ja-JP" altLang="en-US">
                           <a:solidFill>
                             <a:srgbClr val="44546A"/>
                           </a:solidFill>
@@ -18083,7 +18083,7 @@
                         </a:lnSpc>
                       </a:pPr>
                       <a:r>
-                        <a:rPr sz="1200" b="1" lang="ja-JP" altLang="en-US">
+                        <a:rPr sz="1400" b="1" lang="ja-JP" altLang="en-US">
                           <a:solidFill>
                             <a:srgbClr val="1F4E79"/>
                           </a:solidFill>
@@ -18132,7 +18132,7 @@
                         </a:lnSpc>
                       </a:pPr>
                       <a:r>
-                        <a:rPr sz="1200" b="0" lang="ja-JP" altLang="en-US">
+                        <a:rPr sz="1400" b="0" lang="ja-JP" altLang="en-US">
                           <a:solidFill>
                             <a:srgbClr val="44546A"/>
                           </a:solidFill>
@@ -18181,7 +18181,7 @@
                         </a:lnSpc>
                       </a:pPr>
                       <a:r>
-                        <a:rPr sz="1200" b="0" lang="ja-JP" altLang="en-US">
+                        <a:rPr sz="1400" b="0" lang="ja-JP" altLang="en-US">
                           <a:solidFill>
                             <a:srgbClr val="44546A"/>
                           </a:solidFill>
@@ -18232,7 +18232,7 @@
                         </a:lnSpc>
                       </a:pPr>
                       <a:r>
-                        <a:rPr sz="1200" b="1" lang="ja-JP" altLang="en-US">
+                        <a:rPr sz="1400" b="1" lang="ja-JP" altLang="en-US">
                           <a:solidFill>
                             <a:srgbClr val="1F4E79"/>
                           </a:solidFill>
@@ -18281,7 +18281,7 @@
                         </a:lnSpc>
                       </a:pPr>
                       <a:r>
-                        <a:rPr sz="1200" b="0" lang="ja-JP" altLang="en-US">
+                        <a:rPr sz="1400" b="0" lang="ja-JP" altLang="en-US">
                           <a:solidFill>
                             <a:srgbClr val="44546A"/>
                           </a:solidFill>
@@ -18330,7 +18330,7 @@
                         </a:lnSpc>
                       </a:pPr>
                       <a:r>
-                        <a:rPr sz="1200" b="0" lang="ja-JP" altLang="en-US">
+                        <a:rPr sz="1400" b="0" lang="ja-JP" altLang="en-US">
                           <a:solidFill>
                             <a:srgbClr val="44546A"/>
                           </a:solidFill>
@@ -18381,7 +18381,7 @@
                         </a:lnSpc>
                       </a:pPr>
                       <a:r>
-                        <a:rPr sz="1200" b="1" lang="ja-JP" altLang="en-US">
+                        <a:rPr sz="1400" b="1" lang="ja-JP" altLang="en-US">
                           <a:solidFill>
                             <a:srgbClr val="1F4E79"/>
                           </a:solidFill>
@@ -18468,7 +18468,7 @@
                         </a:lnSpc>
                       </a:pPr>
                       <a:r>
-                        <a:rPr sz="1200" b="1" lang="ja-JP" altLang="en-US">
+                        <a:rPr sz="1400" b="1" lang="ja-JP" altLang="en-US">
                           <a:solidFill>
                             <a:srgbClr val="1F4E79"/>
                           </a:solidFill>
@@ -18520,11 +18520,11 @@
         <p:spPr>
           <a:xfrm>
             <a:off x="8130844" y="1298448"/>
-            <a:ext cx="3557930" cy="1624888"/>
+            <a:ext cx="3557930" cy="1519275"/>
           </a:xfrm>
           <a:prstGeom prst="roundRect">
             <a:avLst>
-              <a:gd name="adj" fmla="val 3376"/>
+              <a:gd name="adj" fmla="val 3611"/>
             </a:avLst>
           </a:prstGeom>
           <a:solidFill>
@@ -18639,7 +18639,7 @@
         <p:spPr>
           <a:xfrm>
             <a:off x="8268004" y="1737360"/>
-            <a:ext cx="3283610" cy="1094536"/>
+            <a:ext cx="3283610" cy="988923"/>
           </a:xfrm>
           <a:prstGeom prst="rect">
             <a:avLst/>
@@ -18690,12 +18690,12 @@
         </p:nvSpPr>
         <p:spPr>
           <a:xfrm>
-            <a:off x="8130844" y="3142792"/>
-            <a:ext cx="3557930" cy="1337767"/>
+            <a:off x="8130844" y="3037179"/>
+            <a:ext cx="3557930" cy="1469288"/>
           </a:xfrm>
           <a:prstGeom prst="roundRect">
             <a:avLst>
-              <a:gd name="adj" fmla="val 4101"/>
+              <a:gd name="adj" fmla="val 3734"/>
             </a:avLst>
           </a:prstGeom>
           <a:solidFill>
@@ -18738,8 +18738,8 @@
         </p:nvSpPr>
         <p:spPr>
           <a:xfrm>
-            <a:off x="8332012" y="3289096"/>
-            <a:ext cx="3155594" cy="292608"/>
+            <a:off x="8332012" y="3183483"/>
+            <a:ext cx="3155594" cy="350520"/>
           </a:xfrm>
           <a:prstGeom prst="rect">
             <a:avLst/>
@@ -18759,7 +18759,7 @@
               </a:spcBef>
             </a:pPr>
             <a:r>
-              <a:rPr sz="1600" b="1" lang="ja-JP" altLang="en-US">
+              <a:rPr sz="2000" b="1" lang="ja-JP" altLang="en-US">
                 <a:solidFill>
                   <a:srgbClr val="1F4E79"/>
                 </a:solidFill>
@@ -18780,8 +18780,8 @@
         </p:nvSpPr>
         <p:spPr>
           <a:xfrm>
-            <a:off x="8332012" y="3636568"/>
-            <a:ext cx="3155594" cy="715975"/>
+            <a:off x="8332012" y="3588867"/>
+            <a:ext cx="3155594" cy="789584"/>
           </a:xfrm>
           <a:prstGeom prst="rect">
             <a:avLst/>
@@ -18807,7 +18807,7 @@
               <a:buChar char="・"/>
             </a:pPr>
             <a:r>
-              <a:rPr sz="1200" b="0" lang="ja-JP" altLang="en-US">
+              <a:rPr sz="1400" b="0" lang="ja-JP" altLang="en-US">
                 <a:solidFill>
                   <a:srgbClr val="44546A"/>
                 </a:solidFill>
@@ -18834,7 +18834,7 @@
               <a:buChar char="・"/>
             </a:pPr>
             <a:r>
-              <a:rPr sz="1200" b="0" lang="ja-JP" altLang="en-US">
+              <a:rPr sz="1400" b="0" lang="ja-JP" altLang="en-US">
                 <a:solidFill>
                   <a:srgbClr val="44546A"/>
                 </a:solidFill>
@@ -18992,7 +18992,7 @@
               </a:spcBef>
             </a:pPr>
             <a:r>
-              <a:rPr sz="1050" b="1" spc="300" lang="ja-JP" altLang="en-US">
+              <a:rPr sz="1200" b="1" spc="300" lang="ja-JP" altLang="en-US">
                 <a:solidFill>
                   <a:srgbClr val="194671"/>
                 </a:solidFill>
@@ -19014,7 +19014,7 @@
         <p:spPr>
           <a:xfrm>
             <a:off x="630936" y="1298448"/>
-            <a:ext cx="914400" cy="274320"/>
+            <a:ext cx="914400" cy="283464"/>
           </a:xfrm>
           <a:prstGeom prst="rect">
             <a:avLst/>
@@ -19034,7 +19034,7 @@
               </a:spcBef>
             </a:pPr>
             <a:r>
-              <a:rPr sz="1050" b="1" lang="ja-JP" altLang="en-US">
+              <a:rPr sz="1200" b="1" lang="ja-JP" altLang="en-US">
                 <a:solidFill>
                   <a:srgbClr val="5F6F84"/>
                 </a:solidFill>
@@ -19056,7 +19056,7 @@
         <p:spPr>
           <a:xfrm>
             <a:off x="1728216" y="1298448"/>
-            <a:ext cx="3280245" cy="274320"/>
+            <a:ext cx="3280245" cy="283464"/>
           </a:xfrm>
           <a:prstGeom prst="rect">
             <a:avLst/>
@@ -19076,7 +19076,7 @@
               </a:spcBef>
             </a:pPr>
             <a:r>
-              <a:rPr sz="1050" b="1" lang="ja-JP" altLang="en-US">
+              <a:rPr sz="1200" b="1" lang="ja-JP" altLang="en-US">
                 <a:solidFill>
                   <a:srgbClr val="5F6F84"/>
                 </a:solidFill>
@@ -19098,7 +19098,7 @@
         <p:spPr>
           <a:xfrm>
             <a:off x="5465661" y="1298448"/>
-            <a:ext cx="4174857" cy="274320"/>
+            <a:ext cx="4174857" cy="283464"/>
           </a:xfrm>
           <a:prstGeom prst="rect">
             <a:avLst/>
@@ -19118,7 +19118,7 @@
               </a:spcBef>
             </a:pPr>
             <a:r>
-              <a:rPr sz="1050" b="1" lang="ja-JP" altLang="en-US">
+              <a:rPr sz="1200" b="1" lang="ja-JP" altLang="en-US">
                 <a:solidFill>
                   <a:srgbClr val="5F6F84"/>
                 </a:solidFill>
@@ -19140,7 +19140,7 @@
         <p:spPr>
           <a:xfrm>
             <a:off x="9823399" y="1298448"/>
-            <a:ext cx="1645920" cy="274320"/>
+            <a:ext cx="1645920" cy="283464"/>
           </a:xfrm>
           <a:prstGeom prst="rect">
             <a:avLst/>
@@ -19160,7 +19160,7 @@
               </a:spcBef>
             </a:pPr>
             <a:r>
-              <a:rPr sz="1050" b="1" lang="ja-JP" altLang="en-US">
+              <a:rPr sz="1200" b="1" lang="ja-JP" altLang="en-US">
                 <a:solidFill>
                   <a:srgbClr val="5F6F84"/>
                 </a:solidFill>
@@ -19181,7 +19181,7 @@
         </p:nvSpPr>
         <p:spPr>
           <a:xfrm>
-            <a:off x="502920" y="1645919"/>
+            <a:off x="502920" y="1655064"/>
             <a:ext cx="11185855" cy="1188720"/>
           </a:xfrm>
           <a:prstGeom prst="roundRect">
@@ -19235,8 +19235,8 @@
         </p:nvSpPr>
         <p:spPr>
           <a:xfrm>
-            <a:off x="758952" y="2071115"/>
-            <a:ext cx="658368" cy="338328"/>
+            <a:off x="758952" y="2062734"/>
+            <a:ext cx="658368" cy="373380"/>
           </a:xfrm>
           <a:prstGeom prst="roundRect">
             <a:avLst>
@@ -19278,7 +19278,7 @@
               </a:spcBef>
             </a:pPr>
             <a:r>
-              <a:rPr sz="1200" b="1" lang="ja-JP" altLang="en-US">
+              <a:rPr sz="1400" b="1" lang="ja-JP" altLang="en-US">
                 <a:solidFill>
                   <a:srgbClr val="FFFFFF"/>
                 </a:solidFill>
@@ -19299,7 +19299,7 @@
         </p:nvSpPr>
         <p:spPr>
           <a:xfrm>
-            <a:off x="1728216" y="1700784"/>
+            <a:off x="1728216" y="1709928"/>
             <a:ext cx="3188805" cy="1078992"/>
           </a:xfrm>
           <a:prstGeom prst="rect">
@@ -19320,7 +19320,7 @@
               </a:spcBef>
             </a:pPr>
             <a:r>
-              <a:rPr sz="1600" b="1" lang="ja-JP" altLang="en-US">
+              <a:rPr sz="2000" b="1" lang="ja-JP" altLang="en-US">
                 <a:solidFill>
                   <a:srgbClr val="1F4E79"/>
                 </a:solidFill>
@@ -19341,7 +19341,7 @@
         </p:nvSpPr>
         <p:spPr>
           <a:xfrm>
-            <a:off x="5145621" y="2103120"/>
+            <a:off x="5145621" y="2112264"/>
             <a:ext cx="182880" cy="274320"/>
           </a:xfrm>
           <a:prstGeom prst="chevron">
@@ -19385,7 +19385,7 @@
         </p:nvSpPr>
         <p:spPr>
           <a:xfrm>
-            <a:off x="5520525" y="1700784"/>
+            <a:off x="5520525" y="1709928"/>
             <a:ext cx="4065129" cy="1078992"/>
           </a:xfrm>
           <a:prstGeom prst="rect">
@@ -19406,7 +19406,7 @@
               </a:spcBef>
             </a:pPr>
             <a:r>
-              <a:rPr sz="1400" b="0" lang="ja-JP" altLang="en-US">
+              <a:rPr sz="2000" b="0" lang="ja-JP" altLang="en-US">
                 <a:solidFill>
                   <a:srgbClr val="44546A"/>
                 </a:solidFill>
@@ -19427,7 +19427,7 @@
         </p:nvSpPr>
         <p:spPr>
           <a:xfrm>
-            <a:off x="9823399" y="1700784"/>
+            <a:off x="9823399" y="1709928"/>
             <a:ext cx="1554480" cy="1078992"/>
           </a:xfrm>
           <a:prstGeom prst="rect">
@@ -19448,7 +19448,7 @@
               </a:spcBef>
             </a:pPr>
             <a:r>
-              <a:rPr sz="1050" b="0" lang="ja-JP" altLang="en-US">
+              <a:rPr sz="1200" b="0" lang="ja-JP" altLang="en-US">
                 <a:solidFill>
                   <a:srgbClr val="44546A"/>
                 </a:solidFill>
@@ -19469,7 +19469,7 @@
         </p:nvSpPr>
         <p:spPr>
           <a:xfrm>
-            <a:off x="502920" y="3017520"/>
+            <a:off x="502920" y="3026664"/>
             <a:ext cx="11185855" cy="1188720"/>
           </a:xfrm>
           <a:prstGeom prst="roundRect">
@@ -19523,8 +19523,8 @@
         </p:nvSpPr>
         <p:spPr>
           <a:xfrm>
-            <a:off x="758952" y="3442715"/>
-            <a:ext cx="658368" cy="338328"/>
+            <a:off x="758952" y="3434334"/>
+            <a:ext cx="658368" cy="373380"/>
           </a:xfrm>
           <a:prstGeom prst="roundRect">
             <a:avLst>
@@ -19566,7 +19566,7 @@
               </a:spcBef>
             </a:pPr>
             <a:r>
-              <a:rPr sz="1200" b="1" lang="ja-JP" altLang="en-US">
+              <a:rPr sz="1400" b="1" lang="ja-JP" altLang="en-US">
                 <a:solidFill>
                   <a:srgbClr val="FFFFFF"/>
                 </a:solidFill>
@@ -19587,7 +19587,7 @@
         </p:nvSpPr>
         <p:spPr>
           <a:xfrm>
-            <a:off x="1728216" y="3072384"/>
+            <a:off x="1728216" y="3081528"/>
             <a:ext cx="3188805" cy="1078992"/>
           </a:xfrm>
           <a:prstGeom prst="rect">
@@ -19608,7 +19608,7 @@
               </a:spcBef>
             </a:pPr>
             <a:r>
-              <a:rPr sz="1600" b="1" lang="ja-JP" altLang="en-US">
+              <a:rPr sz="2000" b="1" lang="ja-JP" altLang="en-US">
                 <a:solidFill>
                   <a:srgbClr val="1F4E79"/>
                 </a:solidFill>
@@ -19629,7 +19629,7 @@
         </p:nvSpPr>
         <p:spPr>
           <a:xfrm>
-            <a:off x="5145621" y="3474720"/>
+            <a:off x="5145621" y="3483864"/>
             <a:ext cx="182880" cy="274320"/>
           </a:xfrm>
           <a:prstGeom prst="chevron">
@@ -19673,7 +19673,7 @@
         </p:nvSpPr>
         <p:spPr>
           <a:xfrm>
-            <a:off x="5520525" y="3072384"/>
+            <a:off x="5520525" y="3081528"/>
             <a:ext cx="4065129" cy="1078992"/>
           </a:xfrm>
           <a:prstGeom prst="rect">
@@ -19694,7 +19694,7 @@
               </a:spcBef>
             </a:pPr>
             <a:r>
-              <a:rPr sz="1400" b="0" lang="ja-JP" altLang="en-US">
+              <a:rPr sz="2000" b="0" lang="ja-JP" altLang="en-US">
                 <a:solidFill>
                   <a:srgbClr val="44546A"/>
                 </a:solidFill>
@@ -19715,7 +19715,7 @@
         </p:nvSpPr>
         <p:spPr>
           <a:xfrm>
-            <a:off x="9823399" y="3072384"/>
+            <a:off x="9823399" y="3081528"/>
             <a:ext cx="1554480" cy="1078992"/>
           </a:xfrm>
           <a:prstGeom prst="rect">
@@ -19736,7 +19736,7 @@
               </a:spcBef>
             </a:pPr>
             <a:r>
-              <a:rPr sz="1050" b="0" lang="ja-JP" altLang="en-US">
+              <a:rPr sz="1200" b="0" lang="ja-JP" altLang="en-US">
                 <a:solidFill>
                   <a:srgbClr val="5F6F84"/>
                 </a:solidFill>
@@ -19879,7 +19879,7 @@
             <a:r>
               <a:rPr sz="1300" b="0" spc="200" lang="ja-JP" altLang="en-US">
                 <a:solidFill>
-                  <a:srgbClr val="8496AB"/>
+                  <a:srgbClr val="5F6F84"/>
                 </a:solidFill>
                 <a:latin typeface="Arial"/>
                 <a:ea typeface="游ゴシック"/>
@@ -20035,7 +20035,7 @@
               </a:spcBef>
             </a:pPr>
             <a:r>
-              <a:rPr sz="1050" b="1" spc="300" lang="ja-JP" altLang="en-US">
+              <a:rPr sz="1200" b="1" spc="300" lang="ja-JP" altLang="en-US">
                 <a:solidFill>
                   <a:srgbClr val="194671"/>
                 </a:solidFill>
@@ -20057,7 +20057,7 @@
         <p:spPr>
           <a:xfrm>
             <a:off x="502920" y="1298448"/>
-            <a:ext cx="832103" cy="338328"/>
+            <a:ext cx="915923" cy="373380"/>
           </a:xfrm>
           <a:prstGeom prst="roundRect">
             <a:avLst>
@@ -20101,7 +20101,7 @@
               </a:spcBef>
             </a:pPr>
             <a:r>
-              <a:rPr sz="1200" b="1" lang="ja-JP" altLang="en-US">
+              <a:rPr sz="1400" b="1" lang="ja-JP" altLang="en-US">
                 <a:solidFill>
                   <a:srgbClr val="1F4E79"/>
                 </a:solidFill>
@@ -20122,8 +20122,8 @@
         </p:nvSpPr>
         <p:spPr>
           <a:xfrm>
-            <a:off x="1463039" y="1298448"/>
-            <a:ext cx="935736" cy="338328"/>
+            <a:off x="1546860" y="1298448"/>
+            <a:ext cx="1036828" cy="373380"/>
           </a:xfrm>
           <a:prstGeom prst="roundRect">
             <a:avLst>
@@ -20165,7 +20165,7 @@
               </a:spcBef>
             </a:pPr>
             <a:r>
-              <a:rPr sz="1200" b="1" lang="ja-JP" altLang="en-US">
+              <a:rPr sz="1400" b="1" lang="ja-JP" altLang="en-US">
                 <a:solidFill>
                   <a:srgbClr val="FFFFFF"/>
                 </a:solidFill>
@@ -20186,8 +20186,8 @@
         </p:nvSpPr>
         <p:spPr>
           <a:xfrm>
-            <a:off x="2508504" y="1298448"/>
-            <a:ext cx="1088136" cy="338328"/>
+            <a:off x="2693416" y="1298448"/>
+            <a:ext cx="1214627" cy="373380"/>
           </a:xfrm>
           <a:prstGeom prst="roundRect">
             <a:avLst>
@@ -20229,7 +20229,7 @@
               </a:spcBef>
             </a:pPr>
             <a:r>
-              <a:rPr sz="1200" b="1" lang="ja-JP" altLang="en-US">
+              <a:rPr sz="1400" b="1" lang="ja-JP" altLang="en-US">
                 <a:solidFill>
                   <a:srgbClr val="FFFFFF"/>
                 </a:solidFill>
@@ -20250,8 +20250,8 @@
         </p:nvSpPr>
         <p:spPr>
           <a:xfrm>
-            <a:off x="3706367" y="1298448"/>
-            <a:ext cx="935736" cy="338328"/>
+            <a:off x="4017772" y="1298448"/>
+            <a:ext cx="1036828" cy="373380"/>
           </a:xfrm>
           <a:prstGeom prst="roundRect">
             <a:avLst>
@@ -20293,7 +20293,7 @@
               </a:spcBef>
             </a:pPr>
             <a:r>
-              <a:rPr sz="1200" b="1" lang="ja-JP" altLang="en-US">
+              <a:rPr sz="1400" b="1" lang="ja-JP" altLang="en-US">
                 <a:solidFill>
                   <a:srgbClr val="FFFFFF"/>
                 </a:solidFill>
@@ -20314,8 +20314,8 @@
         </p:nvSpPr>
         <p:spPr>
           <a:xfrm>
-            <a:off x="4751832" y="1298448"/>
-            <a:ext cx="1088136" cy="338328"/>
+            <a:off x="5164328" y="1298448"/>
+            <a:ext cx="1214627" cy="373380"/>
           </a:xfrm>
           <a:prstGeom prst="roundRect">
             <a:avLst>
@@ -20357,7 +20357,7 @@
               </a:spcBef>
             </a:pPr>
             <a:r>
-              <a:rPr sz="1200" b="1" lang="ja-JP" altLang="en-US">
+              <a:rPr sz="1400" b="1" lang="ja-JP" altLang="en-US">
                 <a:solidFill>
                   <a:srgbClr val="44546A"/>
                 </a:solidFill>
@@ -20378,8 +20378,8 @@
         </p:nvSpPr>
         <p:spPr>
           <a:xfrm>
-            <a:off x="630936" y="1837943"/>
-            <a:ext cx="1097280" cy="274320"/>
+            <a:off x="630936" y="1872996"/>
+            <a:ext cx="1097280" cy="283464"/>
           </a:xfrm>
           <a:prstGeom prst="rect">
             <a:avLst/>
@@ -20399,7 +20399,7 @@
               </a:spcBef>
             </a:pPr>
             <a:r>
-              <a:rPr sz="1050" b="1" lang="ja-JP" altLang="en-US">
+              <a:rPr sz="1200" b="1" lang="ja-JP" altLang="en-US">
                 <a:solidFill>
                   <a:srgbClr val="5F6F84"/>
                 </a:solidFill>
@@ -20420,8 +20420,8 @@
         </p:nvSpPr>
         <p:spPr>
           <a:xfrm>
-            <a:off x="1911095" y="1837943"/>
-            <a:ext cx="2108094" cy="274320"/>
+            <a:off x="1911095" y="1872996"/>
+            <a:ext cx="2257124" cy="283464"/>
           </a:xfrm>
           <a:prstGeom prst="rect">
             <a:avLst/>
@@ -20441,7 +20441,7 @@
               </a:spcBef>
             </a:pPr>
             <a:r>
-              <a:rPr sz="1050" b="1" lang="ja-JP" altLang="en-US">
+              <a:rPr sz="1200" b="1" lang="ja-JP" altLang="en-US">
                 <a:solidFill>
                   <a:srgbClr val="5F6F84"/>
                 </a:solidFill>
@@ -20462,8 +20462,8 @@
         </p:nvSpPr>
         <p:spPr>
           <a:xfrm>
-            <a:off x="4202070" y="1837943"/>
-            <a:ext cx="2103120" cy="274320"/>
+            <a:off x="4351100" y="1872996"/>
+            <a:ext cx="2103120" cy="283464"/>
           </a:xfrm>
           <a:prstGeom prst="rect">
             <a:avLst/>
@@ -20483,7 +20483,7 @@
               </a:spcBef>
             </a:pPr>
             <a:r>
-              <a:rPr sz="1050" b="1" lang="ja-JP" altLang="en-US">
+              <a:rPr sz="1200" b="1" lang="ja-JP" altLang="en-US">
                 <a:solidFill>
                   <a:srgbClr val="5F6F84"/>
                 </a:solidFill>
@@ -20504,8 +20504,8 @@
         </p:nvSpPr>
         <p:spPr>
           <a:xfrm>
-            <a:off x="6488070" y="1837943"/>
-            <a:ext cx="1554480" cy="274320"/>
+            <a:off x="6637100" y="1872996"/>
+            <a:ext cx="1554480" cy="283464"/>
           </a:xfrm>
           <a:prstGeom prst="rect">
             <a:avLst/>
@@ -20525,7 +20525,7 @@
               </a:spcBef>
             </a:pPr>
             <a:r>
-              <a:rPr sz="1050" b="1" lang="ja-JP" altLang="en-US">
+              <a:rPr sz="1200" b="1" lang="ja-JP" altLang="en-US">
                 <a:solidFill>
                   <a:srgbClr val="5F6F84"/>
                 </a:solidFill>
@@ -20546,8 +20546,8 @@
         </p:nvSpPr>
         <p:spPr>
           <a:xfrm>
-            <a:off x="8225430" y="1837943"/>
-            <a:ext cx="868680" cy="274320"/>
+            <a:off x="8374460" y="1872996"/>
+            <a:ext cx="868680" cy="283464"/>
           </a:xfrm>
           <a:prstGeom prst="rect">
             <a:avLst/>
@@ -20567,7 +20567,7 @@
               </a:spcBef>
             </a:pPr>
             <a:r>
-              <a:rPr sz="1050" b="1" lang="ja-JP" altLang="en-US">
+              <a:rPr sz="1200" b="1" lang="ja-JP" altLang="en-US">
                 <a:solidFill>
                   <a:srgbClr val="5F6F84"/>
                 </a:solidFill>
@@ -20588,8 +20588,8 @@
         </p:nvSpPr>
         <p:spPr>
           <a:xfrm>
-            <a:off x="9276990" y="1837943"/>
-            <a:ext cx="2283768" cy="274320"/>
+            <a:off x="9426020" y="1872996"/>
+            <a:ext cx="2134738" cy="283464"/>
           </a:xfrm>
           <a:prstGeom prst="rect">
             <a:avLst/>
@@ -20609,7 +20609,7 @@
               </a:spcBef>
             </a:pPr>
             <a:r>
-              <a:rPr sz="1050" b="1" lang="ja-JP" altLang="en-US">
+              <a:rPr sz="1200" b="1" lang="ja-JP" altLang="en-US">
                 <a:solidFill>
                   <a:srgbClr val="5F6F84"/>
                 </a:solidFill>
@@ -20630,7 +20630,7 @@
         </p:nvCxnSpPr>
         <p:spPr>
           <a:xfrm>
-            <a:off x="502920" y="2148839"/>
+            <a:off x="502920" y="2193036"/>
             <a:ext cx="11185855" cy="0"/>
           </a:xfrm>
           <a:prstGeom prst="line">
@@ -20665,8 +20665,8 @@
         </p:nvSpPr>
         <p:spPr>
           <a:xfrm>
-            <a:off x="685800" y="2318003"/>
-            <a:ext cx="987552" cy="338328"/>
+            <a:off x="685800" y="2344674"/>
+            <a:ext cx="987552" cy="373380"/>
           </a:xfrm>
           <a:prstGeom prst="roundRect">
             <a:avLst>
@@ -20708,7 +20708,7 @@
               </a:spcBef>
             </a:pPr>
             <a:r>
-              <a:rPr sz="1200" b="1" lang="ja-JP" altLang="en-US">
+              <a:rPr sz="1400" b="1" lang="ja-JP" altLang="en-US">
                 <a:solidFill>
                   <a:srgbClr val="FFFFFF"/>
                 </a:solidFill>
@@ -20729,8 +20729,8 @@
         </p:nvSpPr>
         <p:spPr>
           <a:xfrm>
-            <a:off x="1911095" y="2148839"/>
-            <a:ext cx="2108094" cy="676656"/>
+            <a:off x="1911095" y="2193036"/>
+            <a:ext cx="2257124" cy="676656"/>
           </a:xfrm>
           <a:prstGeom prst="rect">
             <a:avLst/>
@@ -20750,7 +20750,7 @@
               </a:spcBef>
             </a:pPr>
             <a:r>
-              <a:rPr sz="1300" b="1" lang="ja-JP" altLang="en-US">
+              <a:rPr sz="1800" b="1" lang="ja-JP" altLang="en-US">
                 <a:solidFill>
                   <a:srgbClr val="1F4E79"/>
                 </a:solidFill>
@@ -20771,7 +20771,7 @@
         </p:nvSpPr>
         <p:spPr>
           <a:xfrm>
-            <a:off x="4202070" y="2414015"/>
+            <a:off x="4351100" y="2458212"/>
             <a:ext cx="1463039" cy="146304"/>
           </a:xfrm>
           <a:prstGeom prst="roundRect">
@@ -20817,7 +20817,7 @@
         </p:nvSpPr>
         <p:spPr>
           <a:xfrm>
-            <a:off x="4202070" y="2414015"/>
+            <a:off x="4351100" y="2458212"/>
             <a:ext cx="1463040" cy="146304"/>
           </a:xfrm>
           <a:prstGeom prst="roundRect">
@@ -20863,7 +20863,7 @@
         </p:nvSpPr>
         <p:spPr>
           <a:xfrm>
-            <a:off x="5738262" y="2148839"/>
+            <a:off x="5887292" y="2193036"/>
             <a:ext cx="566928" cy="676656"/>
           </a:xfrm>
           <a:prstGeom prst="rect">
@@ -20884,7 +20884,7 @@
               </a:spcBef>
             </a:pPr>
             <a:r>
-              <a:rPr sz="1200" b="1" lang="ja-JP" altLang="en-US">
+              <a:rPr sz="1400" b="1" lang="ja-JP" altLang="en-US">
                 <a:solidFill>
                   <a:srgbClr val="1F4E79"/>
                 </a:solidFill>
@@ -20905,7 +20905,7 @@
         </p:nvSpPr>
         <p:spPr>
           <a:xfrm>
-            <a:off x="6488070" y="2148839"/>
+            <a:off x="6637100" y="2193036"/>
             <a:ext cx="1554480" cy="676656"/>
           </a:xfrm>
           <a:prstGeom prst="rect">
@@ -20926,7 +20926,7 @@
               </a:spcBef>
             </a:pPr>
             <a:r>
-              <a:rPr sz="1050" b="0" lang="ja-JP" altLang="en-US">
+              <a:rPr sz="1200" b="0" lang="ja-JP" altLang="en-US">
                 <a:solidFill>
                   <a:srgbClr val="44546A"/>
                 </a:solidFill>
@@ -20947,7 +20947,7 @@
         </p:nvSpPr>
         <p:spPr>
           <a:xfrm>
-            <a:off x="8225430" y="2148839"/>
+            <a:off x="8374460" y="2193036"/>
             <a:ext cx="868680" cy="676656"/>
           </a:xfrm>
           <a:prstGeom prst="rect">
@@ -20968,7 +20968,7 @@
               </a:spcBef>
             </a:pPr>
             <a:r>
-              <a:rPr sz="1050" b="0" lang="ja-JP" altLang="en-US">
+              <a:rPr sz="1200" b="0" lang="ja-JP" altLang="en-US">
                 <a:solidFill>
                   <a:srgbClr val="44546A"/>
                 </a:solidFill>
@@ -20989,7 +20989,7 @@
         </p:nvCxnSpPr>
         <p:spPr>
           <a:xfrm>
-            <a:off x="502920" y="2825496"/>
+            <a:off x="502920" y="2869692"/>
             <a:ext cx="11185855" cy="0"/>
           </a:xfrm>
           <a:prstGeom prst="line">
@@ -21024,8 +21024,8 @@
         </p:nvSpPr>
         <p:spPr>
           <a:xfrm>
-            <a:off x="685800" y="2994660"/>
-            <a:ext cx="987552" cy="338328"/>
+            <a:off x="685800" y="3021330"/>
+            <a:ext cx="987552" cy="373380"/>
           </a:xfrm>
           <a:prstGeom prst="roundRect">
             <a:avLst>
@@ -21067,7 +21067,7 @@
               </a:spcBef>
             </a:pPr>
             <a:r>
-              <a:rPr sz="1200" b="1" lang="ja-JP" altLang="en-US">
+              <a:rPr sz="1400" b="1" lang="ja-JP" altLang="en-US">
                 <a:solidFill>
                   <a:srgbClr val="FFFFFF"/>
                 </a:solidFill>
@@ -21088,8 +21088,8 @@
         </p:nvSpPr>
         <p:spPr>
           <a:xfrm>
-            <a:off x="1911095" y="2825496"/>
-            <a:ext cx="2108094" cy="676656"/>
+            <a:off x="1911095" y="2869692"/>
+            <a:ext cx="2257124" cy="676656"/>
           </a:xfrm>
           <a:prstGeom prst="rect">
             <a:avLst/>
@@ -21109,7 +21109,7 @@
               </a:spcBef>
             </a:pPr>
             <a:r>
-              <a:rPr sz="1300" b="1" lang="ja-JP" altLang="en-US">
+              <a:rPr sz="1800" b="1" lang="ja-JP" altLang="en-US">
                 <a:solidFill>
                   <a:srgbClr val="1F4E79"/>
                 </a:solidFill>
@@ -21130,7 +21130,7 @@
         </p:nvSpPr>
         <p:spPr>
           <a:xfrm>
-            <a:off x="4202070" y="3090672"/>
+            <a:off x="4351100" y="3134868"/>
             <a:ext cx="1463039" cy="146304"/>
           </a:xfrm>
           <a:prstGeom prst="roundRect">
@@ -21176,7 +21176,7 @@
         </p:nvSpPr>
         <p:spPr>
           <a:xfrm>
-            <a:off x="4202070" y="3090672"/>
+            <a:off x="4351100" y="3134868"/>
             <a:ext cx="1024127" cy="146304"/>
           </a:xfrm>
           <a:prstGeom prst="roundRect">
@@ -21222,7 +21222,7 @@
         </p:nvSpPr>
         <p:spPr>
           <a:xfrm>
-            <a:off x="5738262" y="2825496"/>
+            <a:off x="5887292" y="2869692"/>
             <a:ext cx="566928" cy="676656"/>
           </a:xfrm>
           <a:prstGeom prst="rect">
@@ -21243,7 +21243,7 @@
               </a:spcBef>
             </a:pPr>
             <a:r>
-              <a:rPr sz="1200" b="1" lang="ja-JP" altLang="en-US">
+              <a:rPr sz="1400" b="1" lang="ja-JP" altLang="en-US">
                 <a:solidFill>
                   <a:srgbClr val="1F4E79"/>
                 </a:solidFill>
@@ -21264,7 +21264,7 @@
         </p:nvSpPr>
         <p:spPr>
           <a:xfrm>
-            <a:off x="6488070" y="2825496"/>
+            <a:off x="6637100" y="2869692"/>
             <a:ext cx="1554480" cy="676656"/>
           </a:xfrm>
           <a:prstGeom prst="rect">
@@ -21285,7 +21285,7 @@
               </a:spcBef>
             </a:pPr>
             <a:r>
-              <a:rPr sz="1050" b="0" lang="ja-JP" altLang="en-US">
+              <a:rPr sz="1200" b="0" lang="ja-JP" altLang="en-US">
                 <a:solidFill>
                   <a:srgbClr val="44546A"/>
                 </a:solidFill>
@@ -21306,7 +21306,7 @@
         </p:nvSpPr>
         <p:spPr>
           <a:xfrm>
-            <a:off x="8225430" y="2825496"/>
+            <a:off x="8374460" y="2869692"/>
             <a:ext cx="868680" cy="676656"/>
           </a:xfrm>
           <a:prstGeom prst="rect">
@@ -21327,7 +21327,7 @@
               </a:spcBef>
             </a:pPr>
             <a:r>
-              <a:rPr sz="1050" b="0" lang="ja-JP" altLang="en-US">
+              <a:rPr sz="1200" b="0" lang="ja-JP" altLang="en-US">
                 <a:solidFill>
                   <a:srgbClr val="44546A"/>
                 </a:solidFill>
@@ -21348,7 +21348,7 @@
         </p:nvCxnSpPr>
         <p:spPr>
           <a:xfrm>
-            <a:off x="502920" y="3502152"/>
+            <a:off x="502920" y="3546348"/>
             <a:ext cx="11185855" cy="0"/>
           </a:xfrm>
           <a:prstGeom prst="line">
@@ -21383,8 +21383,8 @@
         </p:nvSpPr>
         <p:spPr>
           <a:xfrm>
-            <a:off x="685800" y="3671316"/>
-            <a:ext cx="987552" cy="338328"/>
+            <a:off x="685800" y="3697986"/>
+            <a:ext cx="987552" cy="373380"/>
           </a:xfrm>
           <a:prstGeom prst="roundRect">
             <a:avLst>
@@ -21426,7 +21426,7 @@
               </a:spcBef>
             </a:pPr>
             <a:r>
-              <a:rPr sz="1200" b="1" lang="ja-JP" altLang="en-US">
+              <a:rPr sz="1400" b="1" lang="ja-JP" altLang="en-US">
                 <a:solidFill>
                   <a:srgbClr val="FFFFFF"/>
                 </a:solidFill>
@@ -21447,8 +21447,8 @@
         </p:nvSpPr>
         <p:spPr>
           <a:xfrm>
-            <a:off x="1911095" y="3502152"/>
-            <a:ext cx="2108094" cy="676656"/>
+            <a:off x="1911095" y="3546348"/>
+            <a:ext cx="2257124" cy="676656"/>
           </a:xfrm>
           <a:prstGeom prst="rect">
             <a:avLst/>
@@ -21468,7 +21468,7 @@
               </a:spcBef>
             </a:pPr>
             <a:r>
-              <a:rPr sz="1300" b="1" lang="ja-JP" altLang="en-US">
+              <a:rPr sz="1800" b="1" lang="ja-JP" altLang="en-US">
                 <a:solidFill>
                   <a:srgbClr val="1F4E79"/>
                 </a:solidFill>
@@ -21489,7 +21489,7 @@
         </p:nvSpPr>
         <p:spPr>
           <a:xfrm>
-            <a:off x="4202070" y="3767328"/>
+            <a:off x="4351100" y="3811524"/>
             <a:ext cx="1463039" cy="146304"/>
           </a:xfrm>
           <a:prstGeom prst="roundRect">
@@ -21535,7 +21535,7 @@
         </p:nvSpPr>
         <p:spPr>
           <a:xfrm>
-            <a:off x="4202070" y="3767328"/>
+            <a:off x="4351100" y="3811524"/>
             <a:ext cx="585215" cy="146304"/>
           </a:xfrm>
           <a:prstGeom prst="roundRect">
@@ -21581,7 +21581,7 @@
         </p:nvSpPr>
         <p:spPr>
           <a:xfrm>
-            <a:off x="5738262" y="3502152"/>
+            <a:off x="5887292" y="3546348"/>
             <a:ext cx="566928" cy="676656"/>
           </a:xfrm>
           <a:prstGeom prst="rect">
@@ -21602,7 +21602,7 @@
               </a:spcBef>
             </a:pPr>
             <a:r>
-              <a:rPr sz="1200" b="1" lang="ja-JP" altLang="en-US">
+              <a:rPr sz="1400" b="1" lang="ja-JP" altLang="en-US">
                 <a:solidFill>
                   <a:srgbClr val="1F4E79"/>
                 </a:solidFill>
@@ -21623,7 +21623,7 @@
         </p:nvSpPr>
         <p:spPr>
           <a:xfrm>
-            <a:off x="6488070" y="3502152"/>
+            <a:off x="6637100" y="3546348"/>
             <a:ext cx="1554480" cy="676656"/>
           </a:xfrm>
           <a:prstGeom prst="rect">
@@ -21644,7 +21644,7 @@
               </a:spcBef>
             </a:pPr>
             <a:r>
-              <a:rPr sz="1050" b="0" lang="ja-JP" altLang="en-US">
+              <a:rPr sz="1200" b="0" lang="ja-JP" altLang="en-US">
                 <a:solidFill>
                   <a:srgbClr val="44546A"/>
                 </a:solidFill>
@@ -21665,7 +21665,7 @@
         </p:nvSpPr>
         <p:spPr>
           <a:xfrm>
-            <a:off x="8225430" y="3502152"/>
+            <a:off x="8374460" y="3546348"/>
             <a:ext cx="868680" cy="676656"/>
           </a:xfrm>
           <a:prstGeom prst="rect">
@@ -21686,7 +21686,7 @@
               </a:spcBef>
             </a:pPr>
             <a:r>
-              <a:rPr sz="1050" b="0" lang="ja-JP" altLang="en-US">
+              <a:rPr sz="1200" b="0" lang="ja-JP" altLang="en-US">
                 <a:solidFill>
                   <a:srgbClr val="44546A"/>
                 </a:solidFill>
@@ -21707,7 +21707,7 @@
         </p:nvSpPr>
         <p:spPr>
           <a:xfrm>
-            <a:off x="502920" y="4206240"/>
+            <a:off x="502920" y="4250436"/>
             <a:ext cx="11185855" cy="621792"/>
           </a:xfrm>
           <a:prstGeom prst="roundRect">
@@ -21761,8 +21761,8 @@
         </p:nvSpPr>
         <p:spPr>
           <a:xfrm>
-            <a:off x="685800" y="4347972"/>
-            <a:ext cx="987552" cy="338328"/>
+            <a:off x="685800" y="4374642"/>
+            <a:ext cx="987552" cy="373380"/>
           </a:xfrm>
           <a:prstGeom prst="roundRect">
             <a:avLst>
@@ -21804,7 +21804,7 @@
               </a:spcBef>
             </a:pPr>
             <a:r>
-              <a:rPr sz="1200" b="1" lang="ja-JP" altLang="en-US">
+              <a:rPr sz="1400" b="1" lang="ja-JP" altLang="en-US">
                 <a:solidFill>
                   <a:srgbClr val="FFFFFF"/>
                 </a:solidFill>
@@ -21825,8 +21825,8 @@
         </p:nvSpPr>
         <p:spPr>
           <a:xfrm>
-            <a:off x="1911095" y="4178808"/>
-            <a:ext cx="2108094" cy="676656"/>
+            <a:off x="1911095" y="4223004"/>
+            <a:ext cx="2257124" cy="676656"/>
           </a:xfrm>
           <a:prstGeom prst="rect">
             <a:avLst/>
@@ -21846,7 +21846,7 @@
               </a:spcBef>
             </a:pPr>
             <a:r>
-              <a:rPr sz="1300" b="1" lang="ja-JP" altLang="en-US">
+              <a:rPr sz="1800" b="1" lang="ja-JP" altLang="en-US">
                 <a:solidFill>
                   <a:srgbClr val="1F4E79"/>
                 </a:solidFill>
@@ -21867,7 +21867,7 @@
         </p:nvSpPr>
         <p:spPr>
           <a:xfrm>
-            <a:off x="4202070" y="4443984"/>
+            <a:off x="4351100" y="4488180"/>
             <a:ext cx="1463039" cy="146304"/>
           </a:xfrm>
           <a:prstGeom prst="roundRect">
@@ -21913,7 +21913,7 @@
         </p:nvSpPr>
         <p:spPr>
           <a:xfrm>
-            <a:off x="4202070" y="4443984"/>
+            <a:off x="4351100" y="4488180"/>
             <a:ext cx="438911" cy="146304"/>
           </a:xfrm>
           <a:prstGeom prst="roundRect">
@@ -21959,7 +21959,7 @@
         </p:nvSpPr>
         <p:spPr>
           <a:xfrm>
-            <a:off x="5738262" y="4178808"/>
+            <a:off x="5887292" y="4223004"/>
             <a:ext cx="566928" cy="676656"/>
           </a:xfrm>
           <a:prstGeom prst="rect">
@@ -21980,7 +21980,7 @@
               </a:spcBef>
             </a:pPr>
             <a:r>
-              <a:rPr sz="1200" b="1" lang="ja-JP" altLang="en-US">
+              <a:rPr sz="1400" b="1" lang="ja-JP" altLang="en-US">
                 <a:solidFill>
                   <a:srgbClr val="1F4E79"/>
                 </a:solidFill>
@@ -22001,7 +22001,7 @@
         </p:nvSpPr>
         <p:spPr>
           <a:xfrm>
-            <a:off x="6488070" y="4178808"/>
+            <a:off x="6637100" y="4223004"/>
             <a:ext cx="1554480" cy="676656"/>
           </a:xfrm>
           <a:prstGeom prst="rect">
@@ -22022,7 +22022,7 @@
               </a:spcBef>
             </a:pPr>
             <a:r>
-              <a:rPr sz="1050" b="0" lang="ja-JP" altLang="en-US">
+              <a:rPr sz="1200" b="0" lang="ja-JP" altLang="en-US">
                 <a:solidFill>
                   <a:srgbClr val="44546A"/>
                 </a:solidFill>
@@ -22043,7 +22043,7 @@
         </p:nvSpPr>
         <p:spPr>
           <a:xfrm>
-            <a:off x="8225430" y="4178808"/>
+            <a:off x="8374460" y="4223004"/>
             <a:ext cx="868680" cy="676656"/>
           </a:xfrm>
           <a:prstGeom prst="rect">
@@ -22064,7 +22064,7 @@
               </a:spcBef>
             </a:pPr>
             <a:r>
-              <a:rPr sz="1050" b="0" lang="ja-JP" altLang="en-US">
+              <a:rPr sz="1200" b="0" lang="ja-JP" altLang="en-US">
                 <a:solidFill>
                   <a:srgbClr val="44546A"/>
                 </a:solidFill>
@@ -22085,8 +22085,8 @@
         </p:nvSpPr>
         <p:spPr>
           <a:xfrm>
-            <a:off x="9276990" y="4178808"/>
-            <a:ext cx="2283768" cy="676656"/>
+            <a:off x="9426020" y="4223004"/>
+            <a:ext cx="2134738" cy="676656"/>
           </a:xfrm>
           <a:prstGeom prst="rect">
             <a:avLst/>
@@ -22106,7 +22106,7 @@
               </a:spcBef>
             </a:pPr>
             <a:r>
-              <a:rPr sz="1050" b="1" lang="ja-JP" altLang="en-US">
+              <a:rPr sz="1200" b="1" lang="ja-JP" altLang="en-US">
                 <a:solidFill>
                   <a:srgbClr val="A33A3A"/>
                 </a:solidFill>
@@ -22127,8 +22127,8 @@
         </p:nvSpPr>
         <p:spPr>
           <a:xfrm>
-            <a:off x="685800" y="5024628"/>
-            <a:ext cx="987552" cy="338328"/>
+            <a:off x="685800" y="5051298"/>
+            <a:ext cx="987552" cy="373380"/>
           </a:xfrm>
           <a:prstGeom prst="roundRect">
             <a:avLst>
@@ -22170,7 +22170,7 @@
               </a:spcBef>
             </a:pPr>
             <a:r>
-              <a:rPr sz="1200" b="1" lang="ja-JP" altLang="en-US">
+              <a:rPr sz="1400" b="1" lang="ja-JP" altLang="en-US">
                 <a:solidFill>
                   <a:srgbClr val="44546A"/>
                 </a:solidFill>
@@ -22191,8 +22191,8 @@
         </p:nvSpPr>
         <p:spPr>
           <a:xfrm>
-            <a:off x="1911095" y="4855464"/>
-            <a:ext cx="2108094" cy="676656"/>
+            <a:off x="1911095" y="4899660"/>
+            <a:ext cx="2257124" cy="676656"/>
           </a:xfrm>
           <a:prstGeom prst="rect">
             <a:avLst/>
@@ -22212,7 +22212,7 @@
               </a:spcBef>
             </a:pPr>
             <a:r>
-              <a:rPr sz="1300" b="1" lang="ja-JP" altLang="en-US">
+              <a:rPr sz="1800" b="1" lang="ja-JP" altLang="en-US">
                 <a:solidFill>
                   <a:srgbClr val="1F4E79"/>
                 </a:solidFill>
@@ -22233,7 +22233,7 @@
         </p:nvSpPr>
         <p:spPr>
           <a:xfrm>
-            <a:off x="4202070" y="5120640"/>
+            <a:off x="4351100" y="5164836"/>
             <a:ext cx="1463039" cy="146304"/>
           </a:xfrm>
           <a:prstGeom prst="roundRect">
@@ -22279,7 +22279,7 @@
         </p:nvSpPr>
         <p:spPr>
           <a:xfrm>
-            <a:off x="5738262" y="4855464"/>
+            <a:off x="5887292" y="4899660"/>
             <a:ext cx="566928" cy="676656"/>
           </a:xfrm>
           <a:prstGeom prst="rect">
@@ -22300,7 +22300,7 @@
               </a:spcBef>
             </a:pPr>
             <a:r>
-              <a:rPr sz="1200" b="1" lang="ja-JP" altLang="en-US">
+              <a:rPr sz="1400" b="1" lang="ja-JP" altLang="en-US">
                 <a:solidFill>
                   <a:srgbClr val="1F4E79"/>
                 </a:solidFill>
@@ -22321,7 +22321,7 @@
         </p:nvSpPr>
         <p:spPr>
           <a:xfrm>
-            <a:off x="6488070" y="4855464"/>
+            <a:off x="6637100" y="4899660"/>
             <a:ext cx="1554480" cy="676656"/>
           </a:xfrm>
           <a:prstGeom prst="rect">
@@ -22342,7 +22342,7 @@
               </a:spcBef>
             </a:pPr>
             <a:r>
-              <a:rPr sz="1050" b="0" lang="ja-JP" altLang="en-US">
+              <a:rPr sz="1200" b="0" lang="ja-JP" altLang="en-US">
                 <a:solidFill>
                   <a:srgbClr val="44546A"/>
                 </a:solidFill>
@@ -22363,7 +22363,7 @@
         </p:nvSpPr>
         <p:spPr>
           <a:xfrm>
-            <a:off x="8225430" y="4855464"/>
+            <a:off x="8374460" y="4899660"/>
             <a:ext cx="868680" cy="676656"/>
           </a:xfrm>
           <a:prstGeom prst="rect">
@@ -22384,7 +22384,7 @@
               </a:spcBef>
             </a:pPr>
             <a:r>
-              <a:rPr sz="1050" b="0" lang="ja-JP" altLang="en-US">
+              <a:rPr sz="1200" b="0" lang="ja-JP" altLang="en-US">
                 <a:solidFill>
                   <a:srgbClr val="44546A"/>
                 </a:solidFill>
@@ -22542,7 +22542,7 @@
               </a:spcBef>
             </a:pPr>
             <a:r>
-              <a:rPr sz="1050" b="1" spc="300" lang="ja-JP" altLang="en-US">
+              <a:rPr sz="1200" b="1" spc="300" lang="ja-JP" altLang="en-US">
                 <a:solidFill>
                   <a:srgbClr val="194671"/>
                 </a:solidFill>
@@ -22564,7 +22564,7 @@
         <p:spPr>
           <a:xfrm>
             <a:off x="1380744" y="1298448"/>
-            <a:ext cx="7336231" cy="274320"/>
+            <a:ext cx="7336231" cy="283464"/>
           </a:xfrm>
           <a:prstGeom prst="rect">
             <a:avLst/>
@@ -22584,7 +22584,7 @@
               </a:spcBef>
             </a:pPr>
             <a:r>
-              <a:rPr sz="1050" b="1" lang="ja-JP" altLang="en-US">
+              <a:rPr sz="1200" b="1" lang="ja-JP" altLang="en-US">
                 <a:solidFill>
                   <a:srgbClr val="5F6F84"/>
                 </a:solidFill>
@@ -22606,7 +22606,7 @@
         <p:spPr>
           <a:xfrm>
             <a:off x="8945575" y="1298448"/>
-            <a:ext cx="1463040" cy="274320"/>
+            <a:ext cx="1463040" cy="283464"/>
           </a:xfrm>
           <a:prstGeom prst="rect">
             <a:avLst/>
@@ -22626,7 +22626,7 @@
               </a:spcBef>
             </a:pPr>
             <a:r>
-              <a:rPr sz="1050" b="1" lang="ja-JP" altLang="en-US">
+              <a:rPr sz="1200" b="1" lang="ja-JP" altLang="en-US">
                 <a:solidFill>
                   <a:srgbClr val="5F6F84"/>
                 </a:solidFill>
@@ -22648,7 +22648,7 @@
         <p:spPr>
           <a:xfrm>
             <a:off x="10408615" y="1298448"/>
-            <a:ext cx="1280160" cy="274320"/>
+            <a:ext cx="1280160" cy="283464"/>
           </a:xfrm>
           <a:prstGeom prst="rect">
             <a:avLst/>
@@ -22668,7 +22668,7 @@
               </a:spcBef>
             </a:pPr>
             <a:r>
-              <a:rPr sz="1050" b="1" lang="ja-JP" altLang="en-US">
+              <a:rPr sz="1200" b="1" lang="ja-JP" altLang="en-US">
                 <a:solidFill>
                   <a:srgbClr val="5F6F84"/>
                 </a:solidFill>
@@ -22689,7 +22689,7 @@
         </p:nvSpPr>
         <p:spPr>
           <a:xfrm>
-            <a:off x="502920" y="1645919"/>
+            <a:off x="502920" y="1655064"/>
             <a:ext cx="11185855" cy="914400"/>
           </a:xfrm>
           <a:prstGeom prst="roundRect">
@@ -22743,7 +22743,7 @@
         </p:nvSpPr>
         <p:spPr>
           <a:xfrm>
-            <a:off x="722376" y="1892807"/>
+            <a:off x="722376" y="1901952"/>
             <a:ext cx="420624" cy="420624"/>
           </a:xfrm>
           <a:prstGeom prst="ellipse">
@@ -22807,7 +22807,7 @@
         </p:nvSpPr>
         <p:spPr>
           <a:xfrm>
-            <a:off x="1380744" y="1682495"/>
+            <a:off x="1380744" y="1691640"/>
             <a:ext cx="7336231" cy="841248"/>
           </a:xfrm>
           <a:prstGeom prst="rect">
@@ -22828,7 +22828,7 @@
               </a:spcBef>
             </a:pPr>
             <a:r>
-              <a:rPr sz="1600" b="1" lang="ja-JP" altLang="en-US">
+              <a:rPr sz="2000" b="1" lang="ja-JP" altLang="en-US">
                 <a:solidFill>
                   <a:srgbClr val="1F4E79"/>
                 </a:solidFill>
@@ -22849,8 +22849,8 @@
         </p:nvCxnSpPr>
         <p:spPr>
           <a:xfrm>
-            <a:off x="8945575" y="1847088"/>
-            <a:ext cx="0" cy="512063"/>
+            <a:off x="8945575" y="1856232"/>
+            <a:ext cx="0" cy="512064"/>
           </a:xfrm>
           <a:prstGeom prst="line">
             <a:avLst/>
@@ -22884,8 +22884,8 @@
         </p:nvCxnSpPr>
         <p:spPr>
           <a:xfrm>
-            <a:off x="10408615" y="1847088"/>
-            <a:ext cx="0" cy="512063"/>
+            <a:off x="10408615" y="1856232"/>
+            <a:ext cx="0" cy="512064"/>
           </a:xfrm>
           <a:prstGeom prst="line">
             <a:avLst/>
@@ -22919,8 +22919,8 @@
         </p:nvSpPr>
         <p:spPr>
           <a:xfrm>
-            <a:off x="9315145" y="1947672"/>
-            <a:ext cx="723900" cy="310896"/>
+            <a:off x="9296095" y="1943100"/>
+            <a:ext cx="761999" cy="338328"/>
           </a:xfrm>
           <a:prstGeom prst="roundRect">
             <a:avLst>
@@ -22964,7 +22964,7 @@
               </a:spcBef>
             </a:pPr>
             <a:r>
-              <a:rPr sz="1050" b="1" lang="ja-JP" altLang="en-US">
+              <a:rPr sz="1200" b="1" lang="ja-JP" altLang="en-US">
                 <a:solidFill>
                   <a:srgbClr val="1F4E79"/>
                 </a:solidFill>
@@ -22985,7 +22985,7 @@
         </p:nvSpPr>
         <p:spPr>
           <a:xfrm>
-            <a:off x="10500055" y="1682495"/>
+            <a:off x="10500055" y="1691640"/>
             <a:ext cx="1097280" cy="841248"/>
           </a:xfrm>
           <a:prstGeom prst="rect">
@@ -23006,7 +23006,7 @@
               </a:spcBef>
             </a:pPr>
             <a:r>
-              <a:rPr sz="1600" b="1" lang="ja-JP" altLang="en-US">
+              <a:rPr sz="2000" b="1" lang="ja-JP" altLang="en-US">
                 <a:solidFill>
                   <a:srgbClr val="2E75B6"/>
                 </a:solidFill>
@@ -23027,7 +23027,7 @@
         </p:nvSpPr>
         <p:spPr>
           <a:xfrm>
-            <a:off x="502920" y="2743200"/>
+            <a:off x="502920" y="2752344"/>
             <a:ext cx="11185855" cy="914400"/>
           </a:xfrm>
           <a:prstGeom prst="roundRect">
@@ -23081,7 +23081,7 @@
         </p:nvSpPr>
         <p:spPr>
           <a:xfrm>
-            <a:off x="722376" y="2990088"/>
+            <a:off x="722376" y="2999232"/>
             <a:ext cx="420624" cy="420624"/>
           </a:xfrm>
           <a:prstGeom prst="ellipse">
@@ -23145,7 +23145,7 @@
         </p:nvSpPr>
         <p:spPr>
           <a:xfrm>
-            <a:off x="1380744" y="2779776"/>
+            <a:off x="1380744" y="2788920"/>
             <a:ext cx="7336231" cy="841248"/>
           </a:xfrm>
           <a:prstGeom prst="rect">
@@ -23166,7 +23166,7 @@
               </a:spcBef>
             </a:pPr>
             <a:r>
-              <a:rPr sz="1600" b="1" lang="ja-JP" altLang="en-US">
+              <a:rPr sz="2000" b="1" lang="ja-JP" altLang="en-US">
                 <a:solidFill>
                   <a:srgbClr val="1F4E79"/>
                 </a:solidFill>
@@ -23187,8 +23187,8 @@
         </p:nvCxnSpPr>
         <p:spPr>
           <a:xfrm>
-            <a:off x="8945575" y="2944368"/>
-            <a:ext cx="0" cy="512064"/>
+            <a:off x="8945575" y="2953512"/>
+            <a:ext cx="0" cy="512063"/>
           </a:xfrm>
           <a:prstGeom prst="line">
             <a:avLst/>
@@ -23222,8 +23222,8 @@
         </p:nvCxnSpPr>
         <p:spPr>
           <a:xfrm>
-            <a:off x="10408615" y="2944368"/>
-            <a:ext cx="0" cy="512064"/>
+            <a:off x="10408615" y="2953512"/>
+            <a:ext cx="0" cy="512063"/>
           </a:xfrm>
           <a:prstGeom prst="line">
             <a:avLst/>
@@ -23257,8 +23257,8 @@
         </p:nvSpPr>
         <p:spPr>
           <a:xfrm>
-            <a:off x="9248470" y="3044952"/>
-            <a:ext cx="857250" cy="310896"/>
+            <a:off x="9219895" y="3040379"/>
+            <a:ext cx="914400" cy="338328"/>
           </a:xfrm>
           <a:prstGeom prst="roundRect">
             <a:avLst>
@@ -23302,7 +23302,7 @@
               </a:spcBef>
             </a:pPr>
             <a:r>
-              <a:rPr sz="1050" b="1" lang="ja-JP" altLang="en-US">
+              <a:rPr sz="1200" b="1" lang="ja-JP" altLang="en-US">
                 <a:solidFill>
                   <a:srgbClr val="1F4E79"/>
                 </a:solidFill>
@@ -23323,7 +23323,7 @@
         </p:nvSpPr>
         <p:spPr>
           <a:xfrm>
-            <a:off x="10500055" y="2779776"/>
+            <a:off x="10500055" y="2788920"/>
             <a:ext cx="1097280" cy="841248"/>
           </a:xfrm>
           <a:prstGeom prst="rect">
@@ -23344,7 +23344,7 @@
               </a:spcBef>
             </a:pPr>
             <a:r>
-              <a:rPr sz="1600" b="1" lang="ja-JP" altLang="en-US">
+              <a:rPr sz="2000" b="1" lang="ja-JP" altLang="en-US">
                 <a:solidFill>
                   <a:srgbClr val="2E75B6"/>
                 </a:solidFill>
@@ -23365,7 +23365,7 @@
         </p:nvSpPr>
         <p:spPr>
           <a:xfrm>
-            <a:off x="502920" y="3840480"/>
+            <a:off x="502920" y="3849624"/>
             <a:ext cx="11185855" cy="914400"/>
           </a:xfrm>
           <a:prstGeom prst="roundRect">
@@ -23419,7 +23419,7 @@
         </p:nvSpPr>
         <p:spPr>
           <a:xfrm>
-            <a:off x="722376" y="4087368"/>
+            <a:off x="722376" y="4096512"/>
             <a:ext cx="420624" cy="420624"/>
           </a:xfrm>
           <a:prstGeom prst="ellipse">
@@ -23483,8 +23483,8 @@
         </p:nvSpPr>
         <p:spPr>
           <a:xfrm>
-            <a:off x="1380744" y="4029456"/>
-            <a:ext cx="7336231" cy="298704"/>
+            <a:off x="1380744" y="3986022"/>
+            <a:ext cx="7336231" cy="368808"/>
           </a:xfrm>
           <a:prstGeom prst="rect">
             <a:avLst/>
@@ -23504,7 +23504,7 @@
               </a:spcBef>
             </a:pPr>
             <a:r>
-              <a:rPr sz="1600" b="1" lang="ja-JP" altLang="en-US">
+              <a:rPr sz="2000" b="1" lang="ja-JP" altLang="en-US">
                 <a:solidFill>
                   <a:srgbClr val="1F4E79"/>
                 </a:solidFill>
@@ -23525,8 +23525,8 @@
         </p:nvSpPr>
         <p:spPr>
           <a:xfrm>
-            <a:off x="1380744" y="4355592"/>
-            <a:ext cx="7336231" cy="228599"/>
+            <a:off x="1380744" y="4382262"/>
+            <a:ext cx="7336231" cy="263652"/>
           </a:xfrm>
           <a:prstGeom prst="rect">
             <a:avLst/>
@@ -23546,7 +23546,7 @@
               </a:spcBef>
             </a:pPr>
             <a:r>
-              <a:rPr sz="1200" b="0" lang="ja-JP" altLang="en-US">
+              <a:rPr sz="1400" b="0" lang="ja-JP" altLang="en-US">
                 <a:solidFill>
                   <a:srgbClr val="5F6F84"/>
                 </a:solidFill>
@@ -23567,8 +23567,8 @@
         </p:nvCxnSpPr>
         <p:spPr>
           <a:xfrm>
-            <a:off x="8945575" y="4041648"/>
-            <a:ext cx="0" cy="512064"/>
+            <a:off x="8945575" y="4050791"/>
+            <a:ext cx="0" cy="512065"/>
           </a:xfrm>
           <a:prstGeom prst="line">
             <a:avLst/>
@@ -23602,8 +23602,8 @@
         </p:nvCxnSpPr>
         <p:spPr>
           <a:xfrm>
-            <a:off x="10408615" y="4041648"/>
-            <a:ext cx="0" cy="512064"/>
+            <a:off x="10408615" y="4050791"/>
+            <a:ext cx="0" cy="512065"/>
           </a:xfrm>
           <a:prstGeom prst="line">
             <a:avLst/>
@@ -23637,8 +23637,8 @@
         </p:nvSpPr>
         <p:spPr>
           <a:xfrm>
-            <a:off x="9115120" y="4142232"/>
-            <a:ext cx="1123949" cy="310896"/>
+            <a:off x="9082735" y="4137660"/>
+            <a:ext cx="1188720" cy="338328"/>
           </a:xfrm>
           <a:prstGeom prst="roundRect">
             <a:avLst>
@@ -23682,7 +23682,7 @@
               </a:spcBef>
             </a:pPr>
             <a:r>
-              <a:rPr sz="1050" b="1" lang="ja-JP" altLang="en-US">
+              <a:rPr sz="1200" b="1" lang="ja-JP" altLang="en-US">
                 <a:solidFill>
                   <a:srgbClr val="1F4E79"/>
                 </a:solidFill>
@@ -23703,7 +23703,7 @@
         </p:nvSpPr>
         <p:spPr>
           <a:xfrm>
-            <a:off x="10500055" y="3877056"/>
+            <a:off x="10500055" y="3886200"/>
             <a:ext cx="1097280" cy="841248"/>
           </a:xfrm>
           <a:prstGeom prst="rect">
@@ -23724,7 +23724,7 @@
               </a:spcBef>
             </a:pPr>
             <a:r>
-              <a:rPr sz="1600" b="1" lang="ja-JP" altLang="en-US">
+              <a:rPr sz="2000" b="1" lang="ja-JP" altLang="en-US">
                 <a:solidFill>
                   <a:srgbClr val="2E75B6"/>
                 </a:solidFill>
@@ -23818,7 +23818,7 @@
               </a:spcBef>
             </a:pPr>
             <a:r>
-              <a:rPr sz="1050" b="1" spc="300" lang="ja-JP" altLang="en-US">
+              <a:rPr sz="1200" b="1" spc="300" lang="ja-JP" altLang="en-US">
                 <a:solidFill>
                   <a:srgbClr val="194671"/>
                 </a:solidFill>
@@ -23901,8 +23901,8 @@
         </p:nvSpPr>
         <p:spPr>
           <a:xfrm>
-            <a:off x="1143000" y="1368552"/>
-            <a:ext cx="10545775" cy="350520"/>
+            <a:off x="1143000" y="1333500"/>
+            <a:ext cx="10545775" cy="385571"/>
           </a:xfrm>
           <a:prstGeom prst="rect">
             <a:avLst/>
@@ -23922,7 +23922,7 @@
               </a:spcBef>
             </a:pPr>
             <a:r>
-              <a:rPr sz="1600" b="1" lang="ja-JP" altLang="en-US">
+              <a:rPr sz="2000" b="1" lang="ja-JP" altLang="en-US">
                 <a:solidFill>
                   <a:srgbClr val="1F4E79"/>
                 </a:solidFill>
@@ -24007,8 +24007,8 @@
         </p:nvSpPr>
         <p:spPr>
           <a:xfrm>
-            <a:off x="1143000" y="1906905"/>
-            <a:ext cx="10545775" cy="365302"/>
+            <a:off x="1143000" y="1863090"/>
+            <a:ext cx="10545775" cy="417880"/>
           </a:xfrm>
           <a:prstGeom prst="rect">
             <a:avLst/>
@@ -24028,7 +24028,7 @@
               </a:spcBef>
             </a:pPr>
             <a:r>
-              <a:rPr sz="1300" b="0" lang="ja-JP" altLang="en-US">
+              <a:rPr sz="1800" b="0" lang="ja-JP" altLang="en-US">
                 <a:solidFill>
                   <a:srgbClr val="44546A"/>
                 </a:solidFill>
@@ -24049,7 +24049,7 @@
         </p:nvCxnSpPr>
         <p:spPr>
           <a:xfrm>
-            <a:off x="502920" y="2619679"/>
+            <a:off x="502920" y="2628419"/>
             <a:ext cx="11185855" cy="0"/>
           </a:xfrm>
           <a:prstGeom prst="line">
@@ -24084,7 +24084,7 @@
         </p:nvSpPr>
         <p:spPr>
           <a:xfrm>
-            <a:off x="502920" y="2985439"/>
+            <a:off x="502920" y="2994157"/>
             <a:ext cx="420624" cy="420624"/>
           </a:xfrm>
           <a:prstGeom prst="ellipse">
@@ -24146,8 +24146,8 @@
         </p:nvSpPr>
         <p:spPr>
           <a:xfrm>
-            <a:off x="1143000" y="3055543"/>
-            <a:ext cx="10545775" cy="350520"/>
+            <a:off x="1143000" y="3029209"/>
+            <a:ext cx="10545775" cy="385571"/>
           </a:xfrm>
           <a:prstGeom prst="rect">
             <a:avLst/>
@@ -24167,7 +24167,7 @@
               </a:spcBef>
             </a:pPr>
             <a:r>
-              <a:rPr sz="1600" b="1" lang="ja-JP" altLang="en-US">
+              <a:rPr sz="2000" b="1" lang="ja-JP" altLang="en-US">
                 <a:solidFill>
                   <a:srgbClr val="1F4E79"/>
                 </a:solidFill>
@@ -24188,7 +24188,7 @@
         </p:nvSpPr>
         <p:spPr>
           <a:xfrm>
-            <a:off x="502920" y="3497503"/>
+            <a:off x="502920" y="3506221"/>
             <a:ext cx="420624" cy="420624"/>
           </a:xfrm>
           <a:prstGeom prst="ellipse">
@@ -24252,8 +24252,8 @@
         </p:nvSpPr>
         <p:spPr>
           <a:xfrm>
-            <a:off x="1143000" y="3593896"/>
-            <a:ext cx="10545775" cy="365302"/>
+            <a:off x="1143000" y="3558799"/>
+            <a:ext cx="10545775" cy="417880"/>
           </a:xfrm>
           <a:prstGeom prst="rect">
             <a:avLst/>
@@ -24273,7 +24273,7 @@
               </a:spcBef>
             </a:pPr>
             <a:r>
-              <a:rPr sz="1300" b="0" lang="ja-JP" altLang="en-US">
+              <a:rPr sz="1800" b="0" lang="ja-JP" altLang="en-US">
                 <a:solidFill>
                   <a:srgbClr val="44546A"/>
                 </a:solidFill>
@@ -24294,7 +24294,7 @@
         </p:nvCxnSpPr>
         <p:spPr>
           <a:xfrm>
-            <a:off x="502920" y="4306671"/>
+            <a:off x="502920" y="4324129"/>
             <a:ext cx="11185855" cy="0"/>
           </a:xfrm>
           <a:prstGeom prst="line">
@@ -24329,7 +24329,7 @@
         </p:nvSpPr>
         <p:spPr>
           <a:xfrm>
-            <a:off x="502920" y="4672431"/>
+            <a:off x="502920" y="4689866"/>
             <a:ext cx="420624" cy="420624"/>
           </a:xfrm>
           <a:prstGeom prst="ellipse">
@@ -24391,8 +24391,8 @@
         </p:nvSpPr>
         <p:spPr>
           <a:xfrm>
-            <a:off x="1143000" y="4742535"/>
-            <a:ext cx="10545775" cy="350520"/>
+            <a:off x="1143000" y="4724918"/>
+            <a:ext cx="10545775" cy="385571"/>
           </a:xfrm>
           <a:prstGeom prst="rect">
             <a:avLst/>
@@ -24412,7 +24412,7 @@
               </a:spcBef>
             </a:pPr>
             <a:r>
-              <a:rPr sz="1600" b="1" lang="ja-JP" altLang="en-US">
+              <a:rPr sz="2000" b="1" lang="ja-JP" altLang="en-US">
                 <a:solidFill>
                   <a:srgbClr val="1F4E79"/>
                 </a:solidFill>
@@ -24433,7 +24433,7 @@
         </p:nvSpPr>
         <p:spPr>
           <a:xfrm>
-            <a:off x="502920" y="5184495"/>
+            <a:off x="502920" y="5201930"/>
             <a:ext cx="420624" cy="420624"/>
           </a:xfrm>
           <a:prstGeom prst="ellipse">
@@ -24497,8 +24497,8 @@
         </p:nvSpPr>
         <p:spPr>
           <a:xfrm>
-            <a:off x="1143000" y="5280888"/>
-            <a:ext cx="10545775" cy="365302"/>
+            <a:off x="1143000" y="5254508"/>
+            <a:ext cx="10545775" cy="417880"/>
           </a:xfrm>
           <a:prstGeom prst="rect">
             <a:avLst/>
@@ -24518,7 +24518,7 @@
               </a:spcBef>
             </a:pPr>
             <a:r>
-              <a:rPr sz="1300" b="0" lang="ja-JP" altLang="en-US">
+              <a:rPr sz="1800" b="0" lang="ja-JP" altLang="en-US">
                 <a:solidFill>
                   <a:srgbClr val="44546A"/>
                 </a:solidFill>
@@ -24612,7 +24612,7 @@
               </a:spcBef>
             </a:pPr>
             <a:r>
-              <a:rPr sz="1050" b="1" spc="300" lang="ja-JP" altLang="en-US">
+              <a:rPr sz="1200" b="1" spc="300" lang="ja-JP" altLang="en-US">
                 <a:solidFill>
                   <a:srgbClr val="194671"/>
                 </a:solidFill>
@@ -24634,11 +24634,11 @@
         <p:spPr>
           <a:xfrm>
             <a:off x="502920" y="1298448"/>
-            <a:ext cx="11185855" cy="1616811"/>
+            <a:ext cx="11185855" cy="1809597"/>
           </a:xfrm>
           <a:prstGeom prst="roundRect">
             <a:avLst>
-              <a:gd name="adj" fmla="val 3393"/>
+              <a:gd name="adj" fmla="val 3031"/>
             </a:avLst>
           </a:prstGeom>
           <a:solidFill>
@@ -24688,7 +24688,7 @@
         <p:spPr>
           <a:xfrm>
             <a:off x="777240" y="1499616"/>
-            <a:ext cx="10637215" cy="292608"/>
+            <a:ext cx="10637215" cy="350520"/>
           </a:xfrm>
           <a:prstGeom prst="rect">
             <a:avLst/>
@@ -24708,7 +24708,7 @@
               </a:spcBef>
             </a:pPr>
             <a:r>
-              <a:rPr sz="1600" b="1" lang="ja-JP" altLang="en-US">
+              <a:rPr sz="2000" b="1" lang="ja-JP" altLang="en-US">
                 <a:solidFill>
                   <a:srgbClr val="1F4E79"/>
                 </a:solidFill>
@@ -24729,8 +24729,8 @@
         </p:nvSpPr>
         <p:spPr>
           <a:xfrm>
-            <a:off x="777240" y="1920240"/>
-            <a:ext cx="502920" cy="227837"/>
+            <a:off x="777240" y="1978152"/>
+            <a:ext cx="502920" cy="315468"/>
           </a:xfrm>
           <a:prstGeom prst="rect">
             <a:avLst/>
@@ -24750,7 +24750,7 @@
               </a:spcBef>
             </a:pPr>
             <a:r>
-              <a:rPr sz="1300" b="1" lang="ja-JP" altLang="en-US">
+              <a:rPr sz="1800" b="1" lang="ja-JP" altLang="en-US">
                 <a:solidFill>
                   <a:srgbClr val="1F4E79"/>
                 </a:solidFill>
@@ -24771,8 +24771,8 @@
         </p:nvSpPr>
         <p:spPr>
           <a:xfrm>
-            <a:off x="1280160" y="1920240"/>
-            <a:ext cx="10134295" cy="287197"/>
+            <a:off x="1280160" y="1978152"/>
+            <a:ext cx="10134295" cy="383590"/>
           </a:xfrm>
           <a:prstGeom prst="rect">
             <a:avLst/>
@@ -24792,7 +24792,7 @@
               </a:spcBef>
             </a:pPr>
             <a:r>
-              <a:rPr sz="1300" b="0" lang="ja-JP" altLang="en-US">
+              <a:rPr sz="1800" b="0" lang="ja-JP" altLang="en-US">
                 <a:solidFill>
                   <a:srgbClr val="44546A"/>
                 </a:solidFill>
@@ -24813,7 +24813,7 @@
         </p:nvCxnSpPr>
         <p:spPr>
           <a:xfrm>
-            <a:off x="777240" y="2280589"/>
+            <a:off x="777240" y="2434894"/>
             <a:ext cx="10637215" cy="0"/>
           </a:xfrm>
           <a:prstGeom prst="line">
@@ -24848,8 +24848,8 @@
         </p:nvSpPr>
         <p:spPr>
           <a:xfrm>
-            <a:off x="777240" y="2390317"/>
-            <a:ext cx="502920" cy="227837"/>
+            <a:off x="777240" y="2544622"/>
+            <a:ext cx="502920" cy="315468"/>
           </a:xfrm>
           <a:prstGeom prst="rect">
             <a:avLst/>
@@ -24869,7 +24869,7 @@
               </a:spcBef>
             </a:pPr>
             <a:r>
-              <a:rPr sz="1300" b="1" lang="ja-JP" altLang="en-US">
+              <a:rPr sz="1800" b="1" lang="ja-JP" altLang="en-US">
                 <a:solidFill>
                   <a:srgbClr val="1F4E79"/>
                 </a:solidFill>
@@ -24890,8 +24890,8 @@
         </p:nvSpPr>
         <p:spPr>
           <a:xfrm>
-            <a:off x="1280160" y="2390317"/>
-            <a:ext cx="10134295" cy="287197"/>
+            <a:off x="1280160" y="2544622"/>
+            <a:ext cx="10134295" cy="383590"/>
           </a:xfrm>
           <a:prstGeom prst="rect">
             <a:avLst/>
@@ -24911,7 +24911,7 @@
               </a:spcBef>
             </a:pPr>
             <a:r>
-              <a:rPr sz="1300" b="0" lang="ja-JP" altLang="en-US">
+              <a:rPr sz="1800" b="0" lang="ja-JP" altLang="en-US">
                 <a:solidFill>
                   <a:srgbClr val="44546A"/>
                 </a:solidFill>
@@ -24932,12 +24932,12 @@
         </p:nvSpPr>
         <p:spPr>
           <a:xfrm>
-            <a:off x="502920" y="3171291"/>
-            <a:ext cx="11185855" cy="1616811"/>
+            <a:off x="502920" y="3364077"/>
+            <a:ext cx="11185855" cy="1809597"/>
           </a:xfrm>
           <a:prstGeom prst="roundRect">
             <a:avLst>
-              <a:gd name="adj" fmla="val 3393"/>
+              <a:gd name="adj" fmla="val 3031"/>
             </a:avLst>
           </a:prstGeom>
           <a:solidFill>
@@ -24986,8 +24986,8 @@
         </p:nvSpPr>
         <p:spPr>
           <a:xfrm>
-            <a:off x="777240" y="3372459"/>
-            <a:ext cx="10637215" cy="292608"/>
+            <a:off x="777240" y="3565245"/>
+            <a:ext cx="10637215" cy="350520"/>
           </a:xfrm>
           <a:prstGeom prst="rect">
             <a:avLst/>
@@ -25007,7 +25007,7 @@
               </a:spcBef>
             </a:pPr>
             <a:r>
-              <a:rPr sz="1600" b="1" lang="ja-JP" altLang="en-US">
+              <a:rPr sz="2000" b="1" lang="ja-JP" altLang="en-US">
                 <a:solidFill>
                   <a:srgbClr val="1F4E79"/>
                 </a:solidFill>
@@ -25028,8 +25028,8 @@
         </p:nvSpPr>
         <p:spPr>
           <a:xfrm>
-            <a:off x="777240" y="3793083"/>
-            <a:ext cx="502920" cy="227837"/>
+            <a:off x="777240" y="4043781"/>
+            <a:ext cx="502920" cy="315468"/>
           </a:xfrm>
           <a:prstGeom prst="rect">
             <a:avLst/>
@@ -25049,7 +25049,7 @@
               </a:spcBef>
             </a:pPr>
             <a:r>
-              <a:rPr sz="1300" b="1" lang="ja-JP" altLang="en-US">
+              <a:rPr sz="1800" b="1" lang="ja-JP" altLang="en-US">
                 <a:solidFill>
                   <a:srgbClr val="1F4E79"/>
                 </a:solidFill>
@@ -25070,8 +25070,8 @@
         </p:nvSpPr>
         <p:spPr>
           <a:xfrm>
-            <a:off x="1280160" y="3793083"/>
-            <a:ext cx="10134295" cy="287197"/>
+            <a:off x="1280160" y="4043781"/>
+            <a:ext cx="10134295" cy="383590"/>
           </a:xfrm>
           <a:prstGeom prst="rect">
             <a:avLst/>
@@ -25091,7 +25091,7 @@
               </a:spcBef>
             </a:pPr>
             <a:r>
-              <a:rPr sz="1300" b="0" lang="ja-JP" altLang="en-US">
+              <a:rPr sz="1800" b="0" lang="ja-JP" altLang="en-US">
                 <a:solidFill>
                   <a:srgbClr val="44546A"/>
                 </a:solidFill>
@@ -25112,7 +25112,7 @@
         </p:nvCxnSpPr>
         <p:spPr>
           <a:xfrm>
-            <a:off x="777240" y="4153433"/>
+            <a:off x="777240" y="4500524"/>
             <a:ext cx="10637215" cy="0"/>
           </a:xfrm>
           <a:prstGeom prst="line">
@@ -25147,8 +25147,8 @@
         </p:nvSpPr>
         <p:spPr>
           <a:xfrm>
-            <a:off x="777240" y="4263161"/>
-            <a:ext cx="502920" cy="227837"/>
+            <a:off x="777240" y="4610252"/>
+            <a:ext cx="502920" cy="315468"/>
           </a:xfrm>
           <a:prstGeom prst="rect">
             <a:avLst/>
@@ -25168,7 +25168,7 @@
               </a:spcBef>
             </a:pPr>
             <a:r>
-              <a:rPr sz="1300" b="1" lang="ja-JP" altLang="en-US">
+              <a:rPr sz="1800" b="1" lang="ja-JP" altLang="en-US">
                 <a:solidFill>
                   <a:srgbClr val="1F4E79"/>
                 </a:solidFill>
@@ -25189,8 +25189,8 @@
         </p:nvSpPr>
         <p:spPr>
           <a:xfrm>
-            <a:off x="1280160" y="4263161"/>
-            <a:ext cx="10134295" cy="287197"/>
+            <a:off x="1280160" y="4610252"/>
+            <a:ext cx="10134295" cy="383590"/>
           </a:xfrm>
           <a:prstGeom prst="rect">
             <a:avLst/>
@@ -25210,7 +25210,7 @@
               </a:spcBef>
             </a:pPr>
             <a:r>
-              <a:rPr sz="1300" b="0" lang="ja-JP" altLang="en-US">
+              <a:rPr sz="1800" b="0" lang="ja-JP" altLang="en-US">
                 <a:solidFill>
                   <a:srgbClr val="44546A"/>
                 </a:solidFill>
@@ -25454,7 +25454,7 @@
               </a:spcBef>
             </a:pPr>
             <a:r>
-              <a:rPr sz="1050" b="1" spc="300" lang="ja-JP" altLang="en-US">
+              <a:rPr sz="1200" b="1" spc="300" lang="ja-JP" altLang="en-US">
                 <a:solidFill>
                   <a:srgbClr val="194671"/>
                 </a:solidFill>
@@ -25476,11 +25476,11 @@
         <p:spPr>
           <a:xfrm>
             <a:off x="502920" y="1298448"/>
-            <a:ext cx="11185855" cy="1096365"/>
+            <a:ext cx="11185855" cy="1250594"/>
           </a:xfrm>
           <a:prstGeom prst="roundRect">
             <a:avLst>
-              <a:gd name="adj" fmla="val 5004"/>
+              <a:gd name="adj" fmla="val 4387"/>
             </a:avLst>
           </a:prstGeom>
           <a:solidFill>
@@ -25523,7 +25523,7 @@
         </p:nvSpPr>
         <p:spPr>
           <a:xfrm>
-            <a:off x="777240" y="1682038"/>
+            <a:off x="777240" y="1759153"/>
             <a:ext cx="914400" cy="329184"/>
           </a:xfrm>
           <a:prstGeom prst="roundRect">
@@ -25566,7 +25566,7 @@
               </a:spcBef>
             </a:pPr>
             <a:r>
-              <a:rPr sz="1200" b="1" lang="ja-JP" altLang="en-US">
+              <a:rPr sz="1250" b="1" lang="ja-JP" altLang="en-US">
                 <a:solidFill>
                   <a:srgbClr val="FFFFFF"/>
                 </a:solidFill>
@@ -25588,7 +25588,7 @@
         <p:spPr>
           <a:xfrm>
             <a:off x="1965960" y="1371600"/>
-            <a:ext cx="9448495" cy="950061"/>
+            <a:ext cx="9448495" cy="1104290"/>
           </a:xfrm>
           <a:prstGeom prst="rect">
             <a:avLst/>
@@ -25608,7 +25608,7 @@
               </a:spcBef>
             </a:pPr>
             <a:r>
-              <a:rPr sz="1800" b="1" lang="ja-JP" altLang="en-US">
+              <a:rPr sz="2200" b="1" lang="ja-JP" altLang="en-US">
                 <a:solidFill>
                   <a:srgbClr val="1F4E79"/>
                 </a:solidFill>
@@ -25629,12 +25629,12 @@
         </p:nvSpPr>
         <p:spPr>
           <a:xfrm>
-            <a:off x="502920" y="2650845"/>
-            <a:ext cx="3557930" cy="1589410"/>
+            <a:off x="502920" y="2805074"/>
+            <a:ext cx="3557930" cy="2119396"/>
           </a:xfrm>
           <a:prstGeom prst="roundRect">
             <a:avLst>
-              <a:gd name="adj" fmla="val 3451"/>
+              <a:gd name="adj" fmla="val 2588"/>
             </a:avLst>
           </a:prstGeom>
           <a:solidFill>
@@ -25683,7 +25683,7 @@
         </p:nvSpPr>
         <p:spPr>
           <a:xfrm>
-            <a:off x="722376" y="2833725"/>
+            <a:off x="722376" y="2987954"/>
             <a:ext cx="420624" cy="420624"/>
           </a:xfrm>
           <a:prstGeom prst="ellipse">
@@ -25747,7 +25747,7 @@
         </p:nvSpPr>
         <p:spPr>
           <a:xfrm>
-            <a:off x="1271016" y="2833725"/>
+            <a:off x="1271016" y="2987954"/>
             <a:ext cx="2625242" cy="420624"/>
           </a:xfrm>
           <a:prstGeom prst="rect">
@@ -25768,7 +25768,7 @@
               </a:spcBef>
             </a:pPr>
             <a:r>
-              <a:rPr sz="1400" b="1" lang="ja-JP" altLang="en-US">
+              <a:rPr sz="1850" b="1" lang="ja-JP" altLang="en-US">
                 <a:solidFill>
                   <a:srgbClr val="1F4E79"/>
                 </a:solidFill>
@@ -25789,12 +25789,12 @@
         </p:nvSpPr>
         <p:spPr>
           <a:xfrm>
-            <a:off x="4316882" y="2650845"/>
-            <a:ext cx="3557930" cy="1589410"/>
+            <a:off x="4316882" y="2805074"/>
+            <a:ext cx="3557930" cy="2119396"/>
           </a:xfrm>
           <a:prstGeom prst="roundRect">
             <a:avLst>
-              <a:gd name="adj" fmla="val 3451"/>
+              <a:gd name="adj" fmla="val 2588"/>
             </a:avLst>
           </a:prstGeom>
           <a:solidFill>
@@ -25843,7 +25843,7 @@
         </p:nvSpPr>
         <p:spPr>
           <a:xfrm>
-            <a:off x="4536338" y="2833725"/>
+            <a:off x="4536338" y="2987954"/>
             <a:ext cx="420624" cy="420624"/>
           </a:xfrm>
           <a:prstGeom prst="ellipse">
@@ -25907,7 +25907,7 @@
         </p:nvSpPr>
         <p:spPr>
           <a:xfrm>
-            <a:off x="5084978" y="2833725"/>
+            <a:off x="5084978" y="2987954"/>
             <a:ext cx="2625242" cy="420624"/>
           </a:xfrm>
           <a:prstGeom prst="rect">
@@ -25928,7 +25928,7 @@
               </a:spcBef>
             </a:pPr>
             <a:r>
-              <a:rPr sz="1400" b="1" lang="ja-JP" altLang="en-US">
+              <a:rPr sz="2000" b="1" lang="ja-JP" altLang="en-US">
                 <a:solidFill>
                   <a:srgbClr val="1F4E79"/>
                 </a:solidFill>
@@ -25949,12 +25949,12 @@
         </p:nvSpPr>
         <p:spPr>
           <a:xfrm>
-            <a:off x="8130844" y="2650845"/>
-            <a:ext cx="3557930" cy="1589410"/>
+            <a:off x="8130844" y="2805074"/>
+            <a:ext cx="3557930" cy="2119396"/>
           </a:xfrm>
           <a:prstGeom prst="roundRect">
             <a:avLst>
-              <a:gd name="adj" fmla="val 3451"/>
+              <a:gd name="adj" fmla="val 2588"/>
             </a:avLst>
           </a:prstGeom>
           <a:solidFill>
@@ -26003,7 +26003,7 @@
         </p:nvSpPr>
         <p:spPr>
           <a:xfrm>
-            <a:off x="8350300" y="2833725"/>
+            <a:off x="8350300" y="2987954"/>
             <a:ext cx="420624" cy="420624"/>
           </a:xfrm>
           <a:prstGeom prst="ellipse">
@@ -26067,7 +26067,7 @@
         </p:nvSpPr>
         <p:spPr>
           <a:xfrm>
-            <a:off x="8898940" y="2833725"/>
+            <a:off x="8898940" y="2987954"/>
             <a:ext cx="2625242" cy="420624"/>
           </a:xfrm>
           <a:prstGeom prst="rect">
@@ -26088,7 +26088,7 @@
               </a:spcBef>
             </a:pPr>
             <a:r>
-              <a:rPr sz="1400" b="1" lang="ja-JP" altLang="en-US">
+              <a:rPr sz="2000" b="1" lang="ja-JP" altLang="en-US">
                 <a:solidFill>
                   <a:srgbClr val="1F4E79"/>
                 </a:solidFill>
@@ -26109,8 +26109,8 @@
         </p:nvSpPr>
         <p:spPr>
           <a:xfrm>
-            <a:off x="722376" y="3418941"/>
-            <a:ext cx="3119018" cy="656722"/>
+            <a:off x="722376" y="3573170"/>
+            <a:ext cx="3119018" cy="1186708"/>
           </a:xfrm>
           <a:prstGeom prst="rect">
             <a:avLst/>
@@ -26130,7 +26130,7 @@
               </a:spcBef>
             </a:pPr>
             <a:r>
-              <a:rPr sz="1300" b="0" lang="ja-JP" altLang="en-US">
+              <a:rPr sz="1800" b="0" lang="ja-JP" altLang="en-US">
                 <a:solidFill>
                   <a:srgbClr val="44546A"/>
                 </a:solidFill>
@@ -26151,8 +26151,8 @@
         </p:nvSpPr>
         <p:spPr>
           <a:xfrm>
-            <a:off x="4536338" y="3418941"/>
-            <a:ext cx="3119018" cy="656722"/>
+            <a:off x="4536338" y="3573170"/>
+            <a:ext cx="3119018" cy="1186708"/>
           </a:xfrm>
           <a:prstGeom prst="rect">
             <a:avLst/>
@@ -26172,7 +26172,7 @@
               </a:spcBef>
             </a:pPr>
             <a:r>
-              <a:rPr sz="1300" b="0" lang="ja-JP" altLang="en-US">
+              <a:rPr sz="1800" b="0" lang="ja-JP" altLang="en-US">
                 <a:solidFill>
                   <a:srgbClr val="44546A"/>
                 </a:solidFill>
@@ -26193,8 +26193,8 @@
         </p:nvSpPr>
         <p:spPr>
           <a:xfrm>
-            <a:off x="8350300" y="3418941"/>
-            <a:ext cx="3119018" cy="656722"/>
+            <a:off x="8350300" y="3573170"/>
+            <a:ext cx="3119018" cy="1186708"/>
           </a:xfrm>
           <a:prstGeom prst="rect">
             <a:avLst/>
@@ -26214,7 +26214,7 @@
               </a:spcBef>
             </a:pPr>
             <a:r>
-              <a:rPr sz="1300" b="0" lang="ja-JP" altLang="en-US">
+              <a:rPr sz="1800" b="0" lang="ja-JP" altLang="en-US">
                 <a:solidFill>
                   <a:srgbClr val="44546A"/>
                 </a:solidFill>
@@ -26357,7 +26357,7 @@
             <a:r>
               <a:rPr sz="1300" b="0" spc="200" lang="ja-JP" altLang="en-US">
                 <a:solidFill>
-                  <a:srgbClr val="8496AB"/>
+                  <a:srgbClr val="5F6F84"/>
                 </a:solidFill>
                 <a:latin typeface="Arial"/>
                 <a:ea typeface="游ゴシック"/>
@@ -26581,7 +26581,7 @@
               </a:spcBef>
             </a:pPr>
             <a:r>
-              <a:rPr sz="1050" b="1" spc="300" lang="ja-JP" altLang="en-US">
+              <a:rPr sz="1200" b="1" spc="300" lang="ja-JP" altLang="en-US">
                 <a:solidFill>
                   <a:srgbClr val="194671"/>
                 </a:solidFill>
@@ -26623,7 +26623,7 @@
               </a:spcBef>
             </a:pPr>
             <a:r>
-              <a:rPr sz="1200" b="0" lang="ja-JP" altLang="en-US">
+              <a:rPr sz="1400" b="0" lang="ja-JP" altLang="en-US">
                 <a:solidFill>
                   <a:srgbClr val="44546A"/>
                 </a:solidFill>
@@ -27477,7 +27477,7 @@
               </a:spcBef>
             </a:pPr>
             <a:r>
-              <a:rPr sz="1050" b="1" spc="300" lang="ja-JP" altLang="en-US">
+              <a:rPr sz="1200" b="1" spc="300" lang="ja-JP" altLang="en-US">
                 <a:solidFill>
                   <a:srgbClr val="194671"/>
                 </a:solidFill>
@@ -27573,7 +27573,7 @@
               </a:spcBef>
             </a:pPr>
             <a:r>
-              <a:rPr sz="1050" b="0" lang="ja-JP" altLang="en-US">
+              <a:rPr sz="1200" b="0" lang="ja-JP" altLang="en-US">
                 <a:solidFill>
                   <a:srgbClr val="5F6F84"/>
                 </a:solidFill>
@@ -27588,7 +27588,7 @@
       </p:sp>
       <p:graphicFrame>
         <p:nvGraphicFramePr>
-          <p:cNvPr id="8" name="Chart 7"/>
+          <p:cNvPr id="8" name="Chart 7" descr="縦棒グラフ。夜間の問い合わせは、半年で 1.5倍。日中：4月 420件、5月 410件、6月 430件、7月 415件、8月 405件、9月 420件／夜間：4月 120件、5月 130件、6月 150件、7月 160件、8月 170件、9月 180件"/>
           <p:cNvGraphicFramePr>
             <a:graphicFrameLocks noGrp="1"/>
           </p:cNvGraphicFramePr>
@@ -27613,11 +27613,11 @@
         <p:spPr>
           <a:xfrm>
             <a:off x="8130844" y="1298448"/>
-            <a:ext cx="3557930" cy="3042422"/>
+            <a:ext cx="3557930" cy="3391265"/>
           </a:xfrm>
           <a:prstGeom prst="roundRect">
             <a:avLst>
-              <a:gd name="adj" fmla="val 1803"/>
+              <a:gd name="adj" fmla="val 1617"/>
             </a:avLst>
           </a:prstGeom>
           <a:solidFill>
@@ -27661,7 +27661,7 @@
         <p:spPr>
           <a:xfrm>
             <a:off x="8350300" y="1481328"/>
-            <a:ext cx="3119018" cy="292608"/>
+            <a:ext cx="3119018" cy="350520"/>
           </a:xfrm>
           <a:prstGeom prst="rect">
             <a:avLst/>
@@ -27681,7 +27681,7 @@
               </a:spcBef>
             </a:pPr>
             <a:r>
-              <a:rPr sz="1600" b="1" lang="ja-JP" altLang="en-US">
+              <a:rPr sz="2000" b="1" lang="ja-JP" altLang="en-US">
                 <a:solidFill>
                   <a:srgbClr val="1F4E79"/>
                 </a:solidFill>
@@ -27702,7 +27702,7 @@
         </p:nvSpPr>
         <p:spPr>
           <a:xfrm>
-            <a:off x="8350300" y="1975104"/>
+            <a:off x="8350300" y="2033015"/>
             <a:ext cx="420624" cy="420624"/>
           </a:xfrm>
           <a:prstGeom prst="ellipse">
@@ -27766,8 +27766,8 @@
         </p:nvSpPr>
         <p:spPr>
           <a:xfrm>
-            <a:off x="8898940" y="2071497"/>
-            <a:ext cx="1961949" cy="528706"/>
+            <a:off x="8898940" y="2085594"/>
+            <a:ext cx="2570378" cy="717986"/>
           </a:xfrm>
           <a:prstGeom prst="rect">
             <a:avLst/>
@@ -27787,7 +27787,7 @@
               </a:spcBef>
             </a:pPr>
             <a:r>
-              <a:rPr sz="1300" b="0" lang="ja-JP" altLang="en-US">
+              <a:rPr sz="1800" b="0" lang="ja-JP" altLang="en-US">
                 <a:solidFill>
                   <a:srgbClr val="44546A"/>
                 </a:solidFill>
@@ -27808,7 +27808,7 @@
         </p:nvCxnSpPr>
         <p:spPr>
           <a:xfrm>
-            <a:off x="8350300" y="3020827"/>
+            <a:off x="8350300" y="3224204"/>
             <a:ext cx="3119019" cy="0"/>
           </a:xfrm>
           <a:prstGeom prst="line">
@@ -27843,7 +27843,7 @@
         </p:nvSpPr>
         <p:spPr>
           <a:xfrm>
-            <a:off x="8350300" y="3478027"/>
+            <a:off x="8350300" y="3681404"/>
             <a:ext cx="420624" cy="420624"/>
           </a:xfrm>
           <a:prstGeom prst="ellipse">
@@ -27907,8 +27907,8 @@
         </p:nvSpPr>
         <p:spPr>
           <a:xfrm>
-            <a:off x="8898940" y="3574420"/>
-            <a:ext cx="1961949" cy="528706"/>
+            <a:off x="8898940" y="3733982"/>
+            <a:ext cx="2570378" cy="717986"/>
           </a:xfrm>
           <a:prstGeom prst="rect">
             <a:avLst/>
@@ -27928,7 +27928,7 @@
               </a:spcBef>
             </a:pPr>
             <a:r>
-              <a:rPr sz="1300" b="0" lang="ja-JP" altLang="en-US">
+              <a:rPr sz="1800" b="0" lang="ja-JP" altLang="en-US">
                 <a:solidFill>
                   <a:srgbClr val="44546A"/>
                 </a:solidFill>
@@ -28086,7 +28086,7 @@
               </a:spcBef>
             </a:pPr>
             <a:r>
-              <a:rPr sz="1050" b="1" spc="300" lang="ja-JP" altLang="en-US">
+              <a:rPr sz="1200" b="1" spc="300" lang="ja-JP" altLang="en-US">
                 <a:solidFill>
                   <a:srgbClr val="194671"/>
                 </a:solidFill>
@@ -28109,7 +28109,7 @@
         </p:nvGraphicFramePr>
         <p:xfrm>
           <a:off x="502920" y="1298448"/>
-          <a:ext cx="11185854" cy="3182112"/>
+          <a:ext cx="11185854" cy="3190494"/>
         </p:xfrm>
         <a:graphic>
           <a:graphicData uri="http://schemas.openxmlformats.org/drawingml/2006/table">
@@ -28124,7 +28124,7 @@
                 <a:gridCol w="1960138"/>
                 <a:gridCol w="5227035"/>
               </a:tblGrid>
-              <a:tr h="347472">
+              <a:tr h="355854">
                 <a:tc>
                   <a:txBody>
                     <a:bodyPr wrap="square"/>
@@ -28136,7 +28136,7 @@
                         </a:lnSpc>
                       </a:pPr>
                       <a:r>
-                        <a:rPr sz="1200" b="1" lang="ja-JP" altLang="en-US">
+                        <a:rPr sz="1300" b="1" lang="ja-JP" altLang="en-US">
                           <a:solidFill>
                             <a:srgbClr val="FFFFFF"/>
                           </a:solidFill>
@@ -28185,7 +28185,7 @@
                         </a:lnSpc>
                       </a:pPr>
                       <a:r>
-                        <a:rPr sz="1200" b="1" lang="ja-JP" altLang="en-US">
+                        <a:rPr sz="1300" b="1" lang="ja-JP" altLang="en-US">
                           <a:solidFill>
                             <a:srgbClr val="FFFFFF"/>
                           </a:solidFill>
@@ -28234,7 +28234,7 @@
                         </a:lnSpc>
                       </a:pPr>
                       <a:r>
-                        <a:rPr sz="1200" b="1" lang="ja-JP" altLang="en-US">
+                        <a:rPr sz="1300" b="1" lang="ja-JP" altLang="en-US">
                           <a:solidFill>
                             <a:srgbClr val="FFFFFF"/>
                           </a:solidFill>
@@ -28283,7 +28283,7 @@
                         </a:lnSpc>
                       </a:pPr>
                       <a:r>
-                        <a:rPr sz="1200" b="1" lang="ja-JP" altLang="en-US">
+                        <a:rPr sz="1300" b="1" lang="ja-JP" altLang="en-US">
                           <a:solidFill>
                             <a:srgbClr val="FFFFFF"/>
                           </a:solidFill>
@@ -28332,7 +28332,7 @@
                         </a:lnSpc>
                       </a:pPr>
                       <a:r>
-                        <a:rPr sz="1200" b="1" lang="ja-JP" altLang="en-US">
+                        <a:rPr sz="1300" b="1" lang="ja-JP" altLang="en-US">
                           <a:solidFill>
                             <a:srgbClr val="FFFFFF"/>
                           </a:solidFill>
@@ -28383,7 +28383,7 @@
                         </a:lnSpc>
                       </a:pPr>
                       <a:r>
-                        <a:rPr sz="1200" b="1" lang="ja-JP" altLang="en-US">
+                        <a:rPr sz="1300" b="1" lang="ja-JP" altLang="en-US">
                           <a:solidFill>
                             <a:srgbClr val="1F4E79"/>
                           </a:solidFill>
@@ -28432,7 +28432,7 @@
                         </a:lnSpc>
                       </a:pPr>
                       <a:r>
-                        <a:rPr sz="1200" b="0" lang="ja-JP" altLang="en-US">
+                        <a:rPr sz="1300" b="0" lang="ja-JP" altLang="en-US">
                           <a:solidFill>
                             <a:srgbClr val="44546A"/>
                           </a:solidFill>
@@ -28481,7 +28481,7 @@
                         </a:lnSpc>
                       </a:pPr>
                       <a:r>
-                        <a:rPr sz="1200" b="0" lang="ja-JP" altLang="en-US">
+                        <a:rPr sz="1300" b="0" lang="ja-JP" altLang="en-US">
                           <a:solidFill>
                             <a:srgbClr val="44546A"/>
                           </a:solidFill>
@@ -28530,7 +28530,7 @@
                         </a:lnSpc>
                       </a:pPr>
                       <a:r>
-                        <a:rPr sz="1200" b="0" lang="ja-JP" altLang="en-US">
+                        <a:rPr sz="1300" b="0" lang="ja-JP" altLang="en-US">
                           <a:solidFill>
                             <a:srgbClr val="44546A"/>
                           </a:solidFill>
@@ -28579,7 +28579,7 @@
                         </a:lnSpc>
                       </a:pPr>
                       <a:r>
-                        <a:rPr sz="1200" b="0" lang="ja-JP" altLang="en-US">
+                        <a:rPr sz="1300" b="0" lang="ja-JP" altLang="en-US">
                           <a:solidFill>
                             <a:srgbClr val="44546A"/>
                           </a:solidFill>
@@ -28630,7 +28630,7 @@
                         </a:lnSpc>
                       </a:pPr>
                       <a:r>
-                        <a:rPr sz="1200" b="1" lang="ja-JP" altLang="en-US">
+                        <a:rPr sz="1300" b="1" lang="ja-JP" altLang="en-US">
                           <a:solidFill>
                             <a:srgbClr val="1F4E79"/>
                           </a:solidFill>
@@ -28679,7 +28679,7 @@
                         </a:lnSpc>
                       </a:pPr>
                       <a:r>
-                        <a:rPr sz="1200" b="0" lang="ja-JP" altLang="en-US">
+                        <a:rPr sz="1300" b="0" lang="ja-JP" altLang="en-US">
                           <a:solidFill>
                             <a:srgbClr val="44546A"/>
                           </a:solidFill>
@@ -28728,7 +28728,7 @@
                         </a:lnSpc>
                       </a:pPr>
                       <a:r>
-                        <a:rPr sz="1200" b="0" lang="ja-JP" altLang="en-US">
+                        <a:rPr sz="1300" b="0" lang="ja-JP" altLang="en-US">
                           <a:solidFill>
                             <a:srgbClr val="44546A"/>
                           </a:solidFill>
@@ -28777,7 +28777,7 @@
                         </a:lnSpc>
                       </a:pPr>
                       <a:r>
-                        <a:rPr sz="1200" b="0" lang="ja-JP" altLang="en-US">
+                        <a:rPr sz="1300" b="0" lang="ja-JP" altLang="en-US">
                           <a:solidFill>
                             <a:srgbClr val="44546A"/>
                           </a:solidFill>
@@ -28826,7 +28826,7 @@
                         </a:lnSpc>
                       </a:pPr>
                       <a:r>
-                        <a:rPr sz="1200" b="0" lang="ja-JP" altLang="en-US">
+                        <a:rPr sz="1300" b="0" lang="ja-JP" altLang="en-US">
                           <a:solidFill>
                             <a:srgbClr val="44546A"/>
                           </a:solidFill>
@@ -28877,7 +28877,7 @@
                         </a:lnSpc>
                       </a:pPr>
                       <a:r>
-                        <a:rPr sz="1200" b="1" lang="ja-JP" altLang="en-US">
+                        <a:rPr sz="1300" b="1" lang="ja-JP" altLang="en-US">
                           <a:solidFill>
                             <a:srgbClr val="1F4E79"/>
                           </a:solidFill>
@@ -28926,7 +28926,7 @@
                         </a:lnSpc>
                       </a:pPr>
                       <a:r>
-                        <a:rPr sz="1200" b="0" lang="ja-JP" altLang="en-US">
+                        <a:rPr sz="1300" b="0" lang="ja-JP" altLang="en-US">
                           <a:solidFill>
                             <a:srgbClr val="44546A"/>
                           </a:solidFill>
@@ -28975,7 +28975,7 @@
                         </a:lnSpc>
                       </a:pPr>
                       <a:r>
-                        <a:rPr sz="1200" b="0" lang="ja-JP" altLang="en-US">
+                        <a:rPr sz="1300" b="0" lang="ja-JP" altLang="en-US">
                           <a:solidFill>
                             <a:srgbClr val="44546A"/>
                           </a:solidFill>
@@ -29024,7 +29024,7 @@
                         </a:lnSpc>
                       </a:pPr>
                       <a:r>
-                        <a:rPr sz="1200" b="0" lang="ja-JP" altLang="en-US">
+                        <a:rPr sz="1300" b="0" lang="ja-JP" altLang="en-US">
                           <a:solidFill>
                             <a:srgbClr val="44546A"/>
                           </a:solidFill>
@@ -29073,7 +29073,7 @@
                         </a:lnSpc>
                       </a:pPr>
                       <a:r>
-                        <a:rPr sz="1200" b="0" lang="ja-JP" altLang="en-US">
+                        <a:rPr sz="1300" b="0" lang="ja-JP" altLang="en-US">
                           <a:solidFill>
                             <a:srgbClr val="44546A"/>
                           </a:solidFill>
@@ -29124,7 +29124,7 @@
                         </a:lnSpc>
                       </a:pPr>
                       <a:r>
-                        <a:rPr sz="1200" b="1" lang="ja-JP" altLang="en-US">
+                        <a:rPr sz="1300" b="1" lang="ja-JP" altLang="en-US">
                           <a:solidFill>
                             <a:srgbClr val="1F4E79"/>
                           </a:solidFill>
@@ -29173,7 +29173,7 @@
                         </a:lnSpc>
                       </a:pPr>
                       <a:r>
-                        <a:rPr sz="1200" b="0" lang="ja-JP" altLang="en-US">
+                        <a:rPr sz="1300" b="0" lang="ja-JP" altLang="en-US">
                           <a:solidFill>
                             <a:srgbClr val="44546A"/>
                           </a:solidFill>
@@ -29222,7 +29222,7 @@
                         </a:lnSpc>
                       </a:pPr>
                       <a:r>
-                        <a:rPr sz="1200" b="0" lang="ja-JP" altLang="en-US">
+                        <a:rPr sz="1300" b="0" lang="ja-JP" altLang="en-US">
                           <a:solidFill>
                             <a:srgbClr val="44546A"/>
                           </a:solidFill>
@@ -29271,7 +29271,7 @@
                         </a:lnSpc>
                       </a:pPr>
                       <a:r>
-                        <a:rPr sz="1200" b="0" lang="ja-JP" altLang="en-US">
+                        <a:rPr sz="1300" b="0" lang="ja-JP" altLang="en-US">
                           <a:solidFill>
                             <a:srgbClr val="44546A"/>
                           </a:solidFill>
@@ -29320,7 +29320,7 @@
                         </a:lnSpc>
                       </a:pPr>
                       <a:r>
-                        <a:rPr sz="1200" b="0" lang="ja-JP" altLang="en-US">
+                        <a:rPr sz="1300" b="0" lang="ja-JP" altLang="en-US">
                           <a:solidFill>
                             <a:srgbClr val="44546A"/>
                           </a:solidFill>
@@ -29371,7 +29371,7 @@
                         </a:lnSpc>
                       </a:pPr>
                       <a:r>
-                        <a:rPr sz="1200" b="1" lang="ja-JP" altLang="en-US">
+                        <a:rPr sz="1300" b="1" lang="ja-JP" altLang="en-US">
                           <a:solidFill>
                             <a:srgbClr val="1F4E79"/>
                           </a:solidFill>
@@ -29420,7 +29420,7 @@
                         </a:lnSpc>
                       </a:pPr>
                       <a:r>
-                        <a:rPr sz="1200" b="0" lang="ja-JP" altLang="en-US">
+                        <a:rPr sz="1300" b="0" lang="ja-JP" altLang="en-US">
                           <a:solidFill>
                             <a:srgbClr val="44546A"/>
                           </a:solidFill>
@@ -29469,7 +29469,7 @@
                         </a:lnSpc>
                       </a:pPr>
                       <a:r>
-                        <a:rPr sz="1200" b="0" lang="ja-JP" altLang="en-US">
+                        <a:rPr sz="1300" b="0" lang="ja-JP" altLang="en-US">
                           <a:solidFill>
                             <a:srgbClr val="44546A"/>
                           </a:solidFill>
@@ -29518,7 +29518,7 @@
                         </a:lnSpc>
                       </a:pPr>
                       <a:r>
-                        <a:rPr sz="1200" b="0" lang="ja-JP" altLang="en-US">
+                        <a:rPr sz="1300" b="0" lang="ja-JP" altLang="en-US">
                           <a:solidFill>
                             <a:srgbClr val="44546A"/>
                           </a:solidFill>
@@ -29567,7 +29567,7 @@
                         </a:lnSpc>
                       </a:pPr>
                       <a:r>
-                        <a:rPr sz="1200" b="0" lang="ja-JP" altLang="en-US">
+                        <a:rPr sz="1300" b="0" lang="ja-JP" altLang="en-US">
                           <a:solidFill>
                             <a:srgbClr val="44546A"/>
                           </a:solidFill>
@@ -29618,7 +29618,7 @@
         </p:nvSpPr>
         <p:spPr>
           <a:xfrm>
-            <a:off x="502920" y="4590288"/>
+            <a:off x="502920" y="4598670"/>
             <a:ext cx="11185855" cy="310896"/>
           </a:xfrm>
           <a:prstGeom prst="rect">
@@ -29639,7 +29639,7 @@
               </a:spcBef>
             </a:pPr>
             <a:r>
-              <a:rPr sz="950" b="0" lang="ja-JP" altLang="en-US">
+              <a:rPr sz="1200" b="0" lang="ja-JP" altLang="en-US">
                 <a:solidFill>
                   <a:srgbClr val="5F6F84"/>
                 </a:solidFill>
@@ -29797,7 +29797,7 @@
               </a:spcBef>
             </a:pPr>
             <a:r>
-              <a:rPr sz="1050" b="1" spc="300" lang="ja-JP" altLang="en-US">
+              <a:rPr sz="1200" b="1" spc="300" lang="ja-JP" altLang="en-US">
                 <a:solidFill>
                   <a:srgbClr val="194671"/>
                 </a:solidFill>
@@ -29863,7 +29863,7 @@
               </a:spcBef>
             </a:pPr>
             <a:r>
-              <a:rPr sz="1300" b="1" lang="ja-JP" altLang="en-US">
+              <a:rPr sz="1800" b="1" lang="ja-JP" altLang="en-US">
                 <a:solidFill>
                   <a:srgbClr val="FFFFFF"/>
                 </a:solidFill>
@@ -29884,7 +29884,7 @@
         </p:nvSpPr>
         <p:spPr>
           <a:xfrm>
-            <a:off x="502920" y="1280160"/>
+            <a:off x="502920" y="1290828"/>
             <a:ext cx="420624" cy="420624"/>
           </a:xfrm>
           <a:prstGeom prst="ellipse">
@@ -29949,7 +29949,7 @@
         <p:spPr>
           <a:xfrm>
             <a:off x="1152144" y="1298448"/>
-            <a:ext cx="10536631" cy="384048"/>
+            <a:ext cx="10536631" cy="405384"/>
           </a:xfrm>
           <a:prstGeom prst="rect">
             <a:avLst/>
@@ -29969,7 +29969,7 @@
               </a:spcBef>
             </a:pPr>
             <a:r>
-              <a:rPr sz="1600" b="1" lang="ja-JP" altLang="en-US">
+              <a:rPr sz="2000" b="1" lang="ja-JP" altLang="en-US">
                 <a:solidFill>
                   <a:srgbClr val="1F4E79"/>
                 </a:solidFill>
@@ -29980,7 +29980,7 @@
               <a:t>夜間の当番は</a:t>
             </a:r>
             <a:r>
-              <a:rPr sz="1600" b="1" lang="ja-JP" altLang="en-US">
+              <a:rPr sz="2000" b="1" lang="ja-JP" altLang="en-US">
                 <a:solidFill>
                   <a:srgbClr val="2E75B6"/>
                 </a:solidFill>
@@ -29991,7 +29991,7 @@
               <a:t>2名</a:t>
             </a:r>
             <a:r>
-              <a:rPr sz="1600" b="1" lang="ja-JP" altLang="en-US">
+              <a:rPr sz="2000" b="1" lang="ja-JP" altLang="en-US">
                 <a:solidFill>
                   <a:srgbClr val="1F4E79"/>
                 </a:solidFill>
@@ -30012,8 +30012,8 @@
         </p:nvSpPr>
         <p:spPr>
           <a:xfrm>
-            <a:off x="1152144" y="1682495"/>
-            <a:ext cx="10536631" cy="678141"/>
+            <a:off x="1152144" y="1703832"/>
+            <a:ext cx="10536631" cy="770153"/>
           </a:xfrm>
           <a:prstGeom prst="rect">
             <a:avLst/>
@@ -30033,7 +30033,7 @@
               </a:spcBef>
             </a:pPr>
             <a:r>
-              <a:rPr sz="1300" b="0" lang="ja-JP" altLang="en-US">
+              <a:rPr sz="1800" b="0" lang="ja-JP" altLang="en-US">
                 <a:solidFill>
                   <a:srgbClr val="44546A"/>
                 </a:solidFill>
@@ -30054,7 +30054,7 @@
         </p:nvCxnSpPr>
         <p:spPr>
           <a:xfrm>
-            <a:off x="502920" y="2260053"/>
+            <a:off x="502920" y="2373401"/>
             <a:ext cx="11185855" cy="0"/>
           </a:xfrm>
           <a:prstGeom prst="line">
@@ -30089,7 +30089,7 @@
         </p:nvSpPr>
         <p:spPr>
           <a:xfrm>
-            <a:off x="502920" y="2525229"/>
+            <a:off x="502920" y="2649245"/>
             <a:ext cx="420624" cy="420624"/>
           </a:xfrm>
           <a:prstGeom prst="ellipse">
@@ -30153,8 +30153,8 @@
         </p:nvSpPr>
         <p:spPr>
           <a:xfrm>
-            <a:off x="1152144" y="2543517"/>
-            <a:ext cx="10536631" cy="384048"/>
+            <a:off x="1152144" y="2656865"/>
+            <a:ext cx="10536631" cy="405384"/>
           </a:xfrm>
           <a:prstGeom prst="rect">
             <a:avLst/>
@@ -30174,7 +30174,7 @@
               </a:spcBef>
             </a:pPr>
             <a:r>
-              <a:rPr sz="1600" b="1" lang="ja-JP" altLang="en-US">
+              <a:rPr sz="2000" b="1" lang="ja-JP" altLang="en-US">
                 <a:solidFill>
                   <a:srgbClr val="1F4E79"/>
                 </a:solidFill>
@@ -30195,8 +30195,8 @@
         </p:nvSpPr>
         <p:spPr>
           <a:xfrm>
-            <a:off x="1152144" y="2927565"/>
-            <a:ext cx="10536631" cy="678141"/>
+            <a:off x="1152144" y="3062249"/>
+            <a:ext cx="10536631" cy="770153"/>
           </a:xfrm>
           <a:prstGeom prst="rect">
             <a:avLst/>
@@ -30216,7 +30216,7 @@
               </a:spcBef>
             </a:pPr>
             <a:r>
-              <a:rPr sz="1300" b="0" lang="ja-JP" altLang="en-US">
+              <a:rPr sz="1800" b="0" lang="ja-JP" altLang="en-US">
                 <a:solidFill>
                   <a:srgbClr val="44546A"/>
                 </a:solidFill>
@@ -30374,7 +30374,7 @@
               </a:spcBef>
             </a:pPr>
             <a:r>
-              <a:rPr sz="1050" b="1" spc="300" lang="ja-JP" altLang="en-US">
+              <a:rPr sz="1200" b="1" spc="300" lang="ja-JP" altLang="en-US">
                 <a:solidFill>
                   <a:srgbClr val="194671"/>
                 </a:solidFill>
@@ -30396,11 +30396,11 @@
         <p:spPr>
           <a:xfrm>
             <a:off x="502920" y="1298448"/>
-            <a:ext cx="5464911" cy="1550212"/>
+            <a:ext cx="5464911" cy="1711451"/>
           </a:xfrm>
           <a:prstGeom prst="roundRect">
             <a:avLst>
-              <a:gd name="adj" fmla="val 3539"/>
+              <a:gd name="adj" fmla="val 3205"/>
             </a:avLst>
           </a:prstGeom>
           <a:solidFill>
@@ -30449,7 +30449,7 @@
         </p:nvSpPr>
         <p:spPr>
           <a:xfrm>
-            <a:off x="1015349" y="2821228"/>
+            <a:off x="1015349" y="2982467"/>
             <a:ext cx="457748" cy="301751"/>
           </a:xfrm>
           <a:custGeom>
@@ -30517,7 +30517,7 @@
         </p:nvSpPr>
         <p:spPr>
           <a:xfrm>
-            <a:off x="1015349" y="2821228"/>
+            <a:off x="1015349" y="2982467"/>
             <a:ext cx="457748" cy="301751"/>
           </a:xfrm>
           <a:custGeom>
@@ -30621,7 +30621,7 @@
         <p:spPr>
           <a:xfrm>
             <a:off x="813816" y="1810512"/>
-            <a:ext cx="4843119" cy="789432"/>
+            <a:ext cx="4843119" cy="950671"/>
           </a:xfrm>
           <a:prstGeom prst="rect">
             <a:avLst/>
@@ -30641,7 +30641,7 @@
               </a:spcBef>
             </a:pPr>
             <a:r>
-              <a:rPr sz="1600" b="0" lang="ja-JP" altLang="en-US">
+              <a:rPr sz="2000" b="0" lang="ja-JP" altLang="en-US">
                 <a:solidFill>
                   <a:srgbClr val="1F4E79"/>
                 </a:solidFill>
@@ -30662,7 +30662,7 @@
         </p:nvSpPr>
         <p:spPr>
           <a:xfrm>
-            <a:off x="777240" y="3232708"/>
+            <a:off x="777240" y="3393947"/>
             <a:ext cx="566928" cy="566928"/>
           </a:xfrm>
           <a:prstGeom prst="ellipse">
@@ -30706,7 +30706,7 @@
         </p:nvSpPr>
         <p:spPr>
           <a:xfrm>
-            <a:off x="862279" y="3306409"/>
+            <a:off x="862279" y="3467648"/>
             <a:ext cx="396849" cy="396849"/>
           </a:xfrm>
           <a:custGeom>
@@ -30798,7 +30798,7 @@
         </p:nvSpPr>
         <p:spPr>
           <a:xfrm>
-            <a:off x="1490472" y="3250996"/>
+            <a:off x="1490472" y="3412235"/>
             <a:ext cx="4477359" cy="292608"/>
           </a:xfrm>
           <a:prstGeom prst="rect">
@@ -30819,7 +30819,7 @@
               </a:spcBef>
             </a:pPr>
             <a:r>
-              <a:rPr sz="1300" b="1" lang="ja-JP" altLang="en-US">
+              <a:rPr sz="1650" b="1" lang="ja-JP" altLang="en-US">
                 <a:solidFill>
                   <a:srgbClr val="1F4E79"/>
                 </a:solidFill>
@@ -30840,7 +30840,7 @@
         </p:nvSpPr>
         <p:spPr>
           <a:xfrm>
-            <a:off x="1490472" y="3534460"/>
+            <a:off x="1490472" y="3695699"/>
             <a:ext cx="4477359" cy="246888"/>
           </a:xfrm>
           <a:prstGeom prst="rect">
@@ -30861,7 +30861,7 @@
               </a:spcBef>
             </a:pPr>
             <a:r>
-              <a:rPr sz="1050" b="0" lang="ja-JP" altLang="en-US">
+              <a:rPr sz="1200" b="0" lang="ja-JP" altLang="en-US">
                 <a:solidFill>
                   <a:srgbClr val="5F6F84"/>
                 </a:solidFill>
@@ -30883,11 +30883,11 @@
         <p:spPr>
           <a:xfrm>
             <a:off x="6223863" y="1298448"/>
-            <a:ext cx="5464911" cy="1550212"/>
+            <a:ext cx="5464911" cy="1711451"/>
           </a:xfrm>
           <a:prstGeom prst="roundRect">
             <a:avLst>
-              <a:gd name="adj" fmla="val 3539"/>
+              <a:gd name="adj" fmla="val 3205"/>
             </a:avLst>
           </a:prstGeom>
           <a:solidFill>
@@ -30936,7 +30936,7 @@
         </p:nvSpPr>
         <p:spPr>
           <a:xfrm>
-            <a:off x="6736293" y="2821228"/>
+            <a:off x="6736293" y="2982467"/>
             <a:ext cx="457748" cy="301751"/>
           </a:xfrm>
           <a:custGeom>
@@ -31004,7 +31004,7 @@
         </p:nvSpPr>
         <p:spPr>
           <a:xfrm>
-            <a:off x="6736293" y="2821228"/>
+            <a:off x="6736293" y="2982467"/>
             <a:ext cx="457748" cy="301751"/>
           </a:xfrm>
           <a:custGeom>
@@ -31108,7 +31108,7 @@
         <p:spPr>
           <a:xfrm>
             <a:off x="6534759" y="1810512"/>
-            <a:ext cx="4843119" cy="789432"/>
+            <a:ext cx="4843119" cy="950671"/>
           </a:xfrm>
           <a:prstGeom prst="rect">
             <a:avLst/>
@@ -31128,7 +31128,7 @@
               </a:spcBef>
             </a:pPr>
             <a:r>
-              <a:rPr sz="1600" b="0" lang="ja-JP" altLang="en-US">
+              <a:rPr sz="2000" b="0" lang="ja-JP" altLang="en-US">
                 <a:solidFill>
                   <a:srgbClr val="1F4E79"/>
                 </a:solidFill>
@@ -31149,7 +31149,7 @@
         </p:nvSpPr>
         <p:spPr>
           <a:xfrm>
-            <a:off x="6498183" y="3232708"/>
+            <a:off x="6498183" y="3393947"/>
             <a:ext cx="566928" cy="566928"/>
           </a:xfrm>
           <a:prstGeom prst="ellipse">
@@ -31193,7 +31193,7 @@
         </p:nvSpPr>
         <p:spPr>
           <a:xfrm>
-            <a:off x="6583222" y="3306409"/>
+            <a:off x="6583222" y="3467648"/>
             <a:ext cx="396849" cy="396849"/>
           </a:xfrm>
           <a:custGeom>
@@ -31285,7 +31285,7 @@
         </p:nvSpPr>
         <p:spPr>
           <a:xfrm>
-            <a:off x="7211415" y="3250996"/>
+            <a:off x="7211415" y="3412235"/>
             <a:ext cx="4477359" cy="292608"/>
           </a:xfrm>
           <a:prstGeom prst="rect">
@@ -31306,7 +31306,7 @@
               </a:spcBef>
             </a:pPr>
             <a:r>
-              <a:rPr sz="1300" b="1" lang="ja-JP" altLang="en-US">
+              <a:rPr sz="1650" b="1" lang="ja-JP" altLang="en-US">
                 <a:solidFill>
                   <a:srgbClr val="1F4E79"/>
                 </a:solidFill>
@@ -31327,7 +31327,7 @@
         </p:nvSpPr>
         <p:spPr>
           <a:xfrm>
-            <a:off x="7211415" y="3534460"/>
+            <a:off x="7211415" y="3695699"/>
             <a:ext cx="4477359" cy="246888"/>
           </a:xfrm>
           <a:prstGeom prst="rect">
@@ -31348,7 +31348,7 @@
               </a:spcBef>
             </a:pPr>
             <a:r>
-              <a:rPr sz="1050" b="0" lang="ja-JP" altLang="en-US">
+              <a:rPr sz="1200" b="0" lang="ja-JP" altLang="en-US">
                 <a:solidFill>
                   <a:srgbClr val="5F6F84"/>
                 </a:solidFill>
